--- a/ass5_output/Residential_Intelligence_Project_Progress_READY_2026-10-18.pptx
+++ b/ass5_output/Residential_Intelligence_Project_Progress_READY_2026-10-18.pptx
@@ -4351,7 +4351,7 @@
               </a:defRPr>
             </a:pPr>
             <a:r>
-              <a:t>ความคืบหน้าที่เพิ่มจากกรอบแนวคิด</a:t>
+              <a:t>ภาพ 59 ใบถูกใช้ทำอะไรบ้าง?</a:t>
             </a:r>
           </a:p>
         </p:txBody>
@@ -4390,7 +4390,7 @@
               </a:defRPr>
             </a:pPr>
             <a:r>
-              <a:t>รับภาพจริงและคัดชุดใบซื้อสินค้าเพื่อเริ่มการทดลอง</a:t>
+              <a:t>ตรวจข้อมูลภาพครบชุด แล้วแยกภาพตามความเหมาะสมของการทดลอง YOLO</a:t>
             </a:r>
           </a:p>
         </p:txBody>
@@ -4779,31 +4779,113 @@
       </p:cxnSp>
       <p:sp>
         <p:nvSpPr>
-          <p:cNvPr id="14" name="TextBox 13"/>
-          <p:cNvSpPr txBox="1"/>
-          <p:nvPr/>
-        </p:nvSpPr>
-        <p:spPr>
-          <a:xfrm>
-            <a:off x="832104" y="3712463"/>
-            <a:ext cx="10424160" cy="868680"/>
-          </a:xfrm>
-          <a:prstGeom prst="rect">
-            <a:avLst/>
-          </a:prstGeom>
-          <a:noFill/>
-        </p:spPr>
-        <p:txBody>
-          <a:bodyPr wrap="square" lIns="18288" rIns="18288" tIns="0" bIns="0">
-            <a:spAutoFit/>
-          </a:bodyPr>
-          <a:lstStyle/>
-          <a:p>
-            <a:pPr algn="l">
-              <a:spcAft>
-                <a:spcPts val="400"/>
-              </a:spcAft>
-              <a:defRPr sz="2100" b="1">
+          <p:cNvPr id="14" name="Rounded Rectangle 13"/>
+          <p:cNvSpPr/>
+          <p:nvPr/>
+        </p:nvSpPr>
+        <p:spPr>
+          <a:xfrm>
+            <a:off x="777240" y="3685032"/>
+            <a:ext cx="3456432" cy="1335024"/>
+          </a:xfrm>
+          <a:prstGeom prst="roundRect">
+            <a:avLst/>
+          </a:prstGeom>
+          <a:solidFill>
+            <a:srgbClr val="F2F6F8"/>
+          </a:solidFill>
+          <a:ln>
+            <a:noFill/>
+          </a:ln>
+        </p:spPr>
+        <p:style>
+          <a:lnRef idx="1">
+            <a:schemeClr val="accent1"/>
+          </a:lnRef>
+          <a:fillRef idx="3">
+            <a:schemeClr val="accent1"/>
+          </a:fillRef>
+          <a:effectRef idx="2">
+            <a:schemeClr val="accent1"/>
+          </a:effectRef>
+          <a:fontRef idx="minor">
+            <a:schemeClr val="lt1"/>
+          </a:fontRef>
+        </p:style>
+        <p:txBody>
+          <a:bodyPr rtlCol="0" anchor="ctr"/>
+          <a:lstStyle/>
+          <a:p>
+            <a:pPr algn="ctr"/>
+          </a:p>
+        </p:txBody>
+      </p:sp>
+      <p:sp>
+        <p:nvSpPr>
+          <p:cNvPr id="15" name="TextBox 14"/>
+          <p:cNvSpPr txBox="1"/>
+          <p:nvPr/>
+        </p:nvSpPr>
+        <p:spPr>
+          <a:xfrm>
+            <a:off x="932688" y="3840480"/>
+            <a:ext cx="731520" cy="521207"/>
+          </a:xfrm>
+          <a:prstGeom prst="rect">
+            <a:avLst/>
+          </a:prstGeom>
+          <a:noFill/>
+        </p:spPr>
+        <p:txBody>
+          <a:bodyPr wrap="square" lIns="18288" rIns="18288" tIns="0" bIns="0">
+            <a:spAutoFit/>
+          </a:bodyPr>
+          <a:lstStyle/>
+          <a:p>
+            <a:pPr algn="l">
+              <a:spcAft>
+                <a:spcPts val="400"/>
+              </a:spcAft>
+              <a:defRPr sz="3000" b="1">
+                <a:solidFill>
+                  <a:srgbClr val="006289"/>
+                </a:solidFill>
+                <a:latin typeface="Tahoma"/>
+              </a:defRPr>
+            </a:pPr>
+            <a:r>
+              <a:t>48</a:t>
+            </a:r>
+          </a:p>
+        </p:txBody>
+      </p:sp>
+      <p:sp>
+        <p:nvSpPr>
+          <p:cNvPr id="16" name="TextBox 15"/>
+          <p:cNvSpPr txBox="1"/>
+          <p:nvPr/>
+        </p:nvSpPr>
+        <p:spPr>
+          <a:xfrm>
+            <a:off x="1737360" y="3785615"/>
+            <a:ext cx="2340863" cy="365760"/>
+          </a:xfrm>
+          <a:prstGeom prst="rect">
+            <a:avLst/>
+          </a:prstGeom>
+          <a:noFill/>
+        </p:spPr>
+        <p:txBody>
+          <a:bodyPr wrap="square" lIns="18288" rIns="18288" tIns="0" bIns="0">
+            <a:spAutoFit/>
+          </a:bodyPr>
+          <a:lstStyle/>
+          <a:p>
+            <a:pPr algn="l">
+              <a:spcAft>
+                <a:spcPts val="400"/>
+              </a:spcAft>
+              <a:defRPr sz="1900" b="1">
                 <a:solidFill>
                   <a:srgbClr val="1D2A5D"/>
                 </a:solidFill>
@@ -4811,38 +4893,436 @@
               </a:defRPr>
             </a:pPr>
             <a:r>
-              <a:t>จาก 59 ภาพ แยกทดลองตัวตรวจจับ 48 ภาพฉากเดิม (38 ฝึก / 10 ตรวจ) และ 6 ภาพต่างฉาก; อีก 5 ภาพกันออก</a:t>
-            </a:r>
-          </a:p>
-        </p:txBody>
-      </p:sp>
-      <p:sp>
-        <p:nvSpPr>
-          <p:cNvPr id="15" name="TextBox 14"/>
-          <p:cNvSpPr txBox="1"/>
-          <p:nvPr/>
-        </p:nvSpPr>
-        <p:spPr>
-          <a:xfrm>
-            <a:off x="832104" y="5020056"/>
-            <a:ext cx="10149840" cy="612648"/>
-          </a:xfrm>
-          <a:prstGeom prst="rect">
-            <a:avLst/>
-          </a:prstGeom>
-          <a:noFill/>
-        </p:spPr>
-        <p:txBody>
-          <a:bodyPr wrap="square" lIns="18288" rIns="18288" tIns="0" bIns="0">
-            <a:spAutoFit/>
-          </a:bodyPr>
-          <a:lstStyle/>
-          <a:p>
-            <a:pPr algn="l">
-              <a:spcAft>
-                <a:spcPts val="400"/>
-              </a:spcAft>
-              <a:defRPr sz="1600" b="0">
+              <a:t>ภาพชุดแรก</a:t>
+            </a:r>
+          </a:p>
+        </p:txBody>
+      </p:sp>
+      <p:sp>
+        <p:nvSpPr>
+          <p:cNvPr id="17" name="TextBox 16"/>
+          <p:cNvSpPr txBox="1"/>
+          <p:nvPr/>
+        </p:nvSpPr>
+        <p:spPr>
+          <a:xfrm>
+            <a:off x="1737360" y="4297680"/>
+            <a:ext cx="2331720" cy="448056"/>
+          </a:xfrm>
+          <a:prstGeom prst="rect">
+            <a:avLst/>
+          </a:prstGeom>
+          <a:noFill/>
+        </p:spPr>
+        <p:txBody>
+          <a:bodyPr wrap="square" lIns="18288" rIns="18288" tIns="0" bIns="0">
+            <a:spAutoFit/>
+          </a:bodyPr>
+          <a:lstStyle/>
+          <a:p>
+            <a:pPr algn="l">
+              <a:spcAft>
+                <a:spcPts val="400"/>
+              </a:spcAft>
+              <a:defRPr sz="1500" b="0">
+                <a:solidFill>
+                  <a:srgbClr val="1D2F3E"/>
+                </a:solidFill>
+                <a:latin typeface="Tahoma"/>
+              </a:defRPr>
+            </a:pPr>
+            <a:r>
+              <a:t>38 ฝึก + 10 ตรวจ</a:t>
+            </a:r>
+          </a:p>
+        </p:txBody>
+      </p:sp>
+      <p:sp>
+        <p:nvSpPr>
+          <p:cNvPr id="18" name="Rounded Rectangle 17"/>
+          <p:cNvSpPr/>
+          <p:nvPr/>
+        </p:nvSpPr>
+        <p:spPr>
+          <a:xfrm>
+            <a:off x="4370832" y="3685032"/>
+            <a:ext cx="3456432" cy="1335024"/>
+          </a:xfrm>
+          <a:prstGeom prst="roundRect">
+            <a:avLst/>
+          </a:prstGeom>
+          <a:solidFill>
+            <a:srgbClr val="F2F6F8"/>
+          </a:solidFill>
+          <a:ln>
+            <a:noFill/>
+          </a:ln>
+        </p:spPr>
+        <p:style>
+          <a:lnRef idx="1">
+            <a:schemeClr val="accent1"/>
+          </a:lnRef>
+          <a:fillRef idx="3">
+            <a:schemeClr val="accent1"/>
+          </a:fillRef>
+          <a:effectRef idx="2">
+            <a:schemeClr val="accent1"/>
+          </a:effectRef>
+          <a:fontRef idx="minor">
+            <a:schemeClr val="lt1"/>
+          </a:fontRef>
+        </p:style>
+        <p:txBody>
+          <a:bodyPr rtlCol="0" anchor="ctr"/>
+          <a:lstStyle/>
+          <a:p>
+            <a:pPr algn="ctr"/>
+          </a:p>
+        </p:txBody>
+      </p:sp>
+      <p:sp>
+        <p:nvSpPr>
+          <p:cNvPr id="19" name="TextBox 18"/>
+          <p:cNvSpPr txBox="1"/>
+          <p:nvPr/>
+        </p:nvSpPr>
+        <p:spPr>
+          <a:xfrm>
+            <a:off x="4526280" y="3840480"/>
+            <a:ext cx="731520" cy="521207"/>
+          </a:xfrm>
+          <a:prstGeom prst="rect">
+            <a:avLst/>
+          </a:prstGeom>
+          <a:noFill/>
+        </p:spPr>
+        <p:txBody>
+          <a:bodyPr wrap="square" lIns="18288" rIns="18288" tIns="0" bIns="0">
+            <a:spAutoFit/>
+          </a:bodyPr>
+          <a:lstStyle/>
+          <a:p>
+            <a:pPr algn="l">
+              <a:spcAft>
+                <a:spcPts val="400"/>
+              </a:spcAft>
+              <a:defRPr sz="3000" b="1">
+                <a:solidFill>
+                  <a:srgbClr val="006289"/>
+                </a:solidFill>
+                <a:latin typeface="Tahoma"/>
+              </a:defRPr>
+            </a:pPr>
+            <a:r>
+              <a:t>6</a:t>
+            </a:r>
+          </a:p>
+        </p:txBody>
+      </p:sp>
+      <p:sp>
+        <p:nvSpPr>
+          <p:cNvPr id="20" name="TextBox 19"/>
+          <p:cNvSpPr txBox="1"/>
+          <p:nvPr/>
+        </p:nvSpPr>
+        <p:spPr>
+          <a:xfrm>
+            <a:off x="5330952" y="3785615"/>
+            <a:ext cx="2340863" cy="365760"/>
+          </a:xfrm>
+          <a:prstGeom prst="rect">
+            <a:avLst/>
+          </a:prstGeom>
+          <a:noFill/>
+        </p:spPr>
+        <p:txBody>
+          <a:bodyPr wrap="square" lIns="18288" rIns="18288" tIns="0" bIns="0">
+            <a:spAutoFit/>
+          </a:bodyPr>
+          <a:lstStyle/>
+          <a:p>
+            <a:pPr algn="l">
+              <a:spcAft>
+                <a:spcPts val="400"/>
+              </a:spcAft>
+              <a:defRPr sz="1900" b="1">
+                <a:solidFill>
+                  <a:srgbClr val="1D2A5D"/>
+                </a:solidFill>
+                <a:latin typeface="Tahoma"/>
+              </a:defRPr>
+            </a:pPr>
+            <a:r>
+              <a:t>ภาพฉากใหม่</a:t>
+            </a:r>
+          </a:p>
+        </p:txBody>
+      </p:sp>
+      <p:sp>
+        <p:nvSpPr>
+          <p:cNvPr id="21" name="TextBox 20"/>
+          <p:cNvSpPr txBox="1"/>
+          <p:nvPr/>
+        </p:nvSpPr>
+        <p:spPr>
+          <a:xfrm>
+            <a:off x="5330952" y="4297680"/>
+            <a:ext cx="2331720" cy="448056"/>
+          </a:xfrm>
+          <a:prstGeom prst="rect">
+            <a:avLst/>
+          </a:prstGeom>
+          <a:noFill/>
+        </p:spPr>
+        <p:txBody>
+          <a:bodyPr wrap="square" lIns="18288" rIns="18288" tIns="0" bIns="0">
+            <a:spAutoFit/>
+          </a:bodyPr>
+          <a:lstStyle/>
+          <a:p>
+            <a:pPr algn="l">
+              <a:spcAft>
+                <a:spcPts val="400"/>
+              </a:spcAft>
+              <a:defRPr sz="1500" b="0">
+                <a:solidFill>
+                  <a:srgbClr val="1D2F3E"/>
+                </a:solidFill>
+                <a:latin typeface="Tahoma"/>
+              </a:defRPr>
+            </a:pPr>
+            <a:r>
+              <a:t>ทดสอบโมเดลเดิม</a:t>
+            </a:r>
+          </a:p>
+        </p:txBody>
+      </p:sp>
+      <p:sp>
+        <p:nvSpPr>
+          <p:cNvPr id="22" name="Rounded Rectangle 21"/>
+          <p:cNvSpPr/>
+          <p:nvPr/>
+        </p:nvSpPr>
+        <p:spPr>
+          <a:xfrm>
+            <a:off x="7964424" y="3685032"/>
+            <a:ext cx="3456432" cy="1335024"/>
+          </a:xfrm>
+          <a:prstGeom prst="roundRect">
+            <a:avLst/>
+          </a:prstGeom>
+          <a:solidFill>
+            <a:srgbClr val="F2F6F8"/>
+          </a:solidFill>
+          <a:ln>
+            <a:noFill/>
+          </a:ln>
+        </p:spPr>
+        <p:style>
+          <a:lnRef idx="1">
+            <a:schemeClr val="accent1"/>
+          </a:lnRef>
+          <a:fillRef idx="3">
+            <a:schemeClr val="accent1"/>
+          </a:fillRef>
+          <a:effectRef idx="2">
+            <a:schemeClr val="accent1"/>
+          </a:effectRef>
+          <a:fontRef idx="minor">
+            <a:schemeClr val="lt1"/>
+          </a:fontRef>
+        </p:style>
+        <p:txBody>
+          <a:bodyPr rtlCol="0" anchor="ctr"/>
+          <a:lstStyle/>
+          <a:p>
+            <a:pPr algn="ctr"/>
+          </a:p>
+        </p:txBody>
+      </p:sp>
+      <p:sp>
+        <p:nvSpPr>
+          <p:cNvPr id="23" name="TextBox 22"/>
+          <p:cNvSpPr txBox="1"/>
+          <p:nvPr/>
+        </p:nvSpPr>
+        <p:spPr>
+          <a:xfrm>
+            <a:off x="8119872" y="3840480"/>
+            <a:ext cx="731520" cy="521207"/>
+          </a:xfrm>
+          <a:prstGeom prst="rect">
+            <a:avLst/>
+          </a:prstGeom>
+          <a:noFill/>
+        </p:spPr>
+        <p:txBody>
+          <a:bodyPr wrap="square" lIns="18288" rIns="18288" tIns="0" bIns="0">
+            <a:spAutoFit/>
+          </a:bodyPr>
+          <a:lstStyle/>
+          <a:p>
+            <a:pPr algn="l">
+              <a:spcAft>
+                <a:spcPts val="400"/>
+              </a:spcAft>
+              <a:defRPr sz="3000" b="1">
+                <a:solidFill>
+                  <a:srgbClr val="C05C2B"/>
+                </a:solidFill>
+                <a:latin typeface="Tahoma"/>
+              </a:defRPr>
+            </a:pPr>
+            <a:r>
+              <a:t>5</a:t>
+            </a:r>
+          </a:p>
+        </p:txBody>
+      </p:sp>
+      <p:sp>
+        <p:nvSpPr>
+          <p:cNvPr id="24" name="TextBox 23"/>
+          <p:cNvSpPr txBox="1"/>
+          <p:nvPr/>
+        </p:nvSpPr>
+        <p:spPr>
+          <a:xfrm>
+            <a:off x="8924544" y="3785615"/>
+            <a:ext cx="2340863" cy="365760"/>
+          </a:xfrm>
+          <a:prstGeom prst="rect">
+            <a:avLst/>
+          </a:prstGeom>
+          <a:noFill/>
+        </p:spPr>
+        <p:txBody>
+          <a:bodyPr wrap="square" lIns="18288" rIns="18288" tIns="0" bIns="0">
+            <a:spAutoFit/>
+          </a:bodyPr>
+          <a:lstStyle/>
+          <a:p>
+            <a:pPr algn="l">
+              <a:spcAft>
+                <a:spcPts val="400"/>
+              </a:spcAft>
+              <a:defRPr sz="1900" b="1">
+                <a:solidFill>
+                  <a:srgbClr val="1D2A5D"/>
+                </a:solidFill>
+                <a:latin typeface="Tahoma"/>
+              </a:defRPr>
+            </a:pPr>
+            <a:r>
+              <a:t>ภาพกันออก</a:t>
+            </a:r>
+          </a:p>
+        </p:txBody>
+      </p:sp>
+      <p:sp>
+        <p:nvSpPr>
+          <p:cNvPr id="25" name="TextBox 24"/>
+          <p:cNvSpPr txBox="1"/>
+          <p:nvPr/>
+        </p:nvSpPr>
+        <p:spPr>
+          <a:xfrm>
+            <a:off x="8924544" y="4297680"/>
+            <a:ext cx="2331720" cy="448056"/>
+          </a:xfrm>
+          <a:prstGeom prst="rect">
+            <a:avLst/>
+          </a:prstGeom>
+          <a:noFill/>
+        </p:spPr>
+        <p:txBody>
+          <a:bodyPr wrap="square" lIns="18288" rIns="18288" tIns="0" bIns="0">
+            <a:spAutoFit/>
+          </a:bodyPr>
+          <a:lstStyle/>
+          <a:p>
+            <a:pPr algn="l">
+              <a:spcAft>
+                <a:spcPts val="400"/>
+              </a:spcAft>
+              <a:defRPr sz="1500" b="0">
+                <a:solidFill>
+                  <a:srgbClr val="1D2F3E"/>
+                </a:solidFill>
+                <a:latin typeface="Tahoma"/>
+              </a:defRPr>
+            </a:pPr>
+            <a:r>
+              <a:t>หลายเอกสาร/เสี่ยงใกล้ซ้ำ</a:t>
+            </a:r>
+          </a:p>
+        </p:txBody>
+      </p:sp>
+      <p:sp>
+        <p:nvSpPr>
+          <p:cNvPr id="26" name="TextBox 25"/>
+          <p:cNvSpPr txBox="1"/>
+          <p:nvPr/>
+        </p:nvSpPr>
+        <p:spPr>
+          <a:xfrm>
+            <a:off x="795528" y="5413248"/>
+            <a:ext cx="10698480" cy="502920"/>
+          </a:xfrm>
+          <a:prstGeom prst="rect">
+            <a:avLst/>
+          </a:prstGeom>
+          <a:noFill/>
+        </p:spPr>
+        <p:txBody>
+          <a:bodyPr wrap="square" lIns="18288" rIns="18288" tIns="0" bIns="0">
+            <a:spAutoFit/>
+          </a:bodyPr>
+          <a:lstStyle/>
+          <a:p>
+            <a:pPr algn="l">
+              <a:spcAft>
+                <a:spcPts val="400"/>
+              </a:spcAft>
+              <a:defRPr sz="1700" b="1">
+                <a:solidFill>
+                  <a:srgbClr val="1D2A5D"/>
+                </a:solidFill>
+                <a:latin typeface="Tahoma"/>
+              </a:defRPr>
+            </a:pPr>
+            <a:r>
+              <a:t>ตรวจข้อมูล/ทิศภาพครบ 59 ใบ; คะแนน YOLO หน้าถัดไปมาจากภาพตรวจ 10 + 6 ใบ ไม่ใช่คะแนนทั้ง 59 ใบ</a:t>
+            </a:r>
+          </a:p>
+        </p:txBody>
+      </p:sp>
+      <p:sp>
+        <p:nvSpPr>
+          <p:cNvPr id="27" name="TextBox 26"/>
+          <p:cNvSpPr txBox="1"/>
+          <p:nvPr/>
+        </p:nvSpPr>
+        <p:spPr>
+          <a:xfrm>
+            <a:off x="804672" y="5925312"/>
+            <a:ext cx="10241280" cy="320040"/>
+          </a:xfrm>
+          <a:prstGeom prst="rect">
+            <a:avLst/>
+          </a:prstGeom>
+          <a:noFill/>
+        </p:spPr>
+        <p:txBody>
+          <a:bodyPr wrap="square" lIns="18288" rIns="18288" tIns="0" bIns="0">
+            <a:spAutoFit/>
+          </a:bodyPr>
+          <a:lstStyle/>
+          <a:p>
+            <a:pPr algn="l">
+              <a:spcAft>
+                <a:spcPts val="400"/>
+              </a:spcAft>
+              <a:defRPr sz="1400" b="0">
                 <a:solidFill>
                   <a:srgbClr val="576975"/>
                 </a:solidFill>
@@ -4850,7 +5330,7 @@
               </a:defRPr>
             </a:pPr>
             <a:r>
-              <a:t>จำนวนภาพไม่เท่ากับจำนวนธุรกรรมอิสระ; ประเภทภาพและกรอบอ้างอิงยังต้องให้ผู้วิจัยตรวจซ้ำ</a:t>
+              <a:t>59 ภาพยังไม่เท่ากับ 59 ธุรกรรมอิสระ</a:t>
             </a:r>
           </a:p>
         </p:txBody>
@@ -4915,7 +5395,7 @@
               </a:defRPr>
             </a:pPr>
             <a:r>
-              <a:t>สำรวจภาพใบซื้อสินค้า 59 ภาพ</a:t>
+              <a:t>ตรวจภาพใบซื้อสินค้า 59 ภาพครบชุด</a:t>
             </a:r>
           </a:p>
         </p:txBody>
@@ -4954,7 +5434,7 @@
               </a:defRPr>
             </a:pPr>
             <a:r>
-              <a:t>ผล EDA ช่วยระบุความหลากหลายที่ต้องเพิ่มก่อนทดสอบจริง</a:t>
+              <a:t>ข้อมูลภาพและทิศตัวหนังสือครบทุกภาพ; การถอดชื่อสินค้ายังมีข้อจำกัด</a:t>
             </a:r>
           </a:p>
         </p:txBody>
@@ -5143,33 +5623,33 @@
         </p:nvSpPr>
         <p:spPr>
           <a:xfrm>
-            <a:off x="758952" y="5742432"/>
-            <a:ext cx="10744200" cy="310896"/>
-          </a:xfrm>
-          <a:prstGeom prst="rect">
-            <a:avLst/>
-          </a:prstGeom>
-          <a:noFill/>
-        </p:spPr>
-        <p:txBody>
-          <a:bodyPr wrap="square" lIns="18288" rIns="18288" tIns="0" bIns="0">
-            <a:spAutoFit/>
-          </a:bodyPr>
-          <a:lstStyle/>
-          <a:p>
-            <a:pPr algn="l">
-              <a:spcAft>
-                <a:spcPts val="400"/>
-              </a:spcAft>
-              <a:defRPr sz="1400" b="0">
-                <a:solidFill>
-                  <a:srgbClr val="576975"/>
-                </a:solidFill>
-                <a:latin typeface="Tahoma"/>
-              </a:defRPr>
-            </a:pPr>
-            <a:r>
-              <a:t>ตรวจทิศตัวหนังสือครบ 59 ภาพ: อ่านตรงเดิม 41 / ตะแคง 18; ค่าความสว่างรวมพื้นหลัง</a:t>
+            <a:off x="758952" y="5733288"/>
+            <a:ext cx="10744200" cy="347472"/>
+          </a:xfrm>
+          <a:prstGeom prst="rect">
+            <a:avLst/>
+          </a:prstGeom>
+          <a:noFill/>
+        </p:spPr>
+        <p:txBody>
+          <a:bodyPr wrap="square" lIns="18288" rIns="18288" tIns="0" bIns="0">
+            <a:spAutoFit/>
+          </a:bodyPr>
+          <a:lstStyle/>
+          <a:p>
+            <a:pPr algn="l">
+              <a:spcAft>
+                <a:spcPts val="400"/>
+              </a:spcAft>
+              <a:defRPr sz="1600" b="1">
+                <a:solidFill>
+                  <a:srgbClr val="1D2A5D"/>
+                </a:solidFill>
+                <a:latin typeface="Tahoma"/>
+              </a:defRPr>
+            </a:pPr>
+            <a:r>
+              <a:t>ตรวจทั้ง 59 ภาพแล้ว: ชื่อสินค้าถอดครบ 12 | อ่านได้บางส่วน 45 | ไม่มีบรรทัดชื่อ 2</a:t>
             </a:r>
           </a:p>
         </p:txBody>
@@ -5234,7 +5714,7 @@
               </a:defRPr>
             </a:pPr>
             <a:r>
-              <a:t>ผลนำร่อง YOLOv8n: สองชุดภาพให้คะแนนต่างกัน</a:t>
+              <a:t>ตรวจภาพทั้ง 59 ใบแล้ว ได้ข้อมูลชื่อสินค้าแค่ไหน?</a:t>
             </a:r>
           </a:p>
         </p:txBody>
@@ -5273,7 +5753,7 @@
               </a:defRPr>
             </a:pPr>
             <a:r>
-              <a:t>โมเดลเดียวกัน ฝึกบน PC CPU; mAP@0.5 วัดการตรวจจับกรอบใบซื้อสินค้า</a:t>
+              <a:t>นับเฉพาะชื่อสินค้าบนบรรทัดรายการ; ตรวจด้วยตาครั้งแรกทุกภาพ</a:t>
             </a:r>
           </a:p>
         </p:txBody>
@@ -5393,176 +5873,20 @@
       </p:sp>
       <p:sp>
         <p:nvSpPr>
-          <p:cNvPr id="7" name="TextBox 6"/>
-          <p:cNvSpPr txBox="1"/>
-          <p:nvPr/>
-        </p:nvSpPr>
-        <p:spPr>
-          <a:xfrm>
-            <a:off x="877824" y="1709928"/>
-            <a:ext cx="4297680" cy="1024128"/>
-          </a:xfrm>
-          <a:prstGeom prst="rect">
-            <a:avLst/>
-          </a:prstGeom>
-          <a:noFill/>
-        </p:spPr>
-        <p:txBody>
-          <a:bodyPr wrap="square" lIns="18288" rIns="18288" tIns="0" bIns="0">
-            <a:spAutoFit/>
-          </a:bodyPr>
-          <a:lstStyle/>
-          <a:p>
-            <a:pPr algn="l">
-              <a:spcAft>
-                <a:spcPts val="400"/>
-              </a:spcAft>
-              <a:defRPr sz="5000" b="1">
-                <a:solidFill>
-                  <a:srgbClr val="137E9A"/>
-                </a:solidFill>
-                <a:latin typeface="Tahoma"/>
-              </a:defRPr>
-            </a:pPr>
-            <a:r>
-              <a:t>0.928</a:t>
-            </a:r>
-          </a:p>
-        </p:txBody>
-      </p:sp>
-      <p:sp>
-        <p:nvSpPr>
-          <p:cNvPr id="8" name="TextBox 7"/>
-          <p:cNvSpPr txBox="1"/>
-          <p:nvPr/>
-        </p:nvSpPr>
-        <p:spPr>
-          <a:xfrm>
-            <a:off x="905256" y="2770632"/>
-            <a:ext cx="4389120" cy="411480"/>
-          </a:xfrm>
-          <a:prstGeom prst="rect">
-            <a:avLst/>
-          </a:prstGeom>
-          <a:noFill/>
-        </p:spPr>
-        <p:txBody>
-          <a:bodyPr wrap="square" lIns="18288" rIns="18288" tIns="0" bIns="0">
-            <a:spAutoFit/>
-          </a:bodyPr>
-          <a:lstStyle/>
-          <a:p>
-            <a:pPr algn="l">
-              <a:spcAft>
-                <a:spcPts val="400"/>
-              </a:spcAft>
-              <a:defRPr sz="2000" b="1">
-                <a:solidFill>
-                  <a:srgbClr val="1D2F3E"/>
-                </a:solidFill>
-                <a:latin typeface="Tahoma"/>
-              </a:defRPr>
-            </a:pPr>
-            <a:r>
-              <a:t>ตรวจ 10 ภาพจากชุดแรก</a:t>
-            </a:r>
-          </a:p>
-        </p:txBody>
-      </p:sp>
-      <p:sp>
-        <p:nvSpPr>
-          <p:cNvPr id="9" name="TextBox 8"/>
-          <p:cNvSpPr txBox="1"/>
-          <p:nvPr/>
-        </p:nvSpPr>
-        <p:spPr>
-          <a:xfrm>
-            <a:off x="6455664" y="1709928"/>
-            <a:ext cx="4389120" cy="1024128"/>
-          </a:xfrm>
-          <a:prstGeom prst="rect">
-            <a:avLst/>
-          </a:prstGeom>
-          <a:noFill/>
-        </p:spPr>
-        <p:txBody>
-          <a:bodyPr wrap="square" lIns="18288" rIns="18288" tIns="0" bIns="0">
-            <a:spAutoFit/>
-          </a:bodyPr>
-          <a:lstStyle/>
-          <a:p>
-            <a:pPr algn="l">
-              <a:spcAft>
-                <a:spcPts val="400"/>
-              </a:spcAft>
-              <a:defRPr sz="5000" b="1">
-                <a:solidFill>
-                  <a:srgbClr val="C05C2B"/>
-                </a:solidFill>
-                <a:latin typeface="Tahoma"/>
-              </a:defRPr>
-            </a:pPr>
-            <a:r>
-              <a:t>0.237</a:t>
-            </a:r>
-          </a:p>
-        </p:txBody>
-      </p:sp>
-      <p:sp>
-        <p:nvSpPr>
-          <p:cNvPr id="10" name="TextBox 9"/>
-          <p:cNvSpPr txBox="1"/>
-          <p:nvPr/>
-        </p:nvSpPr>
-        <p:spPr>
-          <a:xfrm>
-            <a:off x="6492240" y="2770632"/>
-            <a:ext cx="4462272" cy="411480"/>
-          </a:xfrm>
-          <a:prstGeom prst="rect">
-            <a:avLst/>
-          </a:prstGeom>
-          <a:noFill/>
-        </p:spPr>
-        <p:txBody>
-          <a:bodyPr wrap="square" lIns="18288" rIns="18288" tIns="0" bIns="0">
-            <a:spAutoFit/>
-          </a:bodyPr>
-          <a:lstStyle/>
-          <a:p>
-            <a:pPr algn="l">
-              <a:spcAft>
-                <a:spcPts val="400"/>
-              </a:spcAft>
-              <a:defRPr sz="2000" b="1">
-                <a:solidFill>
-                  <a:srgbClr val="1D2F3E"/>
-                </a:solidFill>
-                <a:latin typeface="Tahoma"/>
-              </a:defRPr>
-            </a:pPr>
-            <a:r>
-              <a:t>ภาพส่งเพิ่ม 6 ภาพ (ฉากใหม่)</a:t>
-            </a:r>
-          </a:p>
-        </p:txBody>
-      </p:sp>
-      <p:sp>
-        <p:nvSpPr>
-          <p:cNvPr id="11" name="Rectangle 10"/>
+          <p:cNvPr id="7" name="Rounded Rectangle 6"/>
           <p:cNvSpPr/>
           <p:nvPr/>
         </p:nvSpPr>
         <p:spPr>
           <a:xfrm>
-            <a:off x="914400" y="3611880"/>
-            <a:ext cx="9966960" cy="265176"/>
-          </a:xfrm>
-          <a:prstGeom prst="rect">
+            <a:off x="722376" y="1737360"/>
+            <a:ext cx="3282696" cy="3054096"/>
+          </a:xfrm>
+          <a:prstGeom prst="roundRect">
             <a:avLst/>
           </a:prstGeom>
           <a:solidFill>
-            <a:srgbClr val="E0E9EE"/>
+            <a:srgbClr val="F2F6F8"/>
           </a:solidFill>
           <a:ln>
             <a:noFill/>
@@ -5592,20 +5916,137 @@
       </p:sp>
       <p:sp>
         <p:nvSpPr>
-          <p:cNvPr id="12" name="Rectangle 11"/>
+          <p:cNvPr id="8" name="TextBox 7"/>
+          <p:cNvSpPr txBox="1"/>
+          <p:nvPr/>
+        </p:nvSpPr>
+        <p:spPr>
+          <a:xfrm>
+            <a:off x="950976" y="1993392"/>
+            <a:ext cx="2834640" cy="941832"/>
+          </a:xfrm>
+          <a:prstGeom prst="rect">
+            <a:avLst/>
+          </a:prstGeom>
+          <a:noFill/>
+        </p:spPr>
+        <p:txBody>
+          <a:bodyPr wrap="square" lIns="18288" rIns="18288" tIns="0" bIns="0">
+            <a:spAutoFit/>
+          </a:bodyPr>
+          <a:lstStyle/>
+          <a:p>
+            <a:pPr algn="l">
+              <a:spcAft>
+                <a:spcPts val="400"/>
+              </a:spcAft>
+              <a:defRPr sz="4900" b="1">
+                <a:solidFill>
+                  <a:srgbClr val="137E9A"/>
+                </a:solidFill>
+                <a:latin typeface="Tahoma"/>
+              </a:defRPr>
+            </a:pPr>
+            <a:r>
+              <a:t>12</a:t>
+            </a:r>
+          </a:p>
+        </p:txBody>
+      </p:sp>
+      <p:sp>
+        <p:nvSpPr>
+          <p:cNvPr id="9" name="TextBox 8"/>
+          <p:cNvSpPr txBox="1"/>
+          <p:nvPr/>
+        </p:nvSpPr>
+        <p:spPr>
+          <a:xfrm>
+            <a:off x="950976" y="3090672"/>
+            <a:ext cx="2816352" cy="466344"/>
+          </a:xfrm>
+          <a:prstGeom prst="rect">
+            <a:avLst/>
+          </a:prstGeom>
+          <a:noFill/>
+        </p:spPr>
+        <p:txBody>
+          <a:bodyPr wrap="square" lIns="18288" rIns="18288" tIns="0" bIns="0">
+            <a:spAutoFit/>
+          </a:bodyPr>
+          <a:lstStyle/>
+          <a:p>
+            <a:pPr algn="l">
+              <a:spcAft>
+                <a:spcPts val="400"/>
+              </a:spcAft>
+              <a:defRPr sz="2200" b="1">
+                <a:solidFill>
+                  <a:srgbClr val="1D2A5D"/>
+                </a:solidFill>
+                <a:latin typeface="Tahoma"/>
+              </a:defRPr>
+            </a:pPr>
+            <a:r>
+              <a:t>ถอดชื่อครบ</a:t>
+            </a:r>
+          </a:p>
+        </p:txBody>
+      </p:sp>
+      <p:sp>
+        <p:nvSpPr>
+          <p:cNvPr id="10" name="TextBox 9"/>
+          <p:cNvSpPr txBox="1"/>
+          <p:nvPr/>
+        </p:nvSpPr>
+        <p:spPr>
+          <a:xfrm>
+            <a:off x="950976" y="3703320"/>
+            <a:ext cx="2798064" cy="758952"/>
+          </a:xfrm>
+          <a:prstGeom prst="rect">
+            <a:avLst/>
+          </a:prstGeom>
+          <a:noFill/>
+        </p:spPr>
+        <p:txBody>
+          <a:bodyPr wrap="square" lIns="18288" rIns="18288" tIns="0" bIns="0">
+            <a:spAutoFit/>
+          </a:bodyPr>
+          <a:lstStyle/>
+          <a:p>
+            <a:pPr algn="l">
+              <a:spcAft>
+                <a:spcPts val="400"/>
+              </a:spcAft>
+              <a:defRPr sz="1600" b="0">
+                <a:solidFill>
+                  <a:srgbClr val="1D2F3E"/>
+                </a:solidFill>
+                <a:latin typeface="Tahoma"/>
+              </a:defRPr>
+            </a:pPr>
+            <a:r>
+              <a:t>ชื่อทุกบรรทัดที่เห็นอ่านได้</a:t>
+            </a:r>
+          </a:p>
+        </p:txBody>
+      </p:sp>
+      <p:sp>
+        <p:nvSpPr>
+          <p:cNvPr id="11" name="Rounded Rectangle 10"/>
           <p:cNvSpPr/>
           <p:nvPr/>
         </p:nvSpPr>
         <p:spPr>
           <a:xfrm>
-            <a:off x="914400" y="3611880"/>
-            <a:ext cx="9249338" cy="265176"/>
-          </a:xfrm>
-          <a:prstGeom prst="rect">
+            <a:off x="4443984" y="1737360"/>
+            <a:ext cx="3282696" cy="3054096"/>
+          </a:xfrm>
+          <a:prstGeom prst="roundRect">
             <a:avLst/>
           </a:prstGeom>
           <a:solidFill>
-            <a:srgbClr val="137E9A"/>
+            <a:srgbClr val="F2F6F8"/>
           </a:solidFill>
           <a:ln>
             <a:noFill/>
@@ -5635,20 +6076,137 @@
       </p:sp>
       <p:sp>
         <p:nvSpPr>
-          <p:cNvPr id="13" name="Rectangle 12"/>
+          <p:cNvPr id="12" name="TextBox 11"/>
+          <p:cNvSpPr txBox="1"/>
+          <p:nvPr/>
+        </p:nvSpPr>
+        <p:spPr>
+          <a:xfrm>
+            <a:off x="4672584" y="1993392"/>
+            <a:ext cx="2834640" cy="941832"/>
+          </a:xfrm>
+          <a:prstGeom prst="rect">
+            <a:avLst/>
+          </a:prstGeom>
+          <a:noFill/>
+        </p:spPr>
+        <p:txBody>
+          <a:bodyPr wrap="square" lIns="18288" rIns="18288" tIns="0" bIns="0">
+            <a:spAutoFit/>
+          </a:bodyPr>
+          <a:lstStyle/>
+          <a:p>
+            <a:pPr algn="l">
+              <a:spcAft>
+                <a:spcPts val="400"/>
+              </a:spcAft>
+              <a:defRPr sz="4900" b="1">
+                <a:solidFill>
+                  <a:srgbClr val="C05C2B"/>
+                </a:solidFill>
+                <a:latin typeface="Tahoma"/>
+              </a:defRPr>
+            </a:pPr>
+            <a:r>
+              <a:t>45</a:t>
+            </a:r>
+          </a:p>
+        </p:txBody>
+      </p:sp>
+      <p:sp>
+        <p:nvSpPr>
+          <p:cNvPr id="13" name="TextBox 12"/>
+          <p:cNvSpPr txBox="1"/>
+          <p:nvPr/>
+        </p:nvSpPr>
+        <p:spPr>
+          <a:xfrm>
+            <a:off x="4672584" y="3090672"/>
+            <a:ext cx="2816352" cy="466344"/>
+          </a:xfrm>
+          <a:prstGeom prst="rect">
+            <a:avLst/>
+          </a:prstGeom>
+          <a:noFill/>
+        </p:spPr>
+        <p:txBody>
+          <a:bodyPr wrap="square" lIns="18288" rIns="18288" tIns="0" bIns="0">
+            <a:spAutoFit/>
+          </a:bodyPr>
+          <a:lstStyle/>
+          <a:p>
+            <a:pPr algn="l">
+              <a:spcAft>
+                <a:spcPts val="400"/>
+              </a:spcAft>
+              <a:defRPr sz="2200" b="1">
+                <a:solidFill>
+                  <a:srgbClr val="1D2A5D"/>
+                </a:solidFill>
+                <a:latin typeface="Tahoma"/>
+              </a:defRPr>
+            </a:pPr>
+            <a:r>
+              <a:t>อ่านได้บางส่วน</a:t>
+            </a:r>
+          </a:p>
+        </p:txBody>
+      </p:sp>
+      <p:sp>
+        <p:nvSpPr>
+          <p:cNvPr id="14" name="TextBox 13"/>
+          <p:cNvSpPr txBox="1"/>
+          <p:nvPr/>
+        </p:nvSpPr>
+        <p:spPr>
+          <a:xfrm>
+            <a:off x="4672584" y="3703320"/>
+            <a:ext cx="2798064" cy="758952"/>
+          </a:xfrm>
+          <a:prstGeom prst="rect">
+            <a:avLst/>
+          </a:prstGeom>
+          <a:noFill/>
+        </p:spPr>
+        <p:txBody>
+          <a:bodyPr wrap="square" lIns="18288" rIns="18288" tIns="0" bIns="0">
+            <a:spAutoFit/>
+          </a:bodyPr>
+          <a:lstStyle/>
+          <a:p>
+            <a:pPr algn="l">
+              <a:spcAft>
+                <a:spcPts val="400"/>
+              </a:spcAft>
+              <a:defRPr sz="1600" b="0">
+                <a:solidFill>
+                  <a:srgbClr val="1D2F3E"/>
+                </a:solidFill>
+                <a:latin typeface="Tahoma"/>
+              </a:defRPr>
+            </a:pPr>
+            <a:r>
+              <a:t>ยังมีอย่างน้อยหนึ่งบรรทัดอ่านไม่ครบ</a:t>
+            </a:r>
+          </a:p>
+        </p:txBody>
+      </p:sp>
+      <p:sp>
+        <p:nvSpPr>
+          <p:cNvPr id="15" name="Rounded Rectangle 14"/>
           <p:cNvSpPr/>
           <p:nvPr/>
         </p:nvSpPr>
         <p:spPr>
           <a:xfrm>
-            <a:off x="914400" y="4270248"/>
-            <a:ext cx="9966960" cy="265176"/>
-          </a:xfrm>
-          <a:prstGeom prst="rect">
+            <a:off x="8165592" y="1737360"/>
+            <a:ext cx="3282696" cy="3054096"/>
+          </a:xfrm>
+          <a:prstGeom prst="roundRect">
             <a:avLst/>
           </a:prstGeom>
           <a:solidFill>
-            <a:srgbClr val="E0E9EE"/>
+            <a:srgbClr val="F2F6F8"/>
           </a:solidFill>
           <a:ln>
             <a:noFill/>
@@ -5678,57 +6236,53 @@
       </p:sp>
       <p:sp>
         <p:nvSpPr>
-          <p:cNvPr id="14" name="Rectangle 13"/>
-          <p:cNvSpPr/>
-          <p:nvPr/>
-        </p:nvSpPr>
-        <p:spPr>
-          <a:xfrm>
-            <a:off x="914400" y="4270248"/>
-            <a:ext cx="2362169" cy="265176"/>
-          </a:xfrm>
-          <a:prstGeom prst="rect">
-            <a:avLst/>
-          </a:prstGeom>
-          <a:solidFill>
-            <a:srgbClr val="C05C2B"/>
-          </a:solidFill>
-          <a:ln>
-            <a:noFill/>
-          </a:ln>
-        </p:spPr>
-        <p:style>
-          <a:lnRef idx="1">
-            <a:schemeClr val="accent1"/>
-          </a:lnRef>
-          <a:fillRef idx="3">
-            <a:schemeClr val="accent1"/>
-          </a:fillRef>
-          <a:effectRef idx="2">
-            <a:schemeClr val="accent1"/>
-          </a:effectRef>
-          <a:fontRef idx="minor">
-            <a:schemeClr val="lt1"/>
-          </a:fontRef>
-        </p:style>
-        <p:txBody>
-          <a:bodyPr rtlCol="0" anchor="ctr"/>
-          <a:lstStyle/>
-          <a:p>
-            <a:pPr algn="ctr"/>
-          </a:p>
-        </p:txBody>
-      </p:sp>
-      <p:sp>
-        <p:nvSpPr>
-          <p:cNvPr id="15" name="TextBox 14"/>
-          <p:cNvSpPr txBox="1"/>
-          <p:nvPr/>
-        </p:nvSpPr>
-        <p:spPr>
-          <a:xfrm>
-            <a:off x="914400" y="5047488"/>
-            <a:ext cx="10149840" cy="548640"/>
+          <p:cNvPr id="16" name="TextBox 15"/>
+          <p:cNvSpPr txBox="1"/>
+          <p:nvPr/>
+        </p:nvSpPr>
+        <p:spPr>
+          <a:xfrm>
+            <a:off x="8394192" y="1993392"/>
+            <a:ext cx="2834640" cy="941832"/>
+          </a:xfrm>
+          <a:prstGeom prst="rect">
+            <a:avLst/>
+          </a:prstGeom>
+          <a:noFill/>
+        </p:spPr>
+        <p:txBody>
+          <a:bodyPr wrap="square" lIns="18288" rIns="18288" tIns="0" bIns="0">
+            <a:spAutoFit/>
+          </a:bodyPr>
+          <a:lstStyle/>
+          <a:p>
+            <a:pPr algn="l">
+              <a:spcAft>
+                <a:spcPts val="400"/>
+              </a:spcAft>
+              <a:defRPr sz="4900" b="1">
+                <a:solidFill>
+                  <a:srgbClr val="006289"/>
+                </a:solidFill>
+                <a:latin typeface="Tahoma"/>
+              </a:defRPr>
+            </a:pPr>
+            <a:r>
+              <a:t>2</a:t>
+            </a:r>
+          </a:p>
+        </p:txBody>
+      </p:sp>
+      <p:sp>
+        <p:nvSpPr>
+          <p:cNvPr id="17" name="TextBox 16"/>
+          <p:cNvSpPr txBox="1"/>
+          <p:nvPr/>
+        </p:nvSpPr>
+        <p:spPr>
+          <a:xfrm>
+            <a:off x="8394192" y="3090672"/>
+            <a:ext cx="2816352" cy="466344"/>
           </a:xfrm>
           <a:prstGeom prst="rect">
             <a:avLst/>
@@ -5753,21 +6307,99 @@
               </a:defRPr>
             </a:pPr>
             <a:r>
-              <a:t>ผลต่างระหว่างชุดยังอธิบายไม่ได้ทั้งหมด</a:t>
-            </a:r>
-          </a:p>
-        </p:txBody>
-      </p:sp>
-      <p:sp>
-        <p:nvSpPr>
-          <p:cNvPr id="16" name="TextBox 15"/>
-          <p:cNvSpPr txBox="1"/>
-          <p:nvPr/>
-        </p:nvSpPr>
-        <p:spPr>
-          <a:xfrm>
-            <a:off x="914400" y="5696712"/>
-            <a:ext cx="10424160" cy="320040"/>
+              <a:t>ไม่มีบรรทัดชื่อ</a:t>
+            </a:r>
+          </a:p>
+        </p:txBody>
+      </p:sp>
+      <p:sp>
+        <p:nvSpPr>
+          <p:cNvPr id="18" name="TextBox 17"/>
+          <p:cNvSpPr txBox="1"/>
+          <p:nvPr/>
+        </p:nvSpPr>
+        <p:spPr>
+          <a:xfrm>
+            <a:off x="8394192" y="3703320"/>
+            <a:ext cx="2798064" cy="758952"/>
+          </a:xfrm>
+          <a:prstGeom prst="rect">
+            <a:avLst/>
+          </a:prstGeom>
+          <a:noFill/>
+        </p:spPr>
+        <p:txBody>
+          <a:bodyPr wrap="square" lIns="18288" rIns="18288" tIns="0" bIns="0">
+            <a:spAutoFit/>
+          </a:bodyPr>
+          <a:lstStyle/>
+          <a:p>
+            <a:pPr algn="l">
+              <a:spcAft>
+                <a:spcPts val="400"/>
+              </a:spcAft>
+              <a:defRPr sz="1600" b="0">
+                <a:solidFill>
+                  <a:srgbClr val="1D2F3E"/>
+                </a:solidFill>
+                <a:latin typeface="Tahoma"/>
+              </a:defRPr>
+            </a:pPr>
+            <a:r>
+              <a:t>ไม่มีข้อความชื่อสินค้าให้ถอด</a:t>
+            </a:r>
+          </a:p>
+        </p:txBody>
+      </p:sp>
+      <p:sp>
+        <p:nvSpPr>
+          <p:cNvPr id="19" name="TextBox 18"/>
+          <p:cNvSpPr txBox="1"/>
+          <p:nvPr/>
+        </p:nvSpPr>
+        <p:spPr>
+          <a:xfrm>
+            <a:off x="804672" y="5074920"/>
+            <a:ext cx="10634472" cy="530352"/>
+          </a:xfrm>
+          <a:prstGeom prst="rect">
+            <a:avLst/>
+          </a:prstGeom>
+          <a:noFill/>
+        </p:spPr>
+        <p:txBody>
+          <a:bodyPr wrap="square" lIns="18288" rIns="18288" tIns="0" bIns="0">
+            <a:spAutoFit/>
+          </a:bodyPr>
+          <a:lstStyle/>
+          <a:p>
+            <a:pPr algn="l">
+              <a:spcAft>
+                <a:spcPts val="400"/>
+              </a:spcAft>
+              <a:defRPr sz="1700" b="1">
+                <a:solidFill>
+                  <a:srgbClr val="1D2A5D"/>
+                </a:solidFill>
+                <a:latin typeface="Tahoma"/>
+              </a:defRPr>
+            </a:pPr>
+            <a:r>
+              <a:t>ใน 45 ภาพที่อ่านไม่ครบ มี 28 ภาพที่เก็บช่วงชื่อที่อ่านได้แน่ชัด และ 17 ภาพยังไม่มีช่วงชื่อที่ยืนยันได้</a:t>
+            </a:r>
+          </a:p>
+        </p:txBody>
+      </p:sp>
+      <p:sp>
+        <p:nvSpPr>
+          <p:cNvPr id="20" name="TextBox 19"/>
+          <p:cNvSpPr txBox="1"/>
+          <p:nvPr/>
+        </p:nvSpPr>
+        <p:spPr>
+          <a:xfrm>
+            <a:off x="804672" y="5724144"/>
+            <a:ext cx="10561320" cy="438912"/>
           </a:xfrm>
           <a:prstGeom prst="rect">
             <a:avLst/>
@@ -5792,7 +6424,7 @@
               </a:defRPr>
             </a:pPr>
             <a:r>
-              <a:t>6 ภาพไม่ได้ใช้ฝึก; ความสว่างมัธยฐานทั้งภาพ 172.5 เทียบ 122.2; ตรวจผลการหมุนหน้าถัดไป</a:t>
+              <a:t>จึงยังไม่มีสัดส่วนภาษาไทย/อังกฤษที่แทนชื่อสินค้าในทั้ง 59 ภาพ; ยังไม่มีผู้ตรวจคนที่สอง</a:t>
             </a:r>
           </a:p>
         </p:txBody>
@@ -5857,7 +6489,7 @@
               </a:defRPr>
             </a:pPr>
             <a:r>
-              <a:t>ทดสอบผลของการหมุนภาพแบบจับคู่</a:t>
+              <a:t>ผล YOLO: คะแนนนี้มาจากภาพตรวจ 16 ใบ</a:t>
             </a:r>
           </a:p>
         </p:txBody>
@@ -5896,7 +6528,7 @@
               </a:defRPr>
             </a:pPr>
             <a:r>
-              <a:t>ใช้โมเดลเดิมและภาพเดิม หมุนกรอบเฉลยตามภาพ; ไม่ฝึกเพิ่ม</a:t>
+              <a:t>ใน 59 ภาพ ใช้ 38 ฝึกโมเดล / 10 ตรวจฉากเดิม / 6 ตรวจฉากใหม่ / กันออก 5</a:t>
             </a:r>
           </a:p>
         </p:txBody>
@@ -6016,53 +6648,14 @@
       </p:sp>
       <p:sp>
         <p:nvSpPr>
-          <p:cNvPr id="7" name="TextBox 6"/>
-          <p:cNvSpPr txBox="1"/>
-          <p:nvPr/>
-        </p:nvSpPr>
-        <p:spPr>
-          <a:xfrm>
-            <a:off x="786384" y="1536192"/>
-            <a:ext cx="10652760" cy="429768"/>
-          </a:xfrm>
-          <a:prstGeom prst="rect">
-            <a:avLst/>
-          </a:prstGeom>
-          <a:noFill/>
-        </p:spPr>
-        <p:txBody>
-          <a:bodyPr wrap="square" lIns="18288" rIns="18288" tIns="0" bIns="0">
-            <a:spAutoFit/>
-          </a:bodyPr>
-          <a:lstStyle/>
-          <a:p>
-            <a:pPr algn="l">
-              <a:spcAft>
-                <a:spcPts val="400"/>
-              </a:spcAft>
-              <a:defRPr sz="1800" b="1">
-                <a:solidFill>
-                  <a:srgbClr val="1D2A5D"/>
-                </a:solidFill>
-                <a:latin typeface="Tahoma"/>
-              </a:defRPr>
-            </a:pPr>
-            <a:r>
-              <a:t>ตรวจภาพด้วยตา: ตัวหนังสือหมุนข้าง 3/10 ในชุดแรก และ 6/6 ในชุดส่งเพิ่ม</a:t>
-            </a:r>
-          </a:p>
-        </p:txBody>
-      </p:sp>
-      <p:sp>
-        <p:nvSpPr>
-          <p:cNvPr id="8" name="Rounded Rectangle 7"/>
+          <p:cNvPr id="7" name="Rounded Rectangle 6"/>
           <p:cNvSpPr/>
           <p:nvPr/>
         </p:nvSpPr>
         <p:spPr>
           <a:xfrm>
-            <a:off x="731520" y="2212848"/>
-            <a:ext cx="5212080" cy="3191256"/>
+            <a:off x="768096" y="1700784"/>
+            <a:ext cx="5120640" cy="2331720"/>
           </a:xfrm>
           <a:prstGeom prst="roundRect">
             <a:avLst/>
@@ -6098,14 +6691,252 @@
       </p:sp>
       <p:sp>
         <p:nvSpPr>
-          <p:cNvPr id="9" name="Rounded Rectangle 8"/>
+          <p:cNvPr id="8" name="Rounded Rectangle 7"/>
           <p:cNvSpPr/>
           <p:nvPr/>
         </p:nvSpPr>
         <p:spPr>
           <a:xfrm>
-            <a:off x="6217920" y="2212848"/>
-            <a:ext cx="5212080" cy="3191256"/>
+            <a:off x="6263640" y="1700784"/>
+            <a:ext cx="5120640" cy="2331720"/>
+          </a:xfrm>
+          <a:prstGeom prst="roundRect">
+            <a:avLst/>
+          </a:prstGeom>
+          <a:solidFill>
+            <a:srgbClr val="FAF0E9"/>
+          </a:solidFill>
+          <a:ln>
+            <a:noFill/>
+          </a:ln>
+        </p:spPr>
+        <p:style>
+          <a:lnRef idx="1">
+            <a:schemeClr val="accent1"/>
+          </a:lnRef>
+          <a:fillRef idx="3">
+            <a:schemeClr val="accent1"/>
+          </a:fillRef>
+          <a:effectRef idx="2">
+            <a:schemeClr val="accent1"/>
+          </a:effectRef>
+          <a:fontRef idx="minor">
+            <a:schemeClr val="lt1"/>
+          </a:fontRef>
+        </p:style>
+        <p:txBody>
+          <a:bodyPr rtlCol="0" anchor="ctr"/>
+          <a:lstStyle/>
+          <a:p>
+            <a:pPr algn="ctr"/>
+          </a:p>
+        </p:txBody>
+      </p:sp>
+      <p:sp>
+        <p:nvSpPr>
+          <p:cNvPr id="9" name="TextBox 8"/>
+          <p:cNvSpPr txBox="1"/>
+          <p:nvPr/>
+        </p:nvSpPr>
+        <p:spPr>
+          <a:xfrm>
+            <a:off x="1042415" y="1947672"/>
+            <a:ext cx="4297680" cy="832104"/>
+          </a:xfrm>
+          <a:prstGeom prst="rect">
+            <a:avLst/>
+          </a:prstGeom>
+          <a:noFill/>
+        </p:spPr>
+        <p:txBody>
+          <a:bodyPr wrap="square" lIns="18288" rIns="18288" tIns="0" bIns="0">
+            <a:spAutoFit/>
+          </a:bodyPr>
+          <a:lstStyle/>
+          <a:p>
+            <a:pPr algn="l">
+              <a:spcAft>
+                <a:spcPts val="400"/>
+              </a:spcAft>
+              <a:defRPr sz="4400" b="1">
+                <a:solidFill>
+                  <a:srgbClr val="137E9A"/>
+                </a:solidFill>
+                <a:latin typeface="Tahoma"/>
+              </a:defRPr>
+            </a:pPr>
+            <a:r>
+              <a:t>0.928</a:t>
+            </a:r>
+          </a:p>
+        </p:txBody>
+      </p:sp>
+      <p:sp>
+        <p:nvSpPr>
+          <p:cNvPr id="10" name="TextBox 9"/>
+          <p:cNvSpPr txBox="1"/>
+          <p:nvPr/>
+        </p:nvSpPr>
+        <p:spPr>
+          <a:xfrm>
+            <a:off x="1060704" y="3044952"/>
+            <a:ext cx="4407408" cy="457200"/>
+          </a:xfrm>
+          <a:prstGeom prst="rect">
+            <a:avLst/>
+          </a:prstGeom>
+          <a:noFill/>
+        </p:spPr>
+        <p:txBody>
+          <a:bodyPr wrap="square" lIns="18288" rIns="18288" tIns="0" bIns="0">
+            <a:spAutoFit/>
+          </a:bodyPr>
+          <a:lstStyle/>
+          <a:p>
+            <a:pPr algn="l">
+              <a:spcAft>
+                <a:spcPts val="400"/>
+              </a:spcAft>
+              <a:defRPr sz="2100" b="1">
+                <a:solidFill>
+                  <a:srgbClr val="1D2A5D"/>
+                </a:solidFill>
+                <a:latin typeface="Tahoma"/>
+              </a:defRPr>
+            </a:pPr>
+            <a:r>
+              <a:t>10 ภาพฉากเดิม</a:t>
+            </a:r>
+          </a:p>
+        </p:txBody>
+      </p:sp>
+      <p:sp>
+        <p:nvSpPr>
+          <p:cNvPr id="11" name="TextBox 10"/>
+          <p:cNvSpPr txBox="1"/>
+          <p:nvPr/>
+        </p:nvSpPr>
+        <p:spPr>
+          <a:xfrm>
+            <a:off x="6537960" y="1947672"/>
+            <a:ext cx="4297680" cy="832104"/>
+          </a:xfrm>
+          <a:prstGeom prst="rect">
+            <a:avLst/>
+          </a:prstGeom>
+          <a:noFill/>
+        </p:spPr>
+        <p:txBody>
+          <a:bodyPr wrap="square" lIns="18288" rIns="18288" tIns="0" bIns="0">
+            <a:spAutoFit/>
+          </a:bodyPr>
+          <a:lstStyle/>
+          <a:p>
+            <a:pPr algn="l">
+              <a:spcAft>
+                <a:spcPts val="400"/>
+              </a:spcAft>
+              <a:defRPr sz="4400" b="1">
+                <a:solidFill>
+                  <a:srgbClr val="C05C2B"/>
+                </a:solidFill>
+                <a:latin typeface="Tahoma"/>
+              </a:defRPr>
+            </a:pPr>
+            <a:r>
+              <a:t>0.237</a:t>
+            </a:r>
+          </a:p>
+        </p:txBody>
+      </p:sp>
+      <p:sp>
+        <p:nvSpPr>
+          <p:cNvPr id="12" name="TextBox 11"/>
+          <p:cNvSpPr txBox="1"/>
+          <p:nvPr/>
+        </p:nvSpPr>
+        <p:spPr>
+          <a:xfrm>
+            <a:off x="6556248" y="3044952"/>
+            <a:ext cx="4407408" cy="457200"/>
+          </a:xfrm>
+          <a:prstGeom prst="rect">
+            <a:avLst/>
+          </a:prstGeom>
+          <a:noFill/>
+        </p:spPr>
+        <p:txBody>
+          <a:bodyPr wrap="square" lIns="18288" rIns="18288" tIns="0" bIns="0">
+            <a:spAutoFit/>
+          </a:bodyPr>
+          <a:lstStyle/>
+          <a:p>
+            <a:pPr algn="l">
+              <a:spcAft>
+                <a:spcPts val="400"/>
+              </a:spcAft>
+              <a:defRPr sz="2100" b="1">
+                <a:solidFill>
+                  <a:srgbClr val="1D2A5D"/>
+                </a:solidFill>
+                <a:latin typeface="Tahoma"/>
+              </a:defRPr>
+            </a:pPr>
+            <a:r>
+              <a:t>6 ภาพฉากใหม่</a:t>
+            </a:r>
+          </a:p>
+        </p:txBody>
+      </p:sp>
+      <p:sp>
+        <p:nvSpPr>
+          <p:cNvPr id="13" name="TextBox 12"/>
+          <p:cNvSpPr txBox="1"/>
+          <p:nvPr/>
+        </p:nvSpPr>
+        <p:spPr>
+          <a:xfrm>
+            <a:off x="850392" y="4315968"/>
+            <a:ext cx="10515600" cy="457200"/>
+          </a:xfrm>
+          <a:prstGeom prst="rect">
+            <a:avLst/>
+          </a:prstGeom>
+          <a:noFill/>
+        </p:spPr>
+        <p:txBody>
+          <a:bodyPr wrap="square" lIns="18288" rIns="18288" tIns="0" bIns="0">
+            <a:spAutoFit/>
+          </a:bodyPr>
+          <a:lstStyle/>
+          <a:p>
+            <a:pPr algn="l">
+              <a:spcAft>
+                <a:spcPts val="400"/>
+              </a:spcAft>
+              <a:defRPr sz="2000" b="1">
+                <a:solidFill>
+                  <a:srgbClr val="1D2A5D"/>
+                </a:solidFill>
+                <a:latin typeface="Tahoma"/>
+              </a:defRPr>
+            </a:pPr>
+            <a:r>
+              <a:t>mAP@0.5: คะแนนเฉลี่ยการหากรอบ 0–1; สูงดีกว่า</a:t>
+            </a:r>
+          </a:p>
+        </p:txBody>
+      </p:sp>
+      <p:sp>
+        <p:nvSpPr>
+          <p:cNvPr id="14" name="Rounded Rectangle 13"/>
+          <p:cNvSpPr/>
+          <p:nvPr/>
+        </p:nvSpPr>
+        <p:spPr>
+          <a:xfrm>
+            <a:off x="786384" y="4965192"/>
+            <a:ext cx="10607040" cy="667512"/>
           </a:xfrm>
           <a:prstGeom prst="roundRect">
             <a:avLst/>
@@ -6141,109 +6972,70 @@
       </p:sp>
       <p:sp>
         <p:nvSpPr>
-          <p:cNvPr id="10" name="TextBox 9"/>
-          <p:cNvSpPr txBox="1"/>
-          <p:nvPr/>
-        </p:nvSpPr>
-        <p:spPr>
-          <a:xfrm>
-            <a:off x="996696" y="2505456"/>
-            <a:ext cx="4590288" cy="393192"/>
-          </a:xfrm>
-          <a:prstGeom prst="rect">
-            <a:avLst/>
-          </a:prstGeom>
-          <a:noFill/>
-        </p:spPr>
-        <p:txBody>
-          <a:bodyPr wrap="square" lIns="18288" rIns="18288" tIns="0" bIns="0">
-            <a:spAutoFit/>
-          </a:bodyPr>
-          <a:lstStyle/>
-          <a:p>
-            <a:pPr algn="l">
-              <a:spcAft>
-                <a:spcPts val="400"/>
-              </a:spcAft>
-              <a:defRPr sz="1900" b="1">
-                <a:solidFill>
-                  <a:srgbClr val="1D2A5D"/>
-                </a:solidFill>
-                <a:latin typeface="Tahoma"/>
-              </a:defRPr>
-            </a:pPr>
-            <a:r>
-              <a:t>7 ภาพจากชุดแรกที่อ่านตรง</a:t>
-            </a:r>
-          </a:p>
-        </p:txBody>
-      </p:sp>
-      <p:sp>
-        <p:nvSpPr>
-          <p:cNvPr id="11" name="TextBox 10"/>
-          <p:cNvSpPr txBox="1"/>
-          <p:nvPr/>
-        </p:nvSpPr>
-        <p:spPr>
-          <a:xfrm>
-            <a:off x="1033271" y="3145536"/>
-            <a:ext cx="1664208" cy="658368"/>
-          </a:xfrm>
-          <a:prstGeom prst="rect">
-            <a:avLst/>
-          </a:prstGeom>
-          <a:noFill/>
-        </p:spPr>
-        <p:txBody>
-          <a:bodyPr wrap="square" lIns="18288" rIns="18288" tIns="0" bIns="0">
-            <a:spAutoFit/>
-          </a:bodyPr>
-          <a:lstStyle/>
-          <a:p>
-            <a:pPr algn="l">
-              <a:spcAft>
-                <a:spcPts val="400"/>
-              </a:spcAft>
-              <a:defRPr sz="3400" b="1">
-                <a:solidFill>
-                  <a:srgbClr val="137E9A"/>
-                </a:solidFill>
-                <a:latin typeface="Tahoma"/>
-              </a:defRPr>
-            </a:pPr>
-            <a:r>
-              <a:t>0.995</a:t>
-            </a:r>
-          </a:p>
-        </p:txBody>
-      </p:sp>
-      <p:sp>
-        <p:nvSpPr>
-          <p:cNvPr id="12" name="TextBox 11"/>
-          <p:cNvSpPr txBox="1"/>
-          <p:nvPr/>
-        </p:nvSpPr>
-        <p:spPr>
-          <a:xfrm>
-            <a:off x="2843784" y="3227832"/>
-            <a:ext cx="512064" cy="448056"/>
-          </a:xfrm>
-          <a:prstGeom prst="rect">
-            <a:avLst/>
-          </a:prstGeom>
-          <a:noFill/>
-        </p:spPr>
-        <p:txBody>
-          <a:bodyPr wrap="square" lIns="18288" rIns="18288" tIns="0" bIns="0">
-            <a:spAutoFit/>
-          </a:bodyPr>
-          <a:lstStyle/>
-          <a:p>
-            <a:pPr algn="ctr">
-              <a:spcAft>
-                <a:spcPts val="400"/>
-              </a:spcAft>
-              <a:defRPr sz="2400" b="1">
+          <p:cNvPr id="15" name="TextBox 14"/>
+          <p:cNvSpPr txBox="1"/>
+          <p:nvPr/>
+        </p:nvSpPr>
+        <p:spPr>
+          <a:xfrm>
+            <a:off x="987552" y="5120640"/>
+            <a:ext cx="10149840" cy="338328"/>
+          </a:xfrm>
+          <a:prstGeom prst="rect">
+            <a:avLst/>
+          </a:prstGeom>
+          <a:noFill/>
+        </p:spPr>
+        <p:txBody>
+          <a:bodyPr wrap="square" lIns="18288" rIns="18288" tIns="0" bIns="0">
+            <a:spAutoFit/>
+          </a:bodyPr>
+          <a:lstStyle/>
+          <a:p>
+            <a:pPr algn="l">
+              <a:spcAft>
+                <a:spcPts val="400"/>
+              </a:spcAft>
+              <a:defRPr sz="1800" b="1">
+                <a:solidFill>
+                  <a:srgbClr val="006289"/>
+                </a:solidFill>
+                <a:latin typeface="Tahoma"/>
+              </a:defRPr>
+            </a:pPr>
+            <a:r>
+              <a:t>ลองหมุน 6 ภาพฉากใหม่ให้อ่านตรงด้วยโมเดลเดิม: 0.237 → 0.714</a:t>
+            </a:r>
+          </a:p>
+        </p:txBody>
+      </p:sp>
+      <p:sp>
+        <p:nvSpPr>
+          <p:cNvPr id="16" name="TextBox 15"/>
+          <p:cNvSpPr txBox="1"/>
+          <p:nvPr/>
+        </p:nvSpPr>
+        <p:spPr>
+          <a:xfrm>
+            <a:off x="832104" y="5888736"/>
+            <a:ext cx="10515600" cy="338328"/>
+          </a:xfrm>
+          <a:prstGeom prst="rect">
+            <a:avLst/>
+          </a:prstGeom>
+          <a:noFill/>
+        </p:spPr>
+        <p:txBody>
+          <a:bodyPr wrap="square" lIns="18288" rIns="18288" tIns="0" bIns="0">
+            <a:spAutoFit/>
+          </a:bodyPr>
+          <a:lstStyle/>
+          <a:p>
+            <a:pPr algn="l">
+              <a:spcAft>
+                <a:spcPts val="400"/>
+              </a:spcAft>
+              <a:defRPr sz="1400" b="0">
                 <a:solidFill>
                   <a:srgbClr val="576975"/>
                 </a:solidFill>
@@ -6251,475 +7043,7 @@
               </a:defRPr>
             </a:pPr>
             <a:r>
-              <a:t>→</a:t>
-            </a:r>
-          </a:p>
-        </p:txBody>
-      </p:sp>
-      <p:sp>
-        <p:nvSpPr>
-          <p:cNvPr id="13" name="TextBox 12"/>
-          <p:cNvSpPr txBox="1"/>
-          <p:nvPr/>
-        </p:nvSpPr>
-        <p:spPr>
-          <a:xfrm>
-            <a:off x="3529584" y="3145536"/>
-            <a:ext cx="2011680" cy="658368"/>
-          </a:xfrm>
-          <a:prstGeom prst="rect">
-            <a:avLst/>
-          </a:prstGeom>
-          <a:noFill/>
-        </p:spPr>
-        <p:txBody>
-          <a:bodyPr wrap="square" lIns="18288" rIns="18288" tIns="0" bIns="0">
-            <a:spAutoFit/>
-          </a:bodyPr>
-          <a:lstStyle/>
-          <a:p>
-            <a:pPr algn="l">
-              <a:spcAft>
-                <a:spcPts val="400"/>
-              </a:spcAft>
-              <a:defRPr sz="3400" b="1">
-                <a:solidFill>
-                  <a:srgbClr val="C05C2B"/>
-                </a:solidFill>
-                <a:latin typeface="Tahoma"/>
-              </a:defRPr>
-            </a:pPr>
-            <a:r>
-              <a:t>0.492</a:t>
-            </a:r>
-          </a:p>
-        </p:txBody>
-      </p:sp>
-      <p:sp>
-        <p:nvSpPr>
-          <p:cNvPr id="14" name="TextBox 13"/>
-          <p:cNvSpPr txBox="1"/>
-          <p:nvPr/>
-        </p:nvSpPr>
-        <p:spPr>
-          <a:xfrm>
-            <a:off x="1024128" y="3968496"/>
-            <a:ext cx="1828800" cy="338328"/>
-          </a:xfrm>
-          <a:prstGeom prst="rect">
-            <a:avLst/>
-          </a:prstGeom>
-          <a:noFill/>
-        </p:spPr>
-        <p:txBody>
-          <a:bodyPr wrap="square" lIns="18288" rIns="18288" tIns="0" bIns="0">
-            <a:spAutoFit/>
-          </a:bodyPr>
-          <a:lstStyle/>
-          <a:p>
-            <a:pPr algn="l">
-              <a:spcAft>
-                <a:spcPts val="400"/>
-              </a:spcAft>
-              <a:defRPr sz="1600" b="0">
-                <a:solidFill>
-                  <a:srgbClr val="1D2F3E"/>
-                </a:solidFill>
-                <a:latin typeface="Tahoma"/>
-              </a:defRPr>
-            </a:pPr>
-            <a:r>
-              <a:t>ต้นฉบับ</a:t>
-            </a:r>
-          </a:p>
-        </p:txBody>
-      </p:sp>
-      <p:sp>
-        <p:nvSpPr>
-          <p:cNvPr id="15" name="TextBox 14"/>
-          <p:cNvSpPr txBox="1"/>
-          <p:nvPr/>
-        </p:nvSpPr>
-        <p:spPr>
-          <a:xfrm>
-            <a:off x="3529584" y="3968496"/>
-            <a:ext cx="1828800" cy="338328"/>
-          </a:xfrm>
-          <a:prstGeom prst="rect">
-            <a:avLst/>
-          </a:prstGeom>
-          <a:noFill/>
-        </p:spPr>
-        <p:txBody>
-          <a:bodyPr wrap="square" lIns="18288" rIns="18288" tIns="0" bIns="0">
-            <a:spAutoFit/>
-          </a:bodyPr>
-          <a:lstStyle/>
-          <a:p>
-            <a:pPr algn="l">
-              <a:spcAft>
-                <a:spcPts val="400"/>
-              </a:spcAft>
-              <a:defRPr sz="1600" b="0">
-                <a:solidFill>
-                  <a:srgbClr val="1D2F3E"/>
-                </a:solidFill>
-                <a:latin typeface="Tahoma"/>
-              </a:defRPr>
-            </a:pPr>
-            <a:r>
-              <a:t>หมุน 90°</a:t>
-            </a:r>
-          </a:p>
-        </p:txBody>
-      </p:sp>
-      <p:sp>
-        <p:nvSpPr>
-          <p:cNvPr id="16" name="TextBox 15"/>
-          <p:cNvSpPr txBox="1"/>
-          <p:nvPr/>
-        </p:nvSpPr>
-        <p:spPr>
-          <a:xfrm>
-            <a:off x="1005840" y="4645152"/>
-            <a:ext cx="4608576" cy="411480"/>
-          </a:xfrm>
-          <a:prstGeom prst="rect">
-            <a:avLst/>
-          </a:prstGeom>
-          <a:noFill/>
-        </p:spPr>
-        <p:txBody>
-          <a:bodyPr wrap="square" lIns="18288" rIns="18288" tIns="0" bIns="0">
-            <a:spAutoFit/>
-          </a:bodyPr>
-          <a:lstStyle/>
-          <a:p>
-            <a:pPr algn="l">
-              <a:spcAft>
-                <a:spcPts val="400"/>
-              </a:spcAft>
-              <a:defRPr sz="1700" b="1">
-                <a:solidFill>
-                  <a:srgbClr val="1D2A5D"/>
-                </a:solidFill>
-                <a:latin typeface="Tahoma"/>
-              </a:defRPr>
-            </a:pPr>
-            <a:r>
-              <a:t>mAP@0.5 ลดลงเมื่อหมุนภาพเดิม</a:t>
-            </a:r>
-          </a:p>
-        </p:txBody>
-      </p:sp>
-      <p:sp>
-        <p:nvSpPr>
-          <p:cNvPr id="17" name="TextBox 16"/>
-          <p:cNvSpPr txBox="1"/>
-          <p:nvPr/>
-        </p:nvSpPr>
-        <p:spPr>
-          <a:xfrm>
-            <a:off x="6483096" y="2505456"/>
-            <a:ext cx="4590288" cy="393192"/>
-          </a:xfrm>
-          <a:prstGeom prst="rect">
-            <a:avLst/>
-          </a:prstGeom>
-          <a:noFill/>
-        </p:spPr>
-        <p:txBody>
-          <a:bodyPr wrap="square" lIns="18288" rIns="18288" tIns="0" bIns="0">
-            <a:spAutoFit/>
-          </a:bodyPr>
-          <a:lstStyle/>
-          <a:p>
-            <a:pPr algn="l">
-              <a:spcAft>
-                <a:spcPts val="400"/>
-              </a:spcAft>
-              <a:defRPr sz="1900" b="1">
-                <a:solidFill>
-                  <a:srgbClr val="1D2A5D"/>
-                </a:solidFill>
-                <a:latin typeface="Tahoma"/>
-              </a:defRPr>
-            </a:pPr>
-            <a:r>
-              <a:t>6 ภาพที่ส่งเพิ่ม (เดิมหมุนข้าง)</a:t>
-            </a:r>
-          </a:p>
-        </p:txBody>
-      </p:sp>
-      <p:sp>
-        <p:nvSpPr>
-          <p:cNvPr id="18" name="TextBox 17"/>
-          <p:cNvSpPr txBox="1"/>
-          <p:nvPr/>
-        </p:nvSpPr>
-        <p:spPr>
-          <a:xfrm>
-            <a:off x="6519672" y="3145536"/>
-            <a:ext cx="1664208" cy="658368"/>
-          </a:xfrm>
-          <a:prstGeom prst="rect">
-            <a:avLst/>
-          </a:prstGeom>
-          <a:noFill/>
-        </p:spPr>
-        <p:txBody>
-          <a:bodyPr wrap="square" lIns="18288" rIns="18288" tIns="0" bIns="0">
-            <a:spAutoFit/>
-          </a:bodyPr>
-          <a:lstStyle/>
-          <a:p>
-            <a:pPr algn="l">
-              <a:spcAft>
-                <a:spcPts val="400"/>
-              </a:spcAft>
-              <a:defRPr sz="3400" b="1">
-                <a:solidFill>
-                  <a:srgbClr val="C05C2B"/>
-                </a:solidFill>
-                <a:latin typeface="Tahoma"/>
-              </a:defRPr>
-            </a:pPr>
-            <a:r>
-              <a:t>0.237</a:t>
-            </a:r>
-          </a:p>
-        </p:txBody>
-      </p:sp>
-      <p:sp>
-        <p:nvSpPr>
-          <p:cNvPr id="19" name="TextBox 18"/>
-          <p:cNvSpPr txBox="1"/>
-          <p:nvPr/>
-        </p:nvSpPr>
-        <p:spPr>
-          <a:xfrm>
-            <a:off x="8330183" y="3227832"/>
-            <a:ext cx="512064" cy="448056"/>
-          </a:xfrm>
-          <a:prstGeom prst="rect">
-            <a:avLst/>
-          </a:prstGeom>
-          <a:noFill/>
-        </p:spPr>
-        <p:txBody>
-          <a:bodyPr wrap="square" lIns="18288" rIns="18288" tIns="0" bIns="0">
-            <a:spAutoFit/>
-          </a:bodyPr>
-          <a:lstStyle/>
-          <a:p>
-            <a:pPr algn="ctr">
-              <a:spcAft>
-                <a:spcPts val="400"/>
-              </a:spcAft>
-              <a:defRPr sz="2400" b="1">
-                <a:solidFill>
-                  <a:srgbClr val="576975"/>
-                </a:solidFill>
-                <a:latin typeface="Tahoma"/>
-              </a:defRPr>
-            </a:pPr>
-            <a:r>
-              <a:t>→</a:t>
-            </a:r>
-          </a:p>
-        </p:txBody>
-      </p:sp>
-      <p:sp>
-        <p:nvSpPr>
-          <p:cNvPr id="20" name="TextBox 19"/>
-          <p:cNvSpPr txBox="1"/>
-          <p:nvPr/>
-        </p:nvSpPr>
-        <p:spPr>
-          <a:xfrm>
-            <a:off x="9015984" y="3145536"/>
-            <a:ext cx="2011680" cy="658368"/>
-          </a:xfrm>
-          <a:prstGeom prst="rect">
-            <a:avLst/>
-          </a:prstGeom>
-          <a:noFill/>
-        </p:spPr>
-        <p:txBody>
-          <a:bodyPr wrap="square" lIns="18288" rIns="18288" tIns="0" bIns="0">
-            <a:spAutoFit/>
-          </a:bodyPr>
-          <a:lstStyle/>
-          <a:p>
-            <a:pPr algn="l">
-              <a:spcAft>
-                <a:spcPts val="400"/>
-              </a:spcAft>
-              <a:defRPr sz="3400" b="1">
-                <a:solidFill>
-                  <a:srgbClr val="137E9A"/>
-                </a:solidFill>
-                <a:latin typeface="Tahoma"/>
-              </a:defRPr>
-            </a:pPr>
-            <a:r>
-              <a:t>0.714</a:t>
-            </a:r>
-          </a:p>
-        </p:txBody>
-      </p:sp>
-      <p:sp>
-        <p:nvSpPr>
-          <p:cNvPr id="21" name="TextBox 20"/>
-          <p:cNvSpPr txBox="1"/>
-          <p:nvPr/>
-        </p:nvSpPr>
-        <p:spPr>
-          <a:xfrm>
-            <a:off x="6510528" y="3968496"/>
-            <a:ext cx="1828800" cy="338328"/>
-          </a:xfrm>
-          <a:prstGeom prst="rect">
-            <a:avLst/>
-          </a:prstGeom>
-          <a:noFill/>
-        </p:spPr>
-        <p:txBody>
-          <a:bodyPr wrap="square" lIns="18288" rIns="18288" tIns="0" bIns="0">
-            <a:spAutoFit/>
-          </a:bodyPr>
-          <a:lstStyle/>
-          <a:p>
-            <a:pPr algn="l">
-              <a:spcAft>
-                <a:spcPts val="400"/>
-              </a:spcAft>
-              <a:defRPr sz="1600" b="0">
-                <a:solidFill>
-                  <a:srgbClr val="1D2F3E"/>
-                </a:solidFill>
-                <a:latin typeface="Tahoma"/>
-              </a:defRPr>
-            </a:pPr>
-            <a:r>
-              <a:t>ภาพเดิม</a:t>
-            </a:r>
-          </a:p>
-        </p:txBody>
-      </p:sp>
-      <p:sp>
-        <p:nvSpPr>
-          <p:cNvPr id="22" name="TextBox 21"/>
-          <p:cNvSpPr txBox="1"/>
-          <p:nvPr/>
-        </p:nvSpPr>
-        <p:spPr>
-          <a:xfrm>
-            <a:off x="9015984" y="3968496"/>
-            <a:ext cx="2121408" cy="475488"/>
-          </a:xfrm>
-          <a:prstGeom prst="rect">
-            <a:avLst/>
-          </a:prstGeom>
-          <a:noFill/>
-        </p:spPr>
-        <p:txBody>
-          <a:bodyPr wrap="square" lIns="18288" rIns="18288" tIns="0" bIns="0">
-            <a:spAutoFit/>
-          </a:bodyPr>
-          <a:lstStyle/>
-          <a:p>
-            <a:pPr algn="l">
-              <a:spcAft>
-                <a:spcPts val="400"/>
-              </a:spcAft>
-              <a:defRPr sz="1600" b="0">
-                <a:solidFill>
-                  <a:srgbClr val="1D2F3E"/>
-                </a:solidFill>
-                <a:latin typeface="Tahoma"/>
-              </a:defRPr>
-            </a:pPr>
-            <a:r>
-              <a:t>หมุนกลับให้อ่านตรง</a:t>
-            </a:r>
-          </a:p>
-        </p:txBody>
-      </p:sp>
-      <p:sp>
-        <p:nvSpPr>
-          <p:cNvPr id="23" name="TextBox 22"/>
-          <p:cNvSpPr txBox="1"/>
-          <p:nvPr/>
-        </p:nvSpPr>
-        <p:spPr>
-          <a:xfrm>
-            <a:off x="6492240" y="4645152"/>
-            <a:ext cx="4608576" cy="411480"/>
-          </a:xfrm>
-          <a:prstGeom prst="rect">
-            <a:avLst/>
-          </a:prstGeom>
-          <a:noFill/>
-        </p:spPr>
-        <p:txBody>
-          <a:bodyPr wrap="square" lIns="18288" rIns="18288" tIns="0" bIns="0">
-            <a:spAutoFit/>
-          </a:bodyPr>
-          <a:lstStyle/>
-          <a:p>
-            <a:pPr algn="l">
-              <a:spcAft>
-                <a:spcPts val="400"/>
-              </a:spcAft>
-              <a:defRPr sz="1700" b="1">
-                <a:solidFill>
-                  <a:srgbClr val="1D2A5D"/>
-                </a:solidFill>
-                <a:latin typeface="Tahoma"/>
-              </a:defRPr>
-            </a:pPr>
-            <a:r>
-              <a:t>mAP@0.5 เพิ่มขึ้นโดยไม่ฝึกเพิ่ม</a:t>
-            </a:r>
-          </a:p>
-        </p:txBody>
-      </p:sp>
-      <p:sp>
-        <p:nvSpPr>
-          <p:cNvPr id="24" name="TextBox 23"/>
-          <p:cNvSpPr txBox="1"/>
-          <p:nvPr/>
-        </p:nvSpPr>
-        <p:spPr>
-          <a:xfrm>
-            <a:off x="804672" y="5769864"/>
-            <a:ext cx="10616184" cy="438912"/>
-          </a:xfrm>
-          <a:prstGeom prst="rect">
-            <a:avLst/>
-          </a:prstGeom>
-          <a:noFill/>
-        </p:spPr>
-        <p:txBody>
-          <a:bodyPr wrap="square" lIns="18288" rIns="18288" tIns="0" bIns="0">
-            <a:spAutoFit/>
-          </a:bodyPr>
-          <a:lstStyle/>
-          <a:p>
-            <a:pPr algn="l">
-              <a:spcAft>
-                <a:spcPts val="400"/>
-              </a:spcAft>
-              <a:defRPr sz="1600" b="0">
-                <a:solidFill>
-                  <a:srgbClr val="576975"/>
-                </a:solidFill>
-                <a:latin typeface="Tahoma"/>
-              </a:defRPr>
-            </a:pPr>
-            <a:r>
-              <a:t>ผลนี้ชี้ความไวต่อการหมุนในชุดเล็ก ยังไม่พิสูจน์ว่านี่เป็นสาเหตุเดียวของคะแนนต่างระหว่างชุด</a:t>
+              <a:t>ผลต่างเกี่ยวกับทิศภาพ แต่ฉากและแสงก็ต่างกัน; ยังสรุปความแม่นยำของทั้ง 59 ภาพไม่ได้</a:t>
             </a:r>
           </a:p>
         </p:txBody>

--- a/ass5_output/Residential_Intelligence_Project_Progress_READY_2026-10-18.pptx
+++ b/ass5_output/Residential_Intelligence_Project_Progress_READY_2026-10-18.pptx
@@ -5649,7 +5649,7 @@
               </a:defRPr>
             </a:pPr>
             <a:r>
-              <a:t>ตรวจทั้ง 59 ภาพแล้ว: ชื่อสินค้าถอดครบ 12 | อ่านได้บางส่วน 45 | ไม่มีบรรทัดชื่อ 2</a:t>
+              <a:t>ตรวจทั้ง 59 ภาพแล้ว: ชื่อสินค้าถอดครบ 12 | ถอดไม่ครบ 45 | ไม่มีบรรทัดชื่อ 2</a:t>
             </a:r>
           </a:p>
         </p:txBody>
@@ -6147,7 +6147,7 @@
               </a:defRPr>
             </a:pPr>
             <a:r>
-              <a:t>อ่านได้บางส่วน</a:t>
+              <a:t>ถอดไม่ครบ</a:t>
             </a:r>
           </a:p>
         </p:txBody>
@@ -6186,7 +6186,7 @@
               </a:defRPr>
             </a:pPr>
             <a:r>
-              <a:t>ยังมีอย่างน้อยหนึ่งบรรทัดอ่านไม่ครบ</a:t>
+              <a:t>28 ภาพอ่านได้บางช่วง; 17 ยังยืนยันไม่ได้</a:t>
             </a:r>
           </a:p>
         </p:txBody>
@@ -12505,7 +12505,7 @@
               </a:defRPr>
             </a:pPr>
             <a:r>
-              <a:t>ผ่านเกณฑ์ Scopus เบื้องต้น</a:t>
+              <a:t>สถานะ Scopus เบื้องต้น</a:t>
             </a:r>
           </a:p>
         </p:txBody>
@@ -12626,7 +12626,7 @@
               </a:defRPr>
             </a:pPr>
             <a:r>
-              <a:t>ยืนยันสถานะแล้ว</a:t>
+              <a:t>คงไว้หลังตรวจซ้ำ (มีข้อสงวน 1)</a:t>
             </a:r>
           </a:p>
         </p:txBody>
@@ -12786,7 +12786,7 @@
               </a:defRPr>
             </a:pPr>
             <a:r>
-              <a:t>12 ฉบับถูกจัดตามสามมิติของกรอบ Performance Trade-off; อีก 1 ฉบับใช้สนับสนุนข้ามศาสตร์</a:t>
+              <a:t>บทความ 12 ฉบับรวม P5 ที่ใช้สนับสนุนข้ามศาสตร์; อีก 11 ฉบับอยู่ในกรอบสามมิติ</a:t>
             </a:r>
           </a:p>
         </p:txBody>

--- a/ass5_output/Residential_Intelligence_Project_Progress_READY_2026-10-18.pptx
+++ b/ass5_output/Residential_Intelligence_Project_Progress_READY_2026-10-18.pptx
@@ -3225,14 +3225,21 @@
               <a:spcAft>
                 <a:spcPts val="400"/>
               </a:spcAft>
-              <a:defRPr sz="2100" b="1">
+              <a:defRPr sz="2100" b="1" lang="th-TH">
                 <a:solidFill>
                   <a:srgbClr val="FFFFFF"/>
                 </a:solidFill>
                 <a:latin typeface="Tahoma"/>
-              </a:defRPr>
-            </a:pPr>
-            <a:r>
+                <a:ea typeface="Tahoma"/>
+                <a:cs typeface="Tahoma"/>
+              </a:defRPr>
+            </a:pPr>
+            <a:r>
+              <a:rPr lang="th-TH">
+                <a:latin typeface="Tahoma"/>
+                <a:ea typeface="Tahoma"/>
+                <a:cs typeface="Tahoma"/>
+              </a:rPr>
               <a:t>การนำเสนอความก้าวหน้าโครงงานคอมพิวเตอร์</a:t>
             </a:r>
           </a:p>
@@ -3264,14 +3271,21 @@
               <a:spcAft>
                 <a:spcPts val="400"/>
               </a:spcAft>
-              <a:defRPr sz="2800" b="1">
+              <a:defRPr sz="2800" b="1" lang="th-TH">
                 <a:solidFill>
                   <a:srgbClr val="FFFFFF"/>
                 </a:solidFill>
                 <a:latin typeface="Tahoma"/>
-              </a:defRPr>
-            </a:pPr>
-            <a:r>
+                <a:ea typeface="Tahoma"/>
+                <a:cs typeface="Tahoma"/>
+              </a:defRPr>
+            </a:pPr>
+            <a:r>
+              <a:rPr lang="th-TH">
+                <a:latin typeface="Tahoma"/>
+                <a:ea typeface="Tahoma"/>
+                <a:cs typeface="Tahoma"/>
+              </a:rPr>
               <a:t>การพัฒนาระบบประสาทส่วนกลางอัจฉริยะในที่พักอาศัย</a:t>
             </a:r>
           </a:p>
@@ -3280,14 +3294,21 @@
               <a:spcAft>
                 <a:spcPts val="400"/>
               </a:spcAft>
-              <a:defRPr sz="2800" b="1">
+              <a:defRPr sz="2800" b="1" lang="th-TH">
                 <a:solidFill>
                   <a:srgbClr val="FFFFFF"/>
                 </a:solidFill>
                 <a:latin typeface="Tahoma"/>
-              </a:defRPr>
-            </a:pPr>
-            <a:r>
+                <a:ea typeface="Tahoma"/>
+                <a:cs typeface="Tahoma"/>
+              </a:defRPr>
+            </a:pPr>
+            <a:r>
+              <a:rPr lang="th-TH">
+                <a:latin typeface="Tahoma"/>
+                <a:ea typeface="Tahoma"/>
+                <a:cs typeface="Tahoma"/>
+              </a:rPr>
               <a:t>เพื่อสกัดและวิเคราะห์ข้อมูลห่วงโซ่อุปทานในครัวเรือน</a:t>
             </a:r>
           </a:p>
@@ -3296,14 +3317,21 @@
               <a:spcAft>
                 <a:spcPts val="400"/>
               </a:spcAft>
-              <a:defRPr sz="2800" b="1">
+              <a:defRPr sz="2800" b="1" lang="th-TH">
                 <a:solidFill>
                   <a:srgbClr val="FFFFFF"/>
                 </a:solidFill>
                 <a:latin typeface="Tahoma"/>
-              </a:defRPr>
-            </a:pPr>
-            <a:r>
+                <a:ea typeface="Tahoma"/>
+                <a:cs typeface="Tahoma"/>
+              </a:defRPr>
+            </a:pPr>
+            <a:r>
+              <a:rPr lang="th-TH">
+                <a:latin typeface="Tahoma"/>
+                <a:ea typeface="Tahoma"/>
+                <a:cs typeface="Tahoma"/>
+              </a:rPr>
               <a:t>ด้วยปัญญาประดิษฐ์ประมวลผลเฉพาะถิ่น</a:t>
             </a:r>
           </a:p>
@@ -3370,14 +3398,21 @@
               <a:spcAft>
                 <a:spcPts val="400"/>
               </a:spcAft>
-              <a:defRPr sz="1800" b="0">
+              <a:defRPr sz="1800" b="0" lang="th-TH">
                 <a:solidFill>
                   <a:srgbClr val="FFFFFF"/>
                 </a:solidFill>
                 <a:latin typeface="Tahoma"/>
-              </a:defRPr>
-            </a:pPr>
-            <a:r>
+                <a:ea typeface="Tahoma"/>
+                <a:cs typeface="Tahoma"/>
+              </a:defRPr>
+            </a:pPr>
+            <a:r>
+              <a:rPr lang="th-TH">
+                <a:latin typeface="Tahoma"/>
+                <a:ea typeface="Tahoma"/>
+                <a:cs typeface="Tahoma"/>
+              </a:rPr>
               <a:t>673380267-4 นายณัชพล เพ็งพล</a:t>
             </a:r>
           </a:p>
@@ -3386,14 +3421,21 @@
               <a:spcAft>
                 <a:spcPts val="400"/>
               </a:spcAft>
-              <a:defRPr sz="1800" b="0">
+              <a:defRPr sz="1800" b="0" lang="th-TH">
                 <a:solidFill>
                   <a:srgbClr val="FFFFFF"/>
                 </a:solidFill>
                 <a:latin typeface="Tahoma"/>
-              </a:defRPr>
-            </a:pPr>
-            <a:r>
+                <a:ea typeface="Tahoma"/>
+                <a:cs typeface="Tahoma"/>
+              </a:defRPr>
+            </a:pPr>
+            <a:r>
+              <a:rPr lang="th-TH">
+                <a:latin typeface="Tahoma"/>
+                <a:ea typeface="Tahoma"/>
+                <a:cs typeface="Tahoma"/>
+              </a:rPr>
               <a:t>673380270-5 นายธนบดี เริ่มรักสกุล</a:t>
             </a:r>
           </a:p>
@@ -3425,14 +3467,21 @@
               <a:spcAft>
                 <a:spcPts val="400"/>
               </a:spcAft>
-              <a:defRPr sz="1700" b="0">
+              <a:defRPr sz="1700" b="0" lang="th-TH">
                 <a:solidFill>
                   <a:srgbClr val="FFFFFF"/>
                 </a:solidFill>
                 <a:latin typeface="Tahoma"/>
-              </a:defRPr>
-            </a:pPr>
-            <a:r>
+                <a:ea typeface="Tahoma"/>
+                <a:cs typeface="Tahoma"/>
+              </a:defRPr>
+            </a:pPr>
+            <a:r>
+              <a:rPr lang="th-TH">
+                <a:latin typeface="Tahoma"/>
+                <a:ea typeface="Tahoma"/>
+                <a:cs typeface="Tahoma"/>
+              </a:rPr>
               <a:t>อาจารย์ที่ปรึกษา ผศ.บุญทรัพย์ ไวคำ</a:t>
             </a:r>
           </a:p>
@@ -3464,14 +3513,21 @@
               <a:spcAft>
                 <a:spcPts val="400"/>
               </a:spcAft>
-              <a:defRPr sz="1500" b="1">
+              <a:defRPr sz="1500" b="1" lang="th-TH">
                 <a:solidFill>
                   <a:srgbClr val="FFFFFF"/>
                 </a:solidFill>
                 <a:latin typeface="Tahoma"/>
-              </a:defRPr>
-            </a:pPr>
-            <a:r>
+                <a:ea typeface="Tahoma"/>
+                <a:cs typeface="Tahoma"/>
+              </a:defRPr>
+            </a:pPr>
+            <a:r>
+              <a:rPr lang="th-TH">
+                <a:latin typeface="Tahoma"/>
+                <a:ea typeface="Tahoma"/>
+                <a:cs typeface="Tahoma"/>
+              </a:rPr>
               <a:t>หมายเลขโครงงาน SCS3-4  |  กลุ่มสอบ SCS3</a:t>
             </a:r>
           </a:p>
@@ -3503,14 +3559,21 @@
               <a:spcAft>
                 <a:spcPts val="400"/>
               </a:spcAft>
-              <a:defRPr sz="1100" b="0">
+              <a:defRPr sz="1100" b="0" lang="th-TH">
                 <a:solidFill>
                   <a:srgbClr val="FFFFFF"/>
                 </a:solidFill>
                 <a:latin typeface="Tahoma"/>
-              </a:defRPr>
-            </a:pPr>
-            <a:r>
+                <a:ea typeface="Tahoma"/>
+                <a:cs typeface="Tahoma"/>
+              </a:defRPr>
+            </a:pPr>
+            <a:r>
+              <a:rPr lang="th-TH">
+                <a:latin typeface="Tahoma"/>
+                <a:ea typeface="Tahoma"/>
+                <a:cs typeface="Tahoma"/>
+              </a:rPr>
               <a:t>สาขาวิชาวิทยาการคอมพิวเตอร์ มหาวิทยาลัยขอนแก่น</a:t>
             </a:r>
           </a:p>
@@ -3542,14 +3605,21 @@
               <a:spcAft>
                 <a:spcPts val="400"/>
               </a:spcAft>
-              <a:defRPr sz="900" b="0">
+              <a:defRPr sz="900" b="0" lang="th-TH">
                 <a:solidFill>
                   <a:srgbClr val="FFFFFF"/>
                 </a:solidFill>
                 <a:latin typeface="Tahoma"/>
-              </a:defRPr>
-            </a:pPr>
-            <a:r>
+                <a:ea typeface="Tahoma"/>
+                <a:cs typeface="Tahoma"/>
+              </a:defRPr>
+            </a:pPr>
+            <a:r>
+              <a:rPr lang="th-TH">
+                <a:latin typeface="Tahoma"/>
+                <a:ea typeface="Tahoma"/>
+                <a:cs typeface="Tahoma"/>
+              </a:rPr>
               <a:t>1</a:t>
             </a:r>
           </a:p>
@@ -3607,15 +3677,22 @@
               <a:spcAft>
                 <a:spcPts val="400"/>
               </a:spcAft>
-              <a:defRPr sz="2800" b="1">
+              <a:defRPr sz="2800" b="1" lang="th-TH">
                 <a:solidFill>
                   <a:srgbClr val="1D2A5D"/>
                 </a:solidFill>
                 <a:latin typeface="Tahoma"/>
-              </a:defRPr>
-            </a:pPr>
-            <a:r>
-              <a:t>จากฐานวิชาการสู่ผลทดลอง</a:t>
+                <a:ea typeface="Tahoma"/>
+                <a:cs typeface="Tahoma"/>
+              </a:defRPr>
+            </a:pPr>
+            <a:r>
+              <a:rPr lang="th-TH">
+                <a:latin typeface="Tahoma"/>
+                <a:ea typeface="Tahoma"/>
+                <a:cs typeface="Tahoma"/>
+              </a:rPr>
+              <a:t>ภาพหนึ่งใบจะกลายเป็นข้อมูลอะไร?</a:t>
             </a:r>
           </a:p>
         </p:txBody>
@@ -3646,15 +3723,22 @@
               <a:spcAft>
                 <a:spcPts val="400"/>
               </a:spcAft>
-              <a:defRPr sz="1500" b="0">
+              <a:defRPr sz="1500" b="0" lang="th-TH">
                 <a:solidFill>
                   <a:srgbClr val="576975"/>
                 </a:solidFill>
                 <a:latin typeface="Tahoma"/>
-              </a:defRPr>
-            </a:pPr>
-            <a:r>
-              <a:t>กรอบวรรณกรรม สถาปัตยกรรม และแผนเดิม นำมาสู่การทดลองนำร่องที่ตรวจได้</a:t>
+                <a:ea typeface="Tahoma"/>
+                <a:cs typeface="Tahoma"/>
+              </a:defRPr>
+            </a:pPr>
+            <a:r>
+              <a:rPr lang="th-TH">
+                <a:latin typeface="Tahoma"/>
+                <a:ea typeface="Tahoma"/>
+                <a:cs typeface="Tahoma"/>
+              </a:rPr>
+              <a:t>ตัวอย่างผลลัพธ์เป้าหมาย ใช้ข้อมูลสมมติ ยังไม่ได้พัฒนาระบบนี้</a:t>
             </a:r>
           </a:p>
         </p:txBody>
@@ -3720,14 +3804,21 @@
               <a:spcAft>
                 <a:spcPts val="400"/>
               </a:spcAft>
-              <a:defRPr sz="900" b="0">
+              <a:defRPr sz="900" b="0" lang="th-TH">
                 <a:solidFill>
                   <a:srgbClr val="576975"/>
                 </a:solidFill>
                 <a:latin typeface="Tahoma"/>
-              </a:defRPr>
-            </a:pPr>
-            <a:r>
+                <a:ea typeface="Tahoma"/>
+                <a:cs typeface="Tahoma"/>
+              </a:defRPr>
+            </a:pPr>
+            <a:r>
+              <a:rPr lang="th-TH">
+                <a:latin typeface="Tahoma"/>
+                <a:ea typeface="Tahoma"/>
+                <a:cs typeface="Tahoma"/>
+              </a:rPr>
               <a:t>โครงงานคอมพิวเตอร์ | รายงานความก้าวหน้า | 18 ต.ค. 2569</a:t>
             </a:r>
           </a:p>
@@ -3759,14 +3850,21 @@
               <a:spcAft>
                 <a:spcPts val="400"/>
               </a:spcAft>
-              <a:defRPr sz="900" b="0">
+              <a:defRPr sz="900" b="0" lang="th-TH">
                 <a:solidFill>
                   <a:srgbClr val="576975"/>
                 </a:solidFill>
                 <a:latin typeface="Tahoma"/>
-              </a:defRPr>
-            </a:pPr>
-            <a:r>
+                <a:ea typeface="Tahoma"/>
+                <a:cs typeface="Tahoma"/>
+              </a:defRPr>
+            </a:pPr>
+            <a:r>
+              <a:rPr lang="th-TH">
+                <a:latin typeface="Tahoma"/>
+                <a:ea typeface="Tahoma"/>
+                <a:cs typeface="Tahoma"/>
+              </a:rPr>
               <a:t>10</a:t>
             </a:r>
           </a:p>
@@ -3780,8 +3878,8 @@
         </p:nvSpPr>
         <p:spPr>
           <a:xfrm>
-            <a:off x="731520" y="1600200"/>
-            <a:ext cx="10716768" cy="987552"/>
+            <a:off x="713232" y="1709928"/>
+            <a:ext cx="2514600" cy="3602736"/>
           </a:xfrm>
           <a:prstGeom prst="roundRect">
             <a:avLst/>
@@ -3823,125 +3921,298 @@
         </p:nvSpPr>
         <p:spPr>
           <a:xfrm>
-            <a:off x="960120" y="1746504"/>
-            <a:ext cx="1856231" cy="621792"/>
-          </a:xfrm>
-          <a:prstGeom prst="rect">
-            <a:avLst/>
-          </a:prstGeom>
-          <a:noFill/>
-        </p:spPr>
-        <p:txBody>
-          <a:bodyPr wrap="square" lIns="18288" rIns="18288" tIns="0" bIns="0">
-            <a:spAutoFit/>
-          </a:bodyPr>
-          <a:lstStyle/>
-          <a:p>
-            <a:pPr algn="l">
-              <a:spcAft>
-                <a:spcPts val="400"/>
-              </a:spcAft>
-              <a:defRPr sz="1800" b="1">
+            <a:off x="905256" y="1901952"/>
+            <a:ext cx="2103120" cy="411480"/>
+          </a:xfrm>
+          <a:prstGeom prst="rect">
+            <a:avLst/>
+          </a:prstGeom>
+          <a:noFill/>
+        </p:spPr>
+        <p:txBody>
+          <a:bodyPr wrap="square" lIns="18288" rIns="18288" tIns="0" bIns="0">
+            <a:spAutoFit/>
+          </a:bodyPr>
+          <a:lstStyle/>
+          <a:p>
+            <a:pPr algn="l">
+              <a:spcAft>
+                <a:spcPts val="400"/>
+              </a:spcAft>
+              <a:defRPr sz="2000" b="1" lang="th-TH">
                 <a:solidFill>
                   <a:srgbClr val="1D2A5D"/>
                 </a:solidFill>
                 <a:latin typeface="Tahoma"/>
-              </a:defRPr>
-            </a:pPr>
-            <a:r>
-              <a:t>งานวิจัย 3 มิติ</a:t>
-            </a:r>
-          </a:p>
-        </p:txBody>
-      </p:sp>
-      <p:sp>
-        <p:nvSpPr>
-          <p:cNvPr id="9" name="TextBox 8"/>
-          <p:cNvSpPr txBox="1"/>
-          <p:nvPr/>
-        </p:nvSpPr>
-        <p:spPr>
-          <a:xfrm>
-            <a:off x="2834640" y="1746504"/>
-            <a:ext cx="3886200" cy="621792"/>
-          </a:xfrm>
-          <a:prstGeom prst="rect">
-            <a:avLst/>
-          </a:prstGeom>
-          <a:noFill/>
-        </p:spPr>
-        <p:txBody>
-          <a:bodyPr wrap="square" lIns="18288" rIns="18288" tIns="0" bIns="0">
-            <a:spAutoFit/>
-          </a:bodyPr>
-          <a:lstStyle/>
-          <a:p>
-            <a:pPr algn="l">
-              <a:spcAft>
-                <a:spcPts val="400"/>
-              </a:spcAft>
-              <a:defRPr sz="1600" b="0">
+                <a:ea typeface="Tahoma"/>
+                <a:cs typeface="Tahoma"/>
+              </a:defRPr>
+            </a:pPr>
+            <a:r>
+              <a:rPr lang="th-TH">
+                <a:latin typeface="Tahoma"/>
+                <a:ea typeface="Tahoma"/>
+                <a:cs typeface="Tahoma"/>
+              </a:rPr>
+              <a:t>1  รับภาพใบเสร็จ</a:t>
+            </a:r>
+          </a:p>
+        </p:txBody>
+      </p:sp>
+      <p:sp>
+        <p:nvSpPr>
+          <p:cNvPr id="9" name="Rectangle 8"/>
+          <p:cNvSpPr/>
+          <p:nvPr/>
+        </p:nvSpPr>
+        <p:spPr>
+          <a:xfrm>
+            <a:off x="950976" y="2505456"/>
+            <a:ext cx="2039112" cy="2404872"/>
+          </a:xfrm>
+          <a:prstGeom prst="rect">
+            <a:avLst/>
+          </a:prstGeom>
+          <a:solidFill>
+            <a:srgbClr val="FFFFFF"/>
+          </a:solidFill>
+          <a:ln w="12700">
+            <a:solidFill>
+              <a:srgbClr val="D3DFE7"/>
+            </a:solidFill>
+          </a:ln>
+        </p:spPr>
+        <p:style>
+          <a:lnRef idx="1">
+            <a:schemeClr val="accent1"/>
+          </a:lnRef>
+          <a:fillRef idx="3">
+            <a:schemeClr val="accent1"/>
+          </a:fillRef>
+          <a:effectRef idx="2">
+            <a:schemeClr val="accent1"/>
+          </a:effectRef>
+          <a:fontRef idx="minor">
+            <a:schemeClr val="lt1"/>
+          </a:fontRef>
+        </p:style>
+        <p:txBody>
+          <a:bodyPr rtlCol="0" anchor="ctr"/>
+          <a:lstStyle/>
+          <a:p>
+            <a:pPr algn="ctr"/>
+          </a:p>
+        </p:txBody>
+      </p:sp>
+      <p:sp>
+        <p:nvSpPr>
+          <p:cNvPr id="10" name="TextBox 9"/>
+          <p:cNvSpPr txBox="1"/>
+          <p:nvPr/>
+        </p:nvSpPr>
+        <p:spPr>
+          <a:xfrm>
+            <a:off x="1088136" y="2688336"/>
+            <a:ext cx="1773936" cy="2020824"/>
+          </a:xfrm>
+          <a:prstGeom prst="rect">
+            <a:avLst/>
+          </a:prstGeom>
+          <a:noFill/>
+        </p:spPr>
+        <p:txBody>
+          <a:bodyPr wrap="square" lIns="18288" rIns="18288" tIns="0" bIns="0">
+            <a:spAutoFit/>
+          </a:bodyPr>
+          <a:lstStyle/>
+          <a:p>
+            <a:pPr algn="l">
+              <a:spcAft>
+                <a:spcPts val="400"/>
+              </a:spcAft>
+              <a:defRPr sz="1600" b="0" lang="th-TH">
                 <a:solidFill>
                   <a:srgbClr val="1D2F3E"/>
                 </a:solidFill>
                 <a:latin typeface="Tahoma"/>
-              </a:defRPr>
-            </a:pPr>
-            <a:r>
-              <a:t>ฐานคิด: quantization / JSON / IoT</a:t>
-            </a:r>
-          </a:p>
-        </p:txBody>
-      </p:sp>
-      <p:sp>
-        <p:nvSpPr>
-          <p:cNvPr id="10" name="TextBox 9"/>
-          <p:cNvSpPr txBox="1"/>
-          <p:nvPr/>
-        </p:nvSpPr>
-        <p:spPr>
-          <a:xfrm>
-            <a:off x="6858000" y="1746504"/>
-            <a:ext cx="4160520" cy="621792"/>
-          </a:xfrm>
-          <a:prstGeom prst="rect">
-            <a:avLst/>
-          </a:prstGeom>
-          <a:noFill/>
-        </p:spPr>
-        <p:txBody>
-          <a:bodyPr wrap="square" lIns="18288" rIns="18288" tIns="0" bIns="0">
-            <a:spAutoFit/>
-          </a:bodyPr>
-          <a:lstStyle/>
-          <a:p>
-            <a:pPr algn="l">
-              <a:spcAft>
-                <a:spcPts val="400"/>
-              </a:spcAft>
-              <a:defRPr sz="1600" b="1">
-                <a:solidFill>
-                  <a:srgbClr val="006289"/>
-                </a:solidFill>
-                <a:latin typeface="Tahoma"/>
-              </a:defRPr>
-            </a:pPr>
-            <a:r>
-              <a:t>นำมาใช้: ตัวแปรและตัววัดการทดลอง</a:t>
-            </a:r>
-          </a:p>
-        </p:txBody>
-      </p:sp>
-      <p:sp>
-        <p:nvSpPr>
-          <p:cNvPr id="11" name="Rounded Rectangle 10"/>
+                <a:ea typeface="Tahoma"/>
+                <a:cs typeface="Tahoma"/>
+              </a:defRPr>
+            </a:pPr>
+            <a:r>
+              <a:rPr lang="th-TH">
+                <a:latin typeface="Tahoma"/>
+                <a:ea typeface="Tahoma"/>
+                <a:cs typeface="Tahoma"/>
+              </a:rPr>
+              <a:t>ร้านตัวอย่าง</a:t>
+            </a:r>
+          </a:p>
+          <a:p>
+            <a:pPr algn="l">
+              <a:spcAft>
+                <a:spcPts val="400"/>
+              </a:spcAft>
+              <a:defRPr sz="1600" b="0" lang="th-TH">
+                <a:solidFill>
+                  <a:srgbClr val="1D2F3E"/>
+                </a:solidFill>
+                <a:latin typeface="Tahoma"/>
+                <a:ea typeface="Tahoma"/>
+                <a:cs typeface="Tahoma"/>
+              </a:defRPr>
+            </a:pPr>
+            <a:r>
+              <a:rPr lang="th-TH">
+                <a:latin typeface="Tahoma"/>
+                <a:ea typeface="Tahoma"/>
+                <a:cs typeface="Tahoma"/>
+              </a:rPr>
+              <a:t>18 ต.ค. 2569</a:t>
+            </a:r>
+          </a:p>
+          <a:p>
+            <a:pPr algn="l">
+              <a:spcAft>
+                <a:spcPts val="400"/>
+              </a:spcAft>
+              <a:defRPr sz="1600" b="0" lang="th-TH">
+                <a:solidFill>
+                  <a:srgbClr val="1D2F3E"/>
+                </a:solidFill>
+                <a:latin typeface="Tahoma"/>
+                <a:ea typeface="Tahoma"/>
+                <a:cs typeface="Tahoma"/>
+              </a:defRPr>
+            </a:pPr>
+          </a:p>
+          <a:p>
+            <a:pPr algn="l">
+              <a:spcAft>
+                <a:spcPts val="400"/>
+              </a:spcAft>
+              <a:defRPr sz="1600" b="0" lang="th-TH">
+                <a:solidFill>
+                  <a:srgbClr val="1D2F3E"/>
+                </a:solidFill>
+                <a:latin typeface="Tahoma"/>
+                <a:ea typeface="Tahoma"/>
+                <a:cs typeface="Tahoma"/>
+              </a:defRPr>
+            </a:pPr>
+            <a:r>
+              <a:rPr lang="th-TH">
+                <a:latin typeface="Tahoma"/>
+                <a:ea typeface="Tahoma"/>
+                <a:cs typeface="Tahoma"/>
+              </a:rPr>
+              <a:t>ข้าว 1 ถุง       100</a:t>
+            </a:r>
+          </a:p>
+          <a:p>
+            <a:pPr algn="l">
+              <a:spcAft>
+                <a:spcPts val="400"/>
+              </a:spcAft>
+              <a:defRPr sz="1600" b="0" lang="th-TH">
+                <a:solidFill>
+                  <a:srgbClr val="1D2F3E"/>
+                </a:solidFill>
+                <a:latin typeface="Tahoma"/>
+                <a:ea typeface="Tahoma"/>
+                <a:cs typeface="Tahoma"/>
+              </a:defRPr>
+            </a:pPr>
+            <a:r>
+              <a:rPr lang="th-TH">
+                <a:latin typeface="Tahoma"/>
+                <a:ea typeface="Tahoma"/>
+                <a:cs typeface="Tahoma"/>
+              </a:rPr>
+              <a:t>นม 2 กล่อง      50</a:t>
+            </a:r>
+          </a:p>
+          <a:p>
+            <a:pPr algn="l">
+              <a:spcAft>
+                <a:spcPts val="400"/>
+              </a:spcAft>
+              <a:defRPr sz="1600" b="0" lang="th-TH">
+                <a:solidFill>
+                  <a:srgbClr val="1D2F3E"/>
+                </a:solidFill>
+                <a:latin typeface="Tahoma"/>
+                <a:ea typeface="Tahoma"/>
+                <a:cs typeface="Tahoma"/>
+              </a:defRPr>
+            </a:pPr>
+            <a:r>
+              <a:rPr lang="th-TH">
+                <a:latin typeface="Tahoma"/>
+                <a:ea typeface="Tahoma"/>
+                <a:cs typeface="Tahoma"/>
+              </a:rPr>
+              <a:t>รวม 150 บาท</a:t>
+            </a:r>
+          </a:p>
+        </p:txBody>
+      </p:sp>
+      <p:sp>
+        <p:nvSpPr>
+          <p:cNvPr id="11" name="TextBox 10"/>
+          <p:cNvSpPr txBox="1"/>
+          <p:nvPr/>
+        </p:nvSpPr>
+        <p:spPr>
+          <a:xfrm>
+            <a:off x="3264408" y="3108960"/>
+            <a:ext cx="365760" cy="457200"/>
+          </a:xfrm>
+          <a:prstGeom prst="rect">
+            <a:avLst/>
+          </a:prstGeom>
+          <a:noFill/>
+        </p:spPr>
+        <p:txBody>
+          <a:bodyPr wrap="square" lIns="18288" rIns="18288" tIns="0" bIns="0">
+            <a:spAutoFit/>
+          </a:bodyPr>
+          <a:lstStyle/>
+          <a:p>
+            <a:pPr algn="l">
+              <a:spcAft>
+                <a:spcPts val="400"/>
+              </a:spcAft>
+              <a:defRPr sz="2500" b="1" lang="th-TH">
+                <a:solidFill>
+                  <a:srgbClr val="137E9A"/>
+                </a:solidFill>
+                <a:latin typeface="Tahoma"/>
+                <a:ea typeface="Tahoma"/>
+                <a:cs typeface="Tahoma"/>
+              </a:defRPr>
+            </a:pPr>
+            <a:r>
+              <a:rPr lang="th-TH">
+                <a:latin typeface="Tahoma"/>
+                <a:ea typeface="Tahoma"/>
+                <a:cs typeface="Tahoma"/>
+              </a:rPr>
+              <a:t>→</a:t>
+            </a:r>
+          </a:p>
+        </p:txBody>
+      </p:sp>
+      <p:sp>
+        <p:nvSpPr>
+          <p:cNvPr id="12" name="Rounded Rectangle 11"/>
           <p:cNvSpPr/>
           <p:nvPr/>
         </p:nvSpPr>
         <p:spPr>
           <a:xfrm>
-            <a:off x="731520" y="2852928"/>
-            <a:ext cx="10716768" cy="987552"/>
+            <a:off x="3675887" y="1709928"/>
+            <a:ext cx="4526280" cy="3602736"/>
           </a:xfrm>
           <a:prstGeom prst="roundRect">
             <a:avLst/>
@@ -3977,137 +4248,112 @@
       </p:sp>
       <p:sp>
         <p:nvSpPr>
-          <p:cNvPr id="12" name="TextBox 11"/>
-          <p:cNvSpPr txBox="1"/>
-          <p:nvPr/>
-        </p:nvSpPr>
-        <p:spPr>
-          <a:xfrm>
-            <a:off x="960120" y="2999232"/>
-            <a:ext cx="1856231" cy="621792"/>
-          </a:xfrm>
-          <a:prstGeom prst="rect">
-            <a:avLst/>
-          </a:prstGeom>
-          <a:noFill/>
-        </p:spPr>
-        <p:txBody>
-          <a:bodyPr wrap="square" lIns="18288" rIns="18288" tIns="0" bIns="0">
-            <a:spAutoFit/>
-          </a:bodyPr>
-          <a:lstStyle/>
-          <a:p>
-            <a:pPr algn="l">
-              <a:spcAft>
-                <a:spcPts val="400"/>
-              </a:spcAft>
-              <a:defRPr sz="1800" b="1">
+          <p:cNvPr id="13" name="TextBox 12"/>
+          <p:cNvSpPr txBox="1"/>
+          <p:nvPr/>
+        </p:nvSpPr>
+        <p:spPr>
+          <a:xfrm>
+            <a:off x="3858768" y="1901952"/>
+            <a:ext cx="4114800" cy="411480"/>
+          </a:xfrm>
+          <a:prstGeom prst="rect">
+            <a:avLst/>
+          </a:prstGeom>
+          <a:noFill/>
+        </p:spPr>
+        <p:txBody>
+          <a:bodyPr wrap="square" lIns="18288" rIns="18288" tIns="0" bIns="0">
+            <a:spAutoFit/>
+          </a:bodyPr>
+          <a:lstStyle/>
+          <a:p>
+            <a:pPr algn="l">
+              <a:spcAft>
+                <a:spcPts val="400"/>
+              </a:spcAft>
+              <a:defRPr sz="2000" b="1" lang="th-TH">
                 <a:solidFill>
                   <a:srgbClr val="1D2A5D"/>
                 </a:solidFill>
                 <a:latin typeface="Tahoma"/>
-              </a:defRPr>
-            </a:pPr>
-            <a:r>
-              <a:t>สถาปัตยกรรม 3 ชั้น</a:t>
-            </a:r>
-          </a:p>
-        </p:txBody>
-      </p:sp>
-      <p:sp>
-        <p:nvSpPr>
-          <p:cNvPr id="13" name="TextBox 12"/>
-          <p:cNvSpPr txBox="1"/>
-          <p:nvPr/>
-        </p:nvSpPr>
-        <p:spPr>
-          <a:xfrm>
-            <a:off x="2834640" y="2999232"/>
-            <a:ext cx="3886200" cy="621792"/>
-          </a:xfrm>
-          <a:prstGeom prst="rect">
-            <a:avLst/>
-          </a:prstGeom>
-          <a:noFill/>
-        </p:spPr>
-        <p:txBody>
-          <a:bodyPr wrap="square" lIns="18288" rIns="18288" tIns="0" bIns="0">
-            <a:spAutoFit/>
-          </a:bodyPr>
-          <a:lstStyle/>
-          <a:p>
-            <a:pPr algn="l">
-              <a:spcAft>
-                <a:spcPts val="400"/>
-              </a:spcAft>
-              <a:defRPr sz="1600" b="0">
+                <a:ea typeface="Tahoma"/>
+                <a:cs typeface="Tahoma"/>
+              </a:defRPr>
+            </a:pPr>
+            <a:r>
+              <a:rPr lang="th-TH">
+                <a:latin typeface="Tahoma"/>
+                <a:ea typeface="Tahoma"/>
+                <a:cs typeface="Tahoma"/>
+              </a:rPr>
+              <a:t>2  สกัดเป็นรายการที่ตรวจได้</a:t>
+            </a:r>
+          </a:p>
+        </p:txBody>
+      </p:sp>
+      <p:sp>
+        <p:nvSpPr>
+          <p:cNvPr id="14" name="TextBox 13"/>
+          <p:cNvSpPr txBox="1"/>
+          <p:nvPr/>
+        </p:nvSpPr>
+        <p:spPr>
+          <a:xfrm>
+            <a:off x="3886200" y="2505456"/>
+            <a:ext cx="4023360" cy="365760"/>
+          </a:xfrm>
+          <a:prstGeom prst="rect">
+            <a:avLst/>
+          </a:prstGeom>
+          <a:noFill/>
+        </p:spPr>
+        <p:txBody>
+          <a:bodyPr wrap="square" lIns="18288" rIns="18288" tIns="0" bIns="0">
+            <a:spAutoFit/>
+          </a:bodyPr>
+          <a:lstStyle/>
+          <a:p>
+            <a:pPr algn="l">
+              <a:spcAft>
+                <a:spcPts val="400"/>
+              </a:spcAft>
+              <a:defRPr sz="1600" b="0" lang="th-TH">
                 <a:solidFill>
                   <a:srgbClr val="1D2F3E"/>
                 </a:solidFill>
                 <a:latin typeface="Tahoma"/>
-              </a:defRPr>
-            </a:pPr>
-            <a:r>
-              <a:t>ฐานคิด: กล้อง–YOLO–OCR–LLM–MQTT</a:t>
-            </a:r>
-          </a:p>
-        </p:txBody>
-      </p:sp>
-      <p:sp>
-        <p:nvSpPr>
-          <p:cNvPr id="14" name="TextBox 13"/>
-          <p:cNvSpPr txBox="1"/>
-          <p:nvPr/>
-        </p:nvSpPr>
-        <p:spPr>
-          <a:xfrm>
-            <a:off x="6858000" y="2999232"/>
-            <a:ext cx="4160520" cy="621792"/>
-          </a:xfrm>
-          <a:prstGeom prst="rect">
-            <a:avLst/>
-          </a:prstGeom>
-          <a:noFill/>
-        </p:spPr>
-        <p:txBody>
-          <a:bodyPr wrap="square" lIns="18288" rIns="18288" tIns="0" bIns="0">
-            <a:spAutoFit/>
-          </a:bodyPr>
-          <a:lstStyle/>
-          <a:p>
-            <a:pPr algn="l">
-              <a:spcAft>
-                <a:spcPts val="400"/>
-              </a:spcAft>
-              <a:defRPr sz="1600" b="1">
-                <a:solidFill>
-                  <a:srgbClr val="006289"/>
-                </a:solidFill>
-                <a:latin typeface="Tahoma"/>
-              </a:defRPr>
-            </a:pPr>
-            <a:r>
-              <a:t>นำมาใช้: e-Senses โดยเริ่มทดลอง e-Eye</a:t>
-            </a:r>
-          </a:p>
-        </p:txBody>
-      </p:sp>
-      <p:sp>
-        <p:nvSpPr>
-          <p:cNvPr id="15" name="Rounded Rectangle 14"/>
+                <a:ea typeface="Tahoma"/>
+                <a:cs typeface="Tahoma"/>
+              </a:defRPr>
+            </a:pPr>
+            <a:r>
+              <a:rPr lang="th-TH">
+                <a:latin typeface="Tahoma"/>
+                <a:ea typeface="Tahoma"/>
+                <a:cs typeface="Tahoma"/>
+              </a:rPr>
+              <a:t>ร้านตัวอย่าง   วันที่ 2026-10-18</a:t>
+            </a:r>
+          </a:p>
+        </p:txBody>
+      </p:sp>
+      <p:sp>
+        <p:nvSpPr>
+          <p:cNvPr id="15" name="Rectangle 14"/>
           <p:cNvSpPr/>
           <p:nvPr/>
         </p:nvSpPr>
         <p:spPr>
           <a:xfrm>
-            <a:off x="731520" y="4105656"/>
-            <a:ext cx="10716768" cy="987552"/>
-          </a:xfrm>
-          <a:prstGeom prst="roundRect">
+            <a:off x="3867912" y="3026664"/>
+            <a:ext cx="4123944" cy="402336"/>
+          </a:xfrm>
+          <a:prstGeom prst="rect">
             <a:avLst/>
           </a:prstGeom>
           <a:solidFill>
-            <a:srgbClr val="F2F6F8"/>
+            <a:srgbClr val="137E9A"/>
           </a:solidFill>
           <a:ln>
             <a:noFill/>
@@ -4143,150 +4389,1069 @@
         </p:nvSpPr>
         <p:spPr>
           <a:xfrm>
-            <a:off x="960120" y="4251960"/>
-            <a:ext cx="1856231" cy="621792"/>
-          </a:xfrm>
-          <a:prstGeom prst="rect">
-            <a:avLst/>
-          </a:prstGeom>
-          <a:noFill/>
-        </p:spPr>
-        <p:txBody>
-          <a:bodyPr wrap="square" lIns="18288" rIns="18288" tIns="0" bIns="0">
-            <a:spAutoFit/>
-          </a:bodyPr>
-          <a:lstStyle/>
-          <a:p>
-            <a:pPr algn="l">
-              <a:spcAft>
-                <a:spcPts val="400"/>
-              </a:spcAft>
-              <a:defRPr sz="1800" b="1">
+            <a:off x="3977639" y="3108960"/>
+            <a:ext cx="1097280" cy="274320"/>
+          </a:xfrm>
+          <a:prstGeom prst="rect">
+            <a:avLst/>
+          </a:prstGeom>
+          <a:noFill/>
+        </p:spPr>
+        <p:txBody>
+          <a:bodyPr wrap="square" lIns="18288" rIns="18288" tIns="0" bIns="0">
+            <a:spAutoFit/>
+          </a:bodyPr>
+          <a:lstStyle/>
+          <a:p>
+            <a:pPr algn="l">
+              <a:spcAft>
+                <a:spcPts val="400"/>
+              </a:spcAft>
+              <a:defRPr sz="1400" b="1" lang="th-TH">
+                <a:solidFill>
+                  <a:srgbClr val="FFFFFF"/>
+                </a:solidFill>
+                <a:latin typeface="Tahoma"/>
+                <a:ea typeface="Tahoma"/>
+                <a:cs typeface="Tahoma"/>
+              </a:defRPr>
+            </a:pPr>
+            <a:r>
+              <a:rPr lang="th-TH">
+                <a:latin typeface="Tahoma"/>
+                <a:ea typeface="Tahoma"/>
+                <a:cs typeface="Tahoma"/>
+              </a:rPr>
+              <a:t>สินค้า</a:t>
+            </a:r>
+          </a:p>
+        </p:txBody>
+      </p:sp>
+      <p:sp>
+        <p:nvSpPr>
+          <p:cNvPr id="17" name="TextBox 16"/>
+          <p:cNvSpPr txBox="1"/>
+          <p:nvPr/>
+        </p:nvSpPr>
+        <p:spPr>
+          <a:xfrm>
+            <a:off x="5166360" y="3108960"/>
+            <a:ext cx="914400" cy="274320"/>
+          </a:xfrm>
+          <a:prstGeom prst="rect">
+            <a:avLst/>
+          </a:prstGeom>
+          <a:noFill/>
+        </p:spPr>
+        <p:txBody>
+          <a:bodyPr wrap="square" lIns="18288" rIns="18288" tIns="0" bIns="0">
+            <a:spAutoFit/>
+          </a:bodyPr>
+          <a:lstStyle/>
+          <a:p>
+            <a:pPr algn="l">
+              <a:spcAft>
+                <a:spcPts val="400"/>
+              </a:spcAft>
+              <a:defRPr sz="1400" b="1" lang="th-TH">
+                <a:solidFill>
+                  <a:srgbClr val="FFFFFF"/>
+                </a:solidFill>
+                <a:latin typeface="Tahoma"/>
+                <a:ea typeface="Tahoma"/>
+                <a:cs typeface="Tahoma"/>
+              </a:defRPr>
+            </a:pPr>
+            <a:r>
+              <a:rPr lang="th-TH">
+                <a:latin typeface="Tahoma"/>
+                <a:ea typeface="Tahoma"/>
+                <a:cs typeface="Tahoma"/>
+              </a:rPr>
+              <a:t>จำนวน</a:t>
+            </a:r>
+          </a:p>
+        </p:txBody>
+      </p:sp>
+      <p:sp>
+        <p:nvSpPr>
+          <p:cNvPr id="18" name="TextBox 17"/>
+          <p:cNvSpPr txBox="1"/>
+          <p:nvPr/>
+        </p:nvSpPr>
+        <p:spPr>
+          <a:xfrm>
+            <a:off x="6227064" y="3108960"/>
+            <a:ext cx="777240" cy="274320"/>
+          </a:xfrm>
+          <a:prstGeom prst="rect">
+            <a:avLst/>
+          </a:prstGeom>
+          <a:noFill/>
+        </p:spPr>
+        <p:txBody>
+          <a:bodyPr wrap="square" lIns="18288" rIns="18288" tIns="0" bIns="0">
+            <a:spAutoFit/>
+          </a:bodyPr>
+          <a:lstStyle/>
+          <a:p>
+            <a:pPr algn="l">
+              <a:spcAft>
+                <a:spcPts val="400"/>
+              </a:spcAft>
+              <a:defRPr sz="1400" b="1" lang="th-TH">
+                <a:solidFill>
+                  <a:srgbClr val="FFFFFF"/>
+                </a:solidFill>
+                <a:latin typeface="Tahoma"/>
+                <a:ea typeface="Tahoma"/>
+                <a:cs typeface="Tahoma"/>
+              </a:defRPr>
+            </a:pPr>
+            <a:r>
+              <a:rPr lang="th-TH">
+                <a:latin typeface="Tahoma"/>
+                <a:ea typeface="Tahoma"/>
+                <a:cs typeface="Tahoma"/>
+              </a:rPr>
+              <a:t>ต่อหน่วย</a:t>
+            </a:r>
+          </a:p>
+        </p:txBody>
+      </p:sp>
+      <p:sp>
+        <p:nvSpPr>
+          <p:cNvPr id="19" name="TextBox 18"/>
+          <p:cNvSpPr txBox="1"/>
+          <p:nvPr/>
+        </p:nvSpPr>
+        <p:spPr>
+          <a:xfrm>
+            <a:off x="7168896" y="3108960"/>
+            <a:ext cx="640080" cy="274320"/>
+          </a:xfrm>
+          <a:prstGeom prst="rect">
+            <a:avLst/>
+          </a:prstGeom>
+          <a:noFill/>
+        </p:spPr>
+        <p:txBody>
+          <a:bodyPr wrap="square" lIns="18288" rIns="18288" tIns="0" bIns="0">
+            <a:spAutoFit/>
+          </a:bodyPr>
+          <a:lstStyle/>
+          <a:p>
+            <a:pPr algn="l">
+              <a:spcAft>
+                <a:spcPts val="400"/>
+              </a:spcAft>
+              <a:defRPr sz="1400" b="1" lang="th-TH">
+                <a:solidFill>
+                  <a:srgbClr val="FFFFFF"/>
+                </a:solidFill>
+                <a:latin typeface="Tahoma"/>
+                <a:ea typeface="Tahoma"/>
+                <a:cs typeface="Tahoma"/>
+              </a:defRPr>
+            </a:pPr>
+            <a:r>
+              <a:rPr lang="th-TH">
+                <a:latin typeface="Tahoma"/>
+                <a:ea typeface="Tahoma"/>
+                <a:cs typeface="Tahoma"/>
+              </a:rPr>
+              <a:t>รวม</a:t>
+            </a:r>
+          </a:p>
+        </p:txBody>
+      </p:sp>
+      <p:sp>
+        <p:nvSpPr>
+          <p:cNvPr id="20" name="TextBox 19"/>
+          <p:cNvSpPr txBox="1"/>
+          <p:nvPr/>
+        </p:nvSpPr>
+        <p:spPr>
+          <a:xfrm>
+            <a:off x="3977639" y="3602736"/>
+            <a:ext cx="1097280" cy="365760"/>
+          </a:xfrm>
+          <a:prstGeom prst="rect">
+            <a:avLst/>
+          </a:prstGeom>
+          <a:noFill/>
+        </p:spPr>
+        <p:txBody>
+          <a:bodyPr wrap="square" lIns="18288" rIns="18288" tIns="0" bIns="0">
+            <a:spAutoFit/>
+          </a:bodyPr>
+          <a:lstStyle/>
+          <a:p>
+            <a:pPr algn="l">
+              <a:spcAft>
+                <a:spcPts val="400"/>
+              </a:spcAft>
+              <a:defRPr sz="1600" b="0" lang="th-TH">
+                <a:solidFill>
+                  <a:srgbClr val="1D2F3E"/>
+                </a:solidFill>
+                <a:latin typeface="Tahoma"/>
+                <a:ea typeface="Tahoma"/>
+                <a:cs typeface="Tahoma"/>
+              </a:defRPr>
+            </a:pPr>
+            <a:r>
+              <a:rPr lang="th-TH">
+                <a:latin typeface="Tahoma"/>
+                <a:ea typeface="Tahoma"/>
+                <a:cs typeface="Tahoma"/>
+              </a:rPr>
+              <a:t>ข้าว</a:t>
+            </a:r>
+          </a:p>
+        </p:txBody>
+      </p:sp>
+      <p:sp>
+        <p:nvSpPr>
+          <p:cNvPr id="21" name="TextBox 20"/>
+          <p:cNvSpPr txBox="1"/>
+          <p:nvPr/>
+        </p:nvSpPr>
+        <p:spPr>
+          <a:xfrm>
+            <a:off x="5166360" y="3602736"/>
+            <a:ext cx="960120" cy="365760"/>
+          </a:xfrm>
+          <a:prstGeom prst="rect">
+            <a:avLst/>
+          </a:prstGeom>
+          <a:noFill/>
+        </p:spPr>
+        <p:txBody>
+          <a:bodyPr wrap="square" lIns="18288" rIns="18288" tIns="0" bIns="0">
+            <a:spAutoFit/>
+          </a:bodyPr>
+          <a:lstStyle/>
+          <a:p>
+            <a:pPr algn="l">
+              <a:spcAft>
+                <a:spcPts val="400"/>
+              </a:spcAft>
+              <a:defRPr sz="1600" b="0" lang="th-TH">
+                <a:solidFill>
+                  <a:srgbClr val="1D2F3E"/>
+                </a:solidFill>
+                <a:latin typeface="Tahoma"/>
+                <a:ea typeface="Tahoma"/>
+                <a:cs typeface="Tahoma"/>
+              </a:defRPr>
+            </a:pPr>
+            <a:r>
+              <a:rPr lang="th-TH">
+                <a:latin typeface="Tahoma"/>
+                <a:ea typeface="Tahoma"/>
+                <a:cs typeface="Tahoma"/>
+              </a:rPr>
+              <a:t>1 ถุง</a:t>
+            </a:r>
+          </a:p>
+        </p:txBody>
+      </p:sp>
+      <p:sp>
+        <p:nvSpPr>
+          <p:cNvPr id="22" name="TextBox 21"/>
+          <p:cNvSpPr txBox="1"/>
+          <p:nvPr/>
+        </p:nvSpPr>
+        <p:spPr>
+          <a:xfrm>
+            <a:off x="6309360" y="3602736"/>
+            <a:ext cx="731520" cy="365760"/>
+          </a:xfrm>
+          <a:prstGeom prst="rect">
+            <a:avLst/>
+          </a:prstGeom>
+          <a:noFill/>
+        </p:spPr>
+        <p:txBody>
+          <a:bodyPr wrap="square" lIns="18288" rIns="18288" tIns="0" bIns="0">
+            <a:spAutoFit/>
+          </a:bodyPr>
+          <a:lstStyle/>
+          <a:p>
+            <a:pPr algn="l">
+              <a:spcAft>
+                <a:spcPts val="400"/>
+              </a:spcAft>
+              <a:defRPr sz="1600" b="0" lang="th-TH">
+                <a:solidFill>
+                  <a:srgbClr val="1D2F3E"/>
+                </a:solidFill>
+                <a:latin typeface="Tahoma"/>
+                <a:ea typeface="Tahoma"/>
+                <a:cs typeface="Tahoma"/>
+              </a:defRPr>
+            </a:pPr>
+            <a:r>
+              <a:rPr lang="th-TH">
+                <a:latin typeface="Tahoma"/>
+                <a:ea typeface="Tahoma"/>
+                <a:cs typeface="Tahoma"/>
+              </a:rPr>
+              <a:t>100</a:t>
+            </a:r>
+          </a:p>
+        </p:txBody>
+      </p:sp>
+      <p:sp>
+        <p:nvSpPr>
+          <p:cNvPr id="23" name="TextBox 22"/>
+          <p:cNvSpPr txBox="1"/>
+          <p:nvPr/>
+        </p:nvSpPr>
+        <p:spPr>
+          <a:xfrm>
+            <a:off x="7196328" y="3602736"/>
+            <a:ext cx="685800" cy="365760"/>
+          </a:xfrm>
+          <a:prstGeom prst="rect">
+            <a:avLst/>
+          </a:prstGeom>
+          <a:noFill/>
+        </p:spPr>
+        <p:txBody>
+          <a:bodyPr wrap="square" lIns="18288" rIns="18288" tIns="0" bIns="0">
+            <a:spAutoFit/>
+          </a:bodyPr>
+          <a:lstStyle/>
+          <a:p>
+            <a:pPr algn="l">
+              <a:spcAft>
+                <a:spcPts val="400"/>
+              </a:spcAft>
+              <a:defRPr sz="1600" b="0" lang="th-TH">
+                <a:solidFill>
+                  <a:srgbClr val="1D2F3E"/>
+                </a:solidFill>
+                <a:latin typeface="Tahoma"/>
+                <a:ea typeface="Tahoma"/>
+                <a:cs typeface="Tahoma"/>
+              </a:defRPr>
+            </a:pPr>
+            <a:r>
+              <a:rPr lang="th-TH">
+                <a:latin typeface="Tahoma"/>
+                <a:ea typeface="Tahoma"/>
+                <a:cs typeface="Tahoma"/>
+              </a:rPr>
+              <a:t>100</a:t>
+            </a:r>
+          </a:p>
+        </p:txBody>
+      </p:sp>
+      <p:sp>
+        <p:nvSpPr>
+          <p:cNvPr id="24" name="TextBox 23"/>
+          <p:cNvSpPr txBox="1"/>
+          <p:nvPr/>
+        </p:nvSpPr>
+        <p:spPr>
+          <a:xfrm>
+            <a:off x="3977639" y="4087368"/>
+            <a:ext cx="1097280" cy="365760"/>
+          </a:xfrm>
+          <a:prstGeom prst="rect">
+            <a:avLst/>
+          </a:prstGeom>
+          <a:noFill/>
+        </p:spPr>
+        <p:txBody>
+          <a:bodyPr wrap="square" lIns="18288" rIns="18288" tIns="0" bIns="0">
+            <a:spAutoFit/>
+          </a:bodyPr>
+          <a:lstStyle/>
+          <a:p>
+            <a:pPr algn="l">
+              <a:spcAft>
+                <a:spcPts val="400"/>
+              </a:spcAft>
+              <a:defRPr sz="1600" b="0" lang="th-TH">
+                <a:solidFill>
+                  <a:srgbClr val="1D2F3E"/>
+                </a:solidFill>
+                <a:latin typeface="Tahoma"/>
+                <a:ea typeface="Tahoma"/>
+                <a:cs typeface="Tahoma"/>
+              </a:defRPr>
+            </a:pPr>
+            <a:r>
+              <a:rPr lang="th-TH">
+                <a:latin typeface="Tahoma"/>
+                <a:ea typeface="Tahoma"/>
+                <a:cs typeface="Tahoma"/>
+              </a:rPr>
+              <a:t>นม</a:t>
+            </a:r>
+          </a:p>
+        </p:txBody>
+      </p:sp>
+      <p:sp>
+        <p:nvSpPr>
+          <p:cNvPr id="25" name="TextBox 24"/>
+          <p:cNvSpPr txBox="1"/>
+          <p:nvPr/>
+        </p:nvSpPr>
+        <p:spPr>
+          <a:xfrm>
+            <a:off x="5166360" y="4087368"/>
+            <a:ext cx="960120" cy="365760"/>
+          </a:xfrm>
+          <a:prstGeom prst="rect">
+            <a:avLst/>
+          </a:prstGeom>
+          <a:noFill/>
+        </p:spPr>
+        <p:txBody>
+          <a:bodyPr wrap="square" lIns="18288" rIns="18288" tIns="0" bIns="0">
+            <a:spAutoFit/>
+          </a:bodyPr>
+          <a:lstStyle/>
+          <a:p>
+            <a:pPr algn="l">
+              <a:spcAft>
+                <a:spcPts val="400"/>
+              </a:spcAft>
+              <a:defRPr sz="1600" b="0" lang="th-TH">
+                <a:solidFill>
+                  <a:srgbClr val="1D2F3E"/>
+                </a:solidFill>
+                <a:latin typeface="Tahoma"/>
+                <a:ea typeface="Tahoma"/>
+                <a:cs typeface="Tahoma"/>
+              </a:defRPr>
+            </a:pPr>
+            <a:r>
+              <a:rPr lang="th-TH">
+                <a:latin typeface="Tahoma"/>
+                <a:ea typeface="Tahoma"/>
+                <a:cs typeface="Tahoma"/>
+              </a:rPr>
+              <a:t>2 กล่อง</a:t>
+            </a:r>
+          </a:p>
+        </p:txBody>
+      </p:sp>
+      <p:sp>
+        <p:nvSpPr>
+          <p:cNvPr id="26" name="TextBox 25"/>
+          <p:cNvSpPr txBox="1"/>
+          <p:nvPr/>
+        </p:nvSpPr>
+        <p:spPr>
+          <a:xfrm>
+            <a:off x="6309360" y="4087368"/>
+            <a:ext cx="731520" cy="365760"/>
+          </a:xfrm>
+          <a:prstGeom prst="rect">
+            <a:avLst/>
+          </a:prstGeom>
+          <a:noFill/>
+        </p:spPr>
+        <p:txBody>
+          <a:bodyPr wrap="square" lIns="18288" rIns="18288" tIns="0" bIns="0">
+            <a:spAutoFit/>
+          </a:bodyPr>
+          <a:lstStyle/>
+          <a:p>
+            <a:pPr algn="l">
+              <a:spcAft>
+                <a:spcPts val="400"/>
+              </a:spcAft>
+              <a:defRPr sz="1600" b="0" lang="th-TH">
+                <a:solidFill>
+                  <a:srgbClr val="1D2F3E"/>
+                </a:solidFill>
+                <a:latin typeface="Tahoma"/>
+                <a:ea typeface="Tahoma"/>
+                <a:cs typeface="Tahoma"/>
+              </a:defRPr>
+            </a:pPr>
+            <a:r>
+              <a:rPr lang="th-TH">
+                <a:latin typeface="Tahoma"/>
+                <a:ea typeface="Tahoma"/>
+                <a:cs typeface="Tahoma"/>
+              </a:rPr>
+              <a:t>25</a:t>
+            </a:r>
+          </a:p>
+        </p:txBody>
+      </p:sp>
+      <p:sp>
+        <p:nvSpPr>
+          <p:cNvPr id="27" name="TextBox 26"/>
+          <p:cNvSpPr txBox="1"/>
+          <p:nvPr/>
+        </p:nvSpPr>
+        <p:spPr>
+          <a:xfrm>
+            <a:off x="7196328" y="4087368"/>
+            <a:ext cx="685800" cy="365760"/>
+          </a:xfrm>
+          <a:prstGeom prst="rect">
+            <a:avLst/>
+          </a:prstGeom>
+          <a:noFill/>
+        </p:spPr>
+        <p:txBody>
+          <a:bodyPr wrap="square" lIns="18288" rIns="18288" tIns="0" bIns="0">
+            <a:spAutoFit/>
+          </a:bodyPr>
+          <a:lstStyle/>
+          <a:p>
+            <a:pPr algn="l">
+              <a:spcAft>
+                <a:spcPts val="400"/>
+              </a:spcAft>
+              <a:defRPr sz="1600" b="0" lang="th-TH">
+                <a:solidFill>
+                  <a:srgbClr val="1D2F3E"/>
+                </a:solidFill>
+                <a:latin typeface="Tahoma"/>
+                <a:ea typeface="Tahoma"/>
+                <a:cs typeface="Tahoma"/>
+              </a:defRPr>
+            </a:pPr>
+            <a:r>
+              <a:rPr lang="th-TH">
+                <a:latin typeface="Tahoma"/>
+                <a:ea typeface="Tahoma"/>
+                <a:cs typeface="Tahoma"/>
+              </a:rPr>
+              <a:t>50</a:t>
+            </a:r>
+          </a:p>
+        </p:txBody>
+      </p:sp>
+      <p:sp>
+        <p:nvSpPr>
+          <p:cNvPr id="28" name="TextBox 27"/>
+          <p:cNvSpPr txBox="1"/>
+          <p:nvPr/>
+        </p:nvSpPr>
+        <p:spPr>
+          <a:xfrm>
+            <a:off x="3977639" y="4700016"/>
+            <a:ext cx="3794760" cy="365760"/>
+          </a:xfrm>
+          <a:prstGeom prst="rect">
+            <a:avLst/>
+          </a:prstGeom>
+          <a:noFill/>
+        </p:spPr>
+        <p:txBody>
+          <a:bodyPr wrap="square" lIns="18288" rIns="18288" tIns="0" bIns="0">
+            <a:spAutoFit/>
+          </a:bodyPr>
+          <a:lstStyle/>
+          <a:p>
+            <a:pPr algn="l">
+              <a:spcAft>
+                <a:spcPts val="400"/>
+              </a:spcAft>
+              <a:defRPr sz="1800" b="1" lang="th-TH">
                 <a:solidFill>
                   <a:srgbClr val="1D2A5D"/>
                 </a:solidFill>
                 <a:latin typeface="Tahoma"/>
-              </a:defRPr>
-            </a:pPr>
-            <a:r>
-              <a:t>แผนดำเนินงาน</a:t>
-            </a:r>
-          </a:p>
-        </p:txBody>
-      </p:sp>
-      <p:sp>
-        <p:nvSpPr>
-          <p:cNvPr id="17" name="TextBox 16"/>
-          <p:cNvSpPr txBox="1"/>
-          <p:nvPr/>
-        </p:nvSpPr>
-        <p:spPr>
-          <a:xfrm>
-            <a:off x="2834640" y="4251960"/>
-            <a:ext cx="3886200" cy="621792"/>
-          </a:xfrm>
-          <a:prstGeom prst="rect">
-            <a:avLst/>
-          </a:prstGeom>
-          <a:noFill/>
-        </p:spPr>
-        <p:txBody>
-          <a:bodyPr wrap="square" lIns="18288" rIns="18288" tIns="0" bIns="0">
-            <a:spAutoFit/>
-          </a:bodyPr>
-          <a:lstStyle/>
-          <a:p>
-            <a:pPr algn="l">
-              <a:spcAft>
-                <a:spcPts val="400"/>
-              </a:spcAft>
-              <a:defRPr sz="1600" b="0">
+                <a:ea typeface="Tahoma"/>
+                <a:cs typeface="Tahoma"/>
+              </a:defRPr>
+            </a:pPr>
+            <a:r>
+              <a:rPr lang="th-TH">
+                <a:latin typeface="Tahoma"/>
+                <a:ea typeface="Tahoma"/>
+                <a:cs typeface="Tahoma"/>
+              </a:rPr>
+              <a:t>ยอดรวม 150 THB</a:t>
+            </a:r>
+          </a:p>
+        </p:txBody>
+      </p:sp>
+      <p:sp>
+        <p:nvSpPr>
+          <p:cNvPr id="29" name="TextBox 28"/>
+          <p:cNvSpPr txBox="1"/>
+          <p:nvPr/>
+        </p:nvSpPr>
+        <p:spPr>
+          <a:xfrm>
+            <a:off x="8247888" y="3108960"/>
+            <a:ext cx="365760" cy="457200"/>
+          </a:xfrm>
+          <a:prstGeom prst="rect">
+            <a:avLst/>
+          </a:prstGeom>
+          <a:noFill/>
+        </p:spPr>
+        <p:txBody>
+          <a:bodyPr wrap="square" lIns="18288" rIns="18288" tIns="0" bIns="0">
+            <a:spAutoFit/>
+          </a:bodyPr>
+          <a:lstStyle/>
+          <a:p>
+            <a:pPr algn="l">
+              <a:spcAft>
+                <a:spcPts val="400"/>
+              </a:spcAft>
+              <a:defRPr sz="2500" b="1" lang="th-TH">
+                <a:solidFill>
+                  <a:srgbClr val="137E9A"/>
+                </a:solidFill>
+                <a:latin typeface="Tahoma"/>
+                <a:ea typeface="Tahoma"/>
+                <a:cs typeface="Tahoma"/>
+              </a:defRPr>
+            </a:pPr>
+            <a:r>
+              <a:rPr lang="th-TH">
+                <a:latin typeface="Tahoma"/>
+                <a:ea typeface="Tahoma"/>
+                <a:cs typeface="Tahoma"/>
+              </a:rPr>
+              <a:t>→</a:t>
+            </a:r>
+          </a:p>
+        </p:txBody>
+      </p:sp>
+      <p:sp>
+        <p:nvSpPr>
+          <p:cNvPr id="30" name="Rounded Rectangle 29"/>
+          <p:cNvSpPr/>
+          <p:nvPr/>
+        </p:nvSpPr>
+        <p:spPr>
+          <a:xfrm>
+            <a:off x="8650224" y="1709928"/>
+            <a:ext cx="2807208" cy="3602736"/>
+          </a:xfrm>
+          <a:prstGeom prst="roundRect">
+            <a:avLst/>
+          </a:prstGeom>
+          <a:solidFill>
+            <a:srgbClr val="E1F1EE"/>
+          </a:solidFill>
+          <a:ln>
+            <a:noFill/>
+          </a:ln>
+        </p:spPr>
+        <p:style>
+          <a:lnRef idx="1">
+            <a:schemeClr val="accent1"/>
+          </a:lnRef>
+          <a:fillRef idx="3">
+            <a:schemeClr val="accent1"/>
+          </a:fillRef>
+          <a:effectRef idx="2">
+            <a:schemeClr val="accent1"/>
+          </a:effectRef>
+          <a:fontRef idx="minor">
+            <a:schemeClr val="lt1"/>
+          </a:fontRef>
+        </p:style>
+        <p:txBody>
+          <a:bodyPr rtlCol="0" anchor="ctr"/>
+          <a:lstStyle/>
+          <a:p>
+            <a:pPr algn="ctr"/>
+          </a:p>
+        </p:txBody>
+      </p:sp>
+      <p:sp>
+        <p:nvSpPr>
+          <p:cNvPr id="31" name="TextBox 30"/>
+          <p:cNvSpPr txBox="1"/>
+          <p:nvPr/>
+        </p:nvSpPr>
+        <p:spPr>
+          <a:xfrm>
+            <a:off x="8842248" y="1901952"/>
+            <a:ext cx="2423160" cy="411480"/>
+          </a:xfrm>
+          <a:prstGeom prst="rect">
+            <a:avLst/>
+          </a:prstGeom>
+          <a:noFill/>
+        </p:spPr>
+        <p:txBody>
+          <a:bodyPr wrap="square" lIns="18288" rIns="18288" tIns="0" bIns="0">
+            <a:spAutoFit/>
+          </a:bodyPr>
+          <a:lstStyle/>
+          <a:p>
+            <a:pPr algn="l">
+              <a:spcAft>
+                <a:spcPts val="400"/>
+              </a:spcAft>
+              <a:defRPr sz="2000" b="1" lang="th-TH">
+                <a:solidFill>
+                  <a:srgbClr val="1D2A5D"/>
+                </a:solidFill>
+                <a:latin typeface="Tahoma"/>
+                <a:ea typeface="Tahoma"/>
+                <a:cs typeface="Tahoma"/>
+              </a:defRPr>
+            </a:pPr>
+            <a:r>
+              <a:rPr lang="th-TH">
+                <a:latin typeface="Tahoma"/>
+                <a:ea typeface="Tahoma"/>
+                <a:cs typeface="Tahoma"/>
+              </a:rPr>
+              <a:t>3  ตรวจและยืนยัน</a:t>
+            </a:r>
+          </a:p>
+        </p:txBody>
+      </p:sp>
+      <p:sp>
+        <p:nvSpPr>
+          <p:cNvPr id="32" name="Rounded Rectangle 31"/>
+          <p:cNvSpPr/>
+          <p:nvPr/>
+        </p:nvSpPr>
+        <p:spPr>
+          <a:xfrm>
+            <a:off x="8887968" y="2624328"/>
+            <a:ext cx="2267712" cy="347472"/>
+          </a:xfrm>
+          <a:prstGeom prst="roundRect">
+            <a:avLst/>
+          </a:prstGeom>
+          <a:solidFill>
+            <a:srgbClr val="C05C2B"/>
+          </a:solidFill>
+          <a:ln>
+            <a:noFill/>
+          </a:ln>
+        </p:spPr>
+        <p:style>
+          <a:lnRef idx="1">
+            <a:schemeClr val="accent1"/>
+          </a:lnRef>
+          <a:fillRef idx="3">
+            <a:schemeClr val="accent1"/>
+          </a:fillRef>
+          <a:effectRef idx="2">
+            <a:schemeClr val="accent1"/>
+          </a:effectRef>
+          <a:fontRef idx="minor">
+            <a:schemeClr val="lt1"/>
+          </a:fontRef>
+        </p:style>
+        <p:txBody>
+          <a:bodyPr rtlCol="0" anchor="ctr"/>
+          <a:lstStyle/>
+          <a:p>
+            <a:pPr algn="ctr"/>
+          </a:p>
+        </p:txBody>
+      </p:sp>
+      <p:sp>
+        <p:nvSpPr>
+          <p:cNvPr id="33" name="TextBox 32"/>
+          <p:cNvSpPr txBox="1"/>
+          <p:nvPr/>
+        </p:nvSpPr>
+        <p:spPr>
+          <a:xfrm>
+            <a:off x="8979408" y="2674620"/>
+            <a:ext cx="2084831" cy="246888"/>
+          </a:xfrm>
+          <a:prstGeom prst="rect">
+            <a:avLst/>
+          </a:prstGeom>
+          <a:noFill/>
+        </p:spPr>
+        <p:txBody>
+          <a:bodyPr wrap="square" lIns="18288" rIns="18288" tIns="0" bIns="0">
+            <a:spAutoFit/>
+          </a:bodyPr>
+          <a:lstStyle/>
+          <a:p>
+            <a:pPr algn="ctr">
+              <a:spcAft>
+                <a:spcPts val="400"/>
+              </a:spcAft>
+              <a:defRPr sz="1300" b="1" lang="th-TH">
+                <a:solidFill>
+                  <a:srgbClr val="FFFFFF"/>
+                </a:solidFill>
+                <a:latin typeface="Tahoma"/>
+                <a:ea typeface="Tahoma"/>
+                <a:cs typeface="Tahoma"/>
+              </a:defRPr>
+            </a:pPr>
+            <a:r>
+              <a:rPr lang="th-TH">
+                <a:latin typeface="Tahoma"/>
+                <a:ea typeface="Tahoma"/>
+                <a:cs typeface="Tahoma"/>
+              </a:rPr>
+              <a:t>รอตรวจรายการ</a:t>
+            </a:r>
+          </a:p>
+        </p:txBody>
+      </p:sp>
+      <p:sp>
+        <p:nvSpPr>
+          <p:cNvPr id="34" name="TextBox 33"/>
+          <p:cNvSpPr txBox="1"/>
+          <p:nvPr/>
+        </p:nvSpPr>
+        <p:spPr>
+          <a:xfrm>
+            <a:off x="8887968" y="3227832"/>
+            <a:ext cx="2240280" cy="1143000"/>
+          </a:xfrm>
+          <a:prstGeom prst="rect">
+            <a:avLst/>
+          </a:prstGeom>
+          <a:noFill/>
+        </p:spPr>
+        <p:txBody>
+          <a:bodyPr wrap="square" lIns="18288" rIns="18288" tIns="0" bIns="0">
+            <a:spAutoFit/>
+          </a:bodyPr>
+          <a:lstStyle/>
+          <a:p>
+            <a:pPr algn="l">
+              <a:spcAft>
+                <a:spcPts val="400"/>
+              </a:spcAft>
+              <a:defRPr sz="1800" b="0" lang="th-TH">
                 <a:solidFill>
                   <a:srgbClr val="1D2F3E"/>
                 </a:solidFill>
                 <a:latin typeface="Tahoma"/>
-              </a:defRPr>
-            </a:pPr>
-            <a:r>
-              <a:t>ฐานคิด: ต้นแบบ → LLM → IoT → pilot</a:t>
-            </a:r>
-          </a:p>
-        </p:txBody>
-      </p:sp>
-      <p:sp>
-        <p:nvSpPr>
-          <p:cNvPr id="18" name="TextBox 17"/>
-          <p:cNvSpPr txBox="1"/>
-          <p:nvPr/>
-        </p:nvSpPr>
-        <p:spPr>
-          <a:xfrm>
-            <a:off x="6858000" y="4251960"/>
-            <a:ext cx="4160520" cy="621792"/>
-          </a:xfrm>
-          <a:prstGeom prst="rect">
-            <a:avLst/>
-          </a:prstGeom>
-          <a:noFill/>
-        </p:spPr>
-        <p:txBody>
-          <a:bodyPr wrap="square" lIns="18288" rIns="18288" tIns="0" bIns="0">
-            <a:spAutoFit/>
-          </a:bodyPr>
-          <a:lstStyle/>
-          <a:p>
-            <a:pPr algn="l">
-              <a:spcAft>
-                <a:spcPts val="400"/>
-              </a:spcAft>
-              <a:defRPr sz="1600" b="1">
-                <a:solidFill>
-                  <a:srgbClr val="006289"/>
-                </a:solidFill>
-                <a:latin typeface="Tahoma"/>
-              </a:defRPr>
-            </a:pPr>
-            <a:r>
-              <a:t>ผลวันนี้: ภาพจริงและ YOLO/OCR บน PC</a:t>
-            </a:r>
-          </a:p>
-        </p:txBody>
-      </p:sp>
-      <p:sp>
-        <p:nvSpPr>
-          <p:cNvPr id="19" name="TextBox 18"/>
-          <p:cNvSpPr txBox="1"/>
-          <p:nvPr/>
-        </p:nvSpPr>
-        <p:spPr>
-          <a:xfrm>
-            <a:off x="768096" y="5632704"/>
-            <a:ext cx="10607040" cy="429768"/>
-          </a:xfrm>
-          <a:prstGeom prst="rect">
-            <a:avLst/>
-          </a:prstGeom>
-          <a:noFill/>
-        </p:spPr>
-        <p:txBody>
-          <a:bodyPr wrap="square" lIns="18288" rIns="18288" tIns="0" bIns="0">
-            <a:spAutoFit/>
-          </a:bodyPr>
-          <a:lstStyle/>
-          <a:p>
-            <a:pPr algn="l">
-              <a:spcAft>
-                <a:spcPts val="400"/>
-              </a:spcAft>
-              <a:defRPr sz="1900" b="1">
-                <a:solidFill>
-                  <a:srgbClr val="C05C2B"/>
-                </a:solidFill>
-                <a:latin typeface="Tahoma"/>
-              </a:defRPr>
-            </a:pPr>
-            <a:r>
-              <a:t>ผลจาก PC ยังไม่ใช่ผล NPU หรือผลครบทั้งระบบ</a:t>
+                <a:ea typeface="Tahoma"/>
+                <a:cs typeface="Tahoma"/>
+              </a:defRPr>
+            </a:pPr>
+            <a:r>
+              <a:rPr lang="th-TH">
+                <a:latin typeface="Tahoma"/>
+                <a:ea typeface="Tahoma"/>
+                <a:cs typeface="Tahoma"/>
+              </a:rPr>
+              <a:t>ผู้ใช้เทียบกับภาพ</a:t>
+            </a:r>
+          </a:p>
+          <a:p>
+            <a:pPr algn="l">
+              <a:spcAft>
+                <a:spcPts val="400"/>
+              </a:spcAft>
+              <a:defRPr sz="1800" b="0" lang="th-TH">
+                <a:solidFill>
+                  <a:srgbClr val="1D2F3E"/>
+                </a:solidFill>
+                <a:latin typeface="Tahoma"/>
+                <a:ea typeface="Tahoma"/>
+                <a:cs typeface="Tahoma"/>
+              </a:defRPr>
+            </a:pPr>
+            <a:r>
+              <a:rPr lang="th-TH">
+                <a:latin typeface="Tahoma"/>
+                <a:ea typeface="Tahoma"/>
+                <a:cs typeface="Tahoma"/>
+              </a:rPr>
+              <a:t>แก้รายการที่อ่านผิด</a:t>
+            </a:r>
+          </a:p>
+          <a:p>
+            <a:pPr algn="l">
+              <a:spcAft>
+                <a:spcPts val="400"/>
+              </a:spcAft>
+              <a:defRPr sz="1800" b="0" lang="th-TH">
+                <a:solidFill>
+                  <a:srgbClr val="1D2F3E"/>
+                </a:solidFill>
+                <a:latin typeface="Tahoma"/>
+                <a:ea typeface="Tahoma"/>
+                <a:cs typeface="Tahoma"/>
+              </a:defRPr>
+            </a:pPr>
+            <a:r>
+              <a:rPr lang="th-TH">
+                <a:latin typeface="Tahoma"/>
+                <a:ea typeface="Tahoma"/>
+                <a:cs typeface="Tahoma"/>
+              </a:rPr>
+              <a:t>แล้วยืนยันข้อมูล</a:t>
+            </a:r>
+          </a:p>
+        </p:txBody>
+      </p:sp>
+      <p:sp>
+        <p:nvSpPr>
+          <p:cNvPr id="35" name="TextBox 34"/>
+          <p:cNvSpPr txBox="1"/>
+          <p:nvPr/>
+        </p:nvSpPr>
+        <p:spPr>
+          <a:xfrm>
+            <a:off x="8887968" y="4517136"/>
+            <a:ext cx="2240280" cy="667512"/>
+          </a:xfrm>
+          <a:prstGeom prst="rect">
+            <a:avLst/>
+          </a:prstGeom>
+          <a:noFill/>
+        </p:spPr>
+        <p:txBody>
+          <a:bodyPr wrap="square" lIns="18288" rIns="18288" tIns="0" bIns="0">
+            <a:spAutoFit/>
+          </a:bodyPr>
+          <a:lstStyle/>
+          <a:p>
+            <a:pPr algn="l">
+              <a:spcAft>
+                <a:spcPts val="400"/>
+              </a:spcAft>
+              <a:defRPr sz="1800" b="1" lang="th-TH">
+                <a:solidFill>
+                  <a:srgbClr val="137E9A"/>
+                </a:solidFill>
+                <a:latin typeface="Tahoma"/>
+                <a:ea typeface="Tahoma"/>
+                <a:cs typeface="Tahoma"/>
+              </a:defRPr>
+            </a:pPr>
+            <a:r>
+              <a:rPr lang="th-TH">
+                <a:latin typeface="Tahoma"/>
+                <a:ea typeface="Tahoma"/>
+                <a:cs typeface="Tahoma"/>
+              </a:rPr>
+              <a:t>ส่งข้อมูลซื้อเข้า</a:t>
+            </a:r>
+          </a:p>
+          <a:p>
+            <a:pPr algn="l">
+              <a:spcAft>
+                <a:spcPts val="400"/>
+              </a:spcAft>
+              <a:defRPr sz="1800" b="1" lang="th-TH">
+                <a:solidFill>
+                  <a:srgbClr val="137E9A"/>
+                </a:solidFill>
+                <a:latin typeface="Tahoma"/>
+                <a:ea typeface="Tahoma"/>
+                <a:cs typeface="Tahoma"/>
+              </a:defRPr>
+            </a:pPr>
+            <a:r>
+              <a:rPr lang="th-TH">
+                <a:latin typeface="Tahoma"/>
+                <a:ea typeface="Tahoma"/>
+                <a:cs typeface="Tahoma"/>
+              </a:rPr>
+              <a:t>สู่ระบบบ้าน</a:t>
+            </a:r>
+          </a:p>
+        </p:txBody>
+      </p:sp>
+      <p:sp>
+        <p:nvSpPr>
+          <p:cNvPr id="36" name="TextBox 35"/>
+          <p:cNvSpPr txBox="1"/>
+          <p:nvPr/>
+        </p:nvSpPr>
+        <p:spPr>
+          <a:xfrm>
+            <a:off x="768096" y="5577840"/>
+            <a:ext cx="10607040" cy="384048"/>
+          </a:xfrm>
+          <a:prstGeom prst="rect">
+            <a:avLst/>
+          </a:prstGeom>
+          <a:noFill/>
+        </p:spPr>
+        <p:txBody>
+          <a:bodyPr wrap="square" lIns="18288" rIns="18288" tIns="0" bIns="0">
+            <a:spAutoFit/>
+          </a:bodyPr>
+          <a:lstStyle/>
+          <a:p>
+            <a:pPr algn="l">
+              <a:spcAft>
+                <a:spcPts val="400"/>
+              </a:spcAft>
+              <a:defRPr sz="1700" b="0" lang="th-TH">
+                <a:solidFill>
+                  <a:srgbClr val="1D2A5D"/>
+                </a:solidFill>
+                <a:latin typeface="Tahoma"/>
+                <a:ea typeface="Tahoma"/>
+                <a:cs typeface="Tahoma"/>
+              </a:defRPr>
+            </a:pPr>
+            <a:r>
+              <a:rPr lang="th-TH">
+                <a:latin typeface="Tahoma"/>
+                <a:ea typeface="Tahoma"/>
+                <a:cs typeface="Tahoma"/>
+              </a:rPr>
+              <a:t>ตารางนี้แสดงข้อมูลที่จะเก็บเป็น JSON และตรวจย้อนกลับถึงภาพต้นฉบับได้</a:t>
+            </a:r>
+          </a:p>
+        </p:txBody>
+      </p:sp>
+      <p:sp>
+        <p:nvSpPr>
+          <p:cNvPr id="37" name="TextBox 36"/>
+          <p:cNvSpPr txBox="1"/>
+          <p:nvPr/>
+        </p:nvSpPr>
+        <p:spPr>
+          <a:xfrm>
+            <a:off x="768096" y="6044184"/>
+            <a:ext cx="10607040" cy="274320"/>
+          </a:xfrm>
+          <a:prstGeom prst="rect">
+            <a:avLst/>
+          </a:prstGeom>
+          <a:noFill/>
+        </p:spPr>
+        <p:txBody>
+          <a:bodyPr wrap="square" lIns="18288" rIns="18288" tIns="0" bIns="0">
+            <a:spAutoFit/>
+          </a:bodyPr>
+          <a:lstStyle/>
+          <a:p>
+            <a:pPr algn="l">
+              <a:spcAft>
+                <a:spcPts val="400"/>
+              </a:spcAft>
+              <a:defRPr sz="1300" b="0" lang="th-TH">
+                <a:solidFill>
+                  <a:srgbClr val="576975"/>
+                </a:solidFill>
+                <a:latin typeface="Tahoma"/>
+                <a:ea typeface="Tahoma"/>
+                <a:cs typeface="Tahoma"/>
+              </a:defRPr>
+            </a:pPr>
+            <a:r>
+              <a:rPr lang="th-TH">
+                <a:latin typeface="Tahoma"/>
+                <a:ea typeface="Tahoma"/>
+                <a:cs typeface="Tahoma"/>
+              </a:rPr>
+              <a:t>สถานะยืนยันเป็นขั้นตอนเป้าหมาย; การวิเคราะห์อัตราการใช้ต้องมีข้อมูลคงเหลือเพิ่มเติม</a:t>
             </a:r>
           </a:p>
         </p:txBody>
@@ -4343,14 +5508,21 @@
               <a:spcAft>
                 <a:spcPts val="400"/>
               </a:spcAft>
-              <a:defRPr sz="2800" b="1">
+              <a:defRPr sz="2800" b="1" lang="th-TH">
                 <a:solidFill>
                   <a:srgbClr val="1D2A5D"/>
                 </a:solidFill>
                 <a:latin typeface="Tahoma"/>
-              </a:defRPr>
-            </a:pPr>
-            <a:r>
+                <a:ea typeface="Tahoma"/>
+                <a:cs typeface="Tahoma"/>
+              </a:defRPr>
+            </a:pPr>
+            <a:r>
+              <a:rPr lang="th-TH">
+                <a:latin typeface="Tahoma"/>
+                <a:ea typeface="Tahoma"/>
+                <a:cs typeface="Tahoma"/>
+              </a:rPr>
               <a:t>ภาพ 59 ใบถูกใช้ทำอะไรบ้าง?</a:t>
             </a:r>
           </a:p>
@@ -4382,14 +5554,21 @@
               <a:spcAft>
                 <a:spcPts val="400"/>
               </a:spcAft>
-              <a:defRPr sz="1500" b="0">
+              <a:defRPr sz="1500" b="0" lang="th-TH">
                 <a:solidFill>
                   <a:srgbClr val="576975"/>
                 </a:solidFill>
                 <a:latin typeface="Tahoma"/>
-              </a:defRPr>
-            </a:pPr>
-            <a:r>
+                <a:ea typeface="Tahoma"/>
+                <a:cs typeface="Tahoma"/>
+              </a:defRPr>
+            </a:pPr>
+            <a:r>
+              <a:rPr lang="th-TH">
+                <a:latin typeface="Tahoma"/>
+                <a:ea typeface="Tahoma"/>
+                <a:cs typeface="Tahoma"/>
+              </a:rPr>
               <a:t>ตรวจข้อมูลภาพครบชุด แล้วแยกภาพตามความเหมาะสมของการทดลอง YOLO</a:t>
             </a:r>
           </a:p>
@@ -4456,14 +5635,21 @@
               <a:spcAft>
                 <a:spcPts val="400"/>
               </a:spcAft>
-              <a:defRPr sz="900" b="0">
+              <a:defRPr sz="900" b="0" lang="th-TH">
                 <a:solidFill>
                   <a:srgbClr val="576975"/>
                 </a:solidFill>
                 <a:latin typeface="Tahoma"/>
-              </a:defRPr>
-            </a:pPr>
-            <a:r>
+                <a:ea typeface="Tahoma"/>
+                <a:cs typeface="Tahoma"/>
+              </a:defRPr>
+            </a:pPr>
+            <a:r>
+              <a:rPr lang="th-TH">
+                <a:latin typeface="Tahoma"/>
+                <a:ea typeface="Tahoma"/>
+                <a:cs typeface="Tahoma"/>
+              </a:rPr>
               <a:t>โครงงานคอมพิวเตอร์ | รายงานความก้าวหน้า | 18 ต.ค. 2569</a:t>
             </a:r>
           </a:p>
@@ -4495,14 +5681,21 @@
               <a:spcAft>
                 <a:spcPts val="400"/>
               </a:spcAft>
-              <a:defRPr sz="900" b="0">
+              <a:defRPr sz="900" b="0" lang="th-TH">
                 <a:solidFill>
                   <a:srgbClr val="576975"/>
                 </a:solidFill>
                 <a:latin typeface="Tahoma"/>
-              </a:defRPr>
-            </a:pPr>
-            <a:r>
+                <a:ea typeface="Tahoma"/>
+                <a:cs typeface="Tahoma"/>
+              </a:defRPr>
+            </a:pPr>
+            <a:r>
+              <a:rPr lang="th-TH">
+                <a:latin typeface="Tahoma"/>
+                <a:ea typeface="Tahoma"/>
+                <a:cs typeface="Tahoma"/>
+              </a:rPr>
               <a:t>11</a:t>
             </a:r>
           </a:p>
@@ -4534,14 +5727,21 @@
               <a:spcAft>
                 <a:spcPts val="400"/>
               </a:spcAft>
-              <a:defRPr sz="4800" b="1">
+              <a:defRPr sz="4800" b="1" lang="th-TH">
                 <a:solidFill>
                   <a:srgbClr val="006289"/>
                 </a:solidFill>
                 <a:latin typeface="Tahoma"/>
-              </a:defRPr>
-            </a:pPr>
-            <a:r>
+                <a:ea typeface="Tahoma"/>
+                <a:cs typeface="Tahoma"/>
+              </a:defRPr>
+            </a:pPr>
+            <a:r>
+              <a:rPr lang="th-TH">
+                <a:latin typeface="Tahoma"/>
+                <a:ea typeface="Tahoma"/>
+                <a:cs typeface="Tahoma"/>
+              </a:rPr>
               <a:t>124</a:t>
             </a:r>
           </a:p>
@@ -4573,14 +5773,21 @@
               <a:spcAft>
                 <a:spcPts val="400"/>
               </a:spcAft>
-              <a:defRPr sz="1800" b="1">
+              <a:defRPr sz="1800" b="1" lang="th-TH">
                 <a:solidFill>
                   <a:srgbClr val="1D2F3E"/>
                 </a:solidFill>
                 <a:latin typeface="Tahoma"/>
-              </a:defRPr>
-            </a:pPr>
-            <a:r>
+                <a:ea typeface="Tahoma"/>
+                <a:cs typeface="Tahoma"/>
+              </a:defRPr>
+            </a:pPr>
+            <a:r>
+              <a:rPr lang="th-TH">
+                <a:latin typeface="Tahoma"/>
+                <a:ea typeface="Tahoma"/>
+                <a:cs typeface="Tahoma"/>
+              </a:rPr>
               <a:t>ไฟล์ที่รับ</a:t>
             </a:r>
           </a:p>
@@ -4612,14 +5819,21 @@
               <a:spcAft>
                 <a:spcPts val="400"/>
               </a:spcAft>
-              <a:defRPr sz="4800" b="1">
+              <a:defRPr sz="4800" b="1" lang="th-TH">
                 <a:solidFill>
                   <a:srgbClr val="006289"/>
                 </a:solidFill>
                 <a:latin typeface="Tahoma"/>
-              </a:defRPr>
-            </a:pPr>
-            <a:r>
+                <a:ea typeface="Tahoma"/>
+                <a:cs typeface="Tahoma"/>
+              </a:defRPr>
+            </a:pPr>
+            <a:r>
+              <a:rPr lang="th-TH">
+                <a:latin typeface="Tahoma"/>
+                <a:ea typeface="Tahoma"/>
+                <a:cs typeface="Tahoma"/>
+              </a:rPr>
               <a:t>113</a:t>
             </a:r>
           </a:p>
@@ -4651,14 +5865,21 @@
               <a:spcAft>
                 <a:spcPts val="400"/>
               </a:spcAft>
-              <a:defRPr sz="1800" b="1">
+              <a:defRPr sz="1800" b="1" lang="th-TH">
                 <a:solidFill>
                   <a:srgbClr val="1D2F3E"/>
                 </a:solidFill>
                 <a:latin typeface="Tahoma"/>
-              </a:defRPr>
-            </a:pPr>
-            <a:r>
+                <a:ea typeface="Tahoma"/>
+                <a:cs typeface="Tahoma"/>
+              </a:defRPr>
+            </a:pPr>
+            <a:r>
+              <a:rPr lang="th-TH">
+                <a:latin typeface="Tahoma"/>
+                <a:ea typeface="Tahoma"/>
+                <a:cs typeface="Tahoma"/>
+              </a:rPr>
               <a:t>ภาพ SHA-256 ไม่ซ้ำ</a:t>
             </a:r>
           </a:p>
@@ -4690,14 +5911,21 @@
               <a:spcAft>
                 <a:spcPts val="400"/>
               </a:spcAft>
-              <a:defRPr sz="4800" b="1">
+              <a:defRPr sz="4800" b="1" lang="th-TH">
                 <a:solidFill>
                   <a:srgbClr val="137E9A"/>
                 </a:solidFill>
                 <a:latin typeface="Tahoma"/>
-              </a:defRPr>
-            </a:pPr>
-            <a:r>
+                <a:ea typeface="Tahoma"/>
+                <a:cs typeface="Tahoma"/>
+              </a:defRPr>
+            </a:pPr>
+            <a:r>
+              <a:rPr lang="th-TH">
+                <a:latin typeface="Tahoma"/>
+                <a:ea typeface="Tahoma"/>
+                <a:cs typeface="Tahoma"/>
+              </a:rPr>
               <a:t>59</a:t>
             </a:r>
           </a:p>
@@ -4729,14 +5957,21 @@
               <a:spcAft>
                 <a:spcPts val="400"/>
               </a:spcAft>
-              <a:defRPr sz="1800" b="1">
+              <a:defRPr sz="1800" b="1" lang="th-TH">
                 <a:solidFill>
                   <a:srgbClr val="1D2F3E"/>
                 </a:solidFill>
                 <a:latin typeface="Tahoma"/>
-              </a:defRPr>
-            </a:pPr>
-            <a:r>
+                <a:ea typeface="Tahoma"/>
+                <a:cs typeface="Tahoma"/>
+              </a:defRPr>
+            </a:pPr>
+            <a:r>
+              <a:rPr lang="th-TH">
+                <a:latin typeface="Tahoma"/>
+                <a:ea typeface="Tahoma"/>
+                <a:cs typeface="Tahoma"/>
+              </a:rPr>
               <a:t>ภาพผู้สมัครใบซื้อสินค้า</a:t>
             </a:r>
           </a:p>
@@ -4846,14 +6081,21 @@
               <a:spcAft>
                 <a:spcPts val="400"/>
               </a:spcAft>
-              <a:defRPr sz="3000" b="1">
+              <a:defRPr sz="3000" b="1" lang="th-TH">
                 <a:solidFill>
                   <a:srgbClr val="006289"/>
                 </a:solidFill>
                 <a:latin typeface="Tahoma"/>
-              </a:defRPr>
-            </a:pPr>
-            <a:r>
+                <a:ea typeface="Tahoma"/>
+                <a:cs typeface="Tahoma"/>
+              </a:defRPr>
+            </a:pPr>
+            <a:r>
+              <a:rPr lang="th-TH">
+                <a:latin typeface="Tahoma"/>
+                <a:ea typeface="Tahoma"/>
+                <a:cs typeface="Tahoma"/>
+              </a:rPr>
               <a:t>48</a:t>
             </a:r>
           </a:p>
@@ -4885,14 +6127,21 @@
               <a:spcAft>
                 <a:spcPts val="400"/>
               </a:spcAft>
-              <a:defRPr sz="1900" b="1">
+              <a:defRPr sz="1900" b="1" lang="th-TH">
                 <a:solidFill>
                   <a:srgbClr val="1D2A5D"/>
                 </a:solidFill>
                 <a:latin typeface="Tahoma"/>
-              </a:defRPr>
-            </a:pPr>
-            <a:r>
+                <a:ea typeface="Tahoma"/>
+                <a:cs typeface="Tahoma"/>
+              </a:defRPr>
+            </a:pPr>
+            <a:r>
+              <a:rPr lang="th-TH">
+                <a:latin typeface="Tahoma"/>
+                <a:ea typeface="Tahoma"/>
+                <a:cs typeface="Tahoma"/>
+              </a:rPr>
               <a:t>ภาพชุดแรก</a:t>
             </a:r>
           </a:p>
@@ -4924,14 +6173,21 @@
               <a:spcAft>
                 <a:spcPts val="400"/>
               </a:spcAft>
-              <a:defRPr sz="1500" b="0">
+              <a:defRPr sz="1500" b="0" lang="th-TH">
                 <a:solidFill>
                   <a:srgbClr val="1D2F3E"/>
                 </a:solidFill>
                 <a:latin typeface="Tahoma"/>
-              </a:defRPr>
-            </a:pPr>
-            <a:r>
+                <a:ea typeface="Tahoma"/>
+                <a:cs typeface="Tahoma"/>
+              </a:defRPr>
+            </a:pPr>
+            <a:r>
+              <a:rPr lang="th-TH">
+                <a:latin typeface="Tahoma"/>
+                <a:ea typeface="Tahoma"/>
+                <a:cs typeface="Tahoma"/>
+              </a:rPr>
               <a:t>38 ฝึก + 10 ตรวจ</a:t>
             </a:r>
           </a:p>
@@ -5006,14 +6262,21 @@
               <a:spcAft>
                 <a:spcPts val="400"/>
               </a:spcAft>
-              <a:defRPr sz="3000" b="1">
+              <a:defRPr sz="3000" b="1" lang="th-TH">
                 <a:solidFill>
                   <a:srgbClr val="006289"/>
                 </a:solidFill>
                 <a:latin typeface="Tahoma"/>
-              </a:defRPr>
-            </a:pPr>
-            <a:r>
+                <a:ea typeface="Tahoma"/>
+                <a:cs typeface="Tahoma"/>
+              </a:defRPr>
+            </a:pPr>
+            <a:r>
+              <a:rPr lang="th-TH">
+                <a:latin typeface="Tahoma"/>
+                <a:ea typeface="Tahoma"/>
+                <a:cs typeface="Tahoma"/>
+              </a:rPr>
               <a:t>6</a:t>
             </a:r>
           </a:p>
@@ -5045,14 +6308,21 @@
               <a:spcAft>
                 <a:spcPts val="400"/>
               </a:spcAft>
-              <a:defRPr sz="1900" b="1">
+              <a:defRPr sz="1900" b="1" lang="th-TH">
                 <a:solidFill>
                   <a:srgbClr val="1D2A5D"/>
                 </a:solidFill>
                 <a:latin typeface="Tahoma"/>
-              </a:defRPr>
-            </a:pPr>
-            <a:r>
+                <a:ea typeface="Tahoma"/>
+                <a:cs typeface="Tahoma"/>
+              </a:defRPr>
+            </a:pPr>
+            <a:r>
+              <a:rPr lang="th-TH">
+                <a:latin typeface="Tahoma"/>
+                <a:ea typeface="Tahoma"/>
+                <a:cs typeface="Tahoma"/>
+              </a:rPr>
               <a:t>ภาพฉากใหม่</a:t>
             </a:r>
           </a:p>
@@ -5084,14 +6354,21 @@
               <a:spcAft>
                 <a:spcPts val="400"/>
               </a:spcAft>
-              <a:defRPr sz="1500" b="0">
+              <a:defRPr sz="1500" b="0" lang="th-TH">
                 <a:solidFill>
                   <a:srgbClr val="1D2F3E"/>
                 </a:solidFill>
                 <a:latin typeface="Tahoma"/>
-              </a:defRPr>
-            </a:pPr>
-            <a:r>
+                <a:ea typeface="Tahoma"/>
+                <a:cs typeface="Tahoma"/>
+              </a:defRPr>
+            </a:pPr>
+            <a:r>
+              <a:rPr lang="th-TH">
+                <a:latin typeface="Tahoma"/>
+                <a:ea typeface="Tahoma"/>
+                <a:cs typeface="Tahoma"/>
+              </a:rPr>
               <a:t>ทดสอบโมเดลเดิม</a:t>
             </a:r>
           </a:p>
@@ -5166,14 +6443,21 @@
               <a:spcAft>
                 <a:spcPts val="400"/>
               </a:spcAft>
-              <a:defRPr sz="3000" b="1">
+              <a:defRPr sz="3000" b="1" lang="th-TH">
                 <a:solidFill>
                   <a:srgbClr val="C05C2B"/>
                 </a:solidFill>
                 <a:latin typeface="Tahoma"/>
-              </a:defRPr>
-            </a:pPr>
-            <a:r>
+                <a:ea typeface="Tahoma"/>
+                <a:cs typeface="Tahoma"/>
+              </a:defRPr>
+            </a:pPr>
+            <a:r>
+              <a:rPr lang="th-TH">
+                <a:latin typeface="Tahoma"/>
+                <a:ea typeface="Tahoma"/>
+                <a:cs typeface="Tahoma"/>
+              </a:rPr>
               <a:t>5</a:t>
             </a:r>
           </a:p>
@@ -5205,14 +6489,21 @@
               <a:spcAft>
                 <a:spcPts val="400"/>
               </a:spcAft>
-              <a:defRPr sz="1900" b="1">
+              <a:defRPr sz="1900" b="1" lang="th-TH">
                 <a:solidFill>
                   <a:srgbClr val="1D2A5D"/>
                 </a:solidFill>
                 <a:latin typeface="Tahoma"/>
-              </a:defRPr>
-            </a:pPr>
-            <a:r>
+                <a:ea typeface="Tahoma"/>
+                <a:cs typeface="Tahoma"/>
+              </a:defRPr>
+            </a:pPr>
+            <a:r>
+              <a:rPr lang="th-TH">
+                <a:latin typeface="Tahoma"/>
+                <a:ea typeface="Tahoma"/>
+                <a:cs typeface="Tahoma"/>
+              </a:rPr>
               <a:t>ภาพกันออก</a:t>
             </a:r>
           </a:p>
@@ -5244,14 +6535,21 @@
               <a:spcAft>
                 <a:spcPts val="400"/>
               </a:spcAft>
-              <a:defRPr sz="1500" b="0">
+              <a:defRPr sz="1500" b="0" lang="th-TH">
                 <a:solidFill>
                   <a:srgbClr val="1D2F3E"/>
                 </a:solidFill>
                 <a:latin typeface="Tahoma"/>
-              </a:defRPr>
-            </a:pPr>
-            <a:r>
+                <a:ea typeface="Tahoma"/>
+                <a:cs typeface="Tahoma"/>
+              </a:defRPr>
+            </a:pPr>
+            <a:r>
+              <a:rPr lang="th-TH">
+                <a:latin typeface="Tahoma"/>
+                <a:ea typeface="Tahoma"/>
+                <a:cs typeface="Tahoma"/>
+              </a:rPr>
               <a:t>หลายเอกสาร/เสี่ยงใกล้ซ้ำ</a:t>
             </a:r>
           </a:p>
@@ -5283,14 +6581,21 @@
               <a:spcAft>
                 <a:spcPts val="400"/>
               </a:spcAft>
-              <a:defRPr sz="1700" b="1">
+              <a:defRPr sz="1700" b="1" lang="th-TH">
                 <a:solidFill>
                   <a:srgbClr val="1D2A5D"/>
                 </a:solidFill>
                 <a:latin typeface="Tahoma"/>
-              </a:defRPr>
-            </a:pPr>
-            <a:r>
+                <a:ea typeface="Tahoma"/>
+                <a:cs typeface="Tahoma"/>
+              </a:defRPr>
+            </a:pPr>
+            <a:r>
+              <a:rPr lang="th-TH">
+                <a:latin typeface="Tahoma"/>
+                <a:ea typeface="Tahoma"/>
+                <a:cs typeface="Tahoma"/>
+              </a:rPr>
               <a:t>ตรวจข้อมูล/ทิศภาพครบ 59 ใบ; คะแนน YOLO หน้าถัดไปมาจากภาพตรวจ 10 + 6 ใบ ไม่ใช่คะแนนทั้ง 59 ใบ</a:t>
             </a:r>
           </a:p>
@@ -5322,14 +6627,21 @@
               <a:spcAft>
                 <a:spcPts val="400"/>
               </a:spcAft>
-              <a:defRPr sz="1400" b="0">
+              <a:defRPr sz="1400" b="0" lang="th-TH">
                 <a:solidFill>
                   <a:srgbClr val="576975"/>
                 </a:solidFill>
                 <a:latin typeface="Tahoma"/>
-              </a:defRPr>
-            </a:pPr>
-            <a:r>
+                <a:ea typeface="Tahoma"/>
+                <a:cs typeface="Tahoma"/>
+              </a:defRPr>
+            </a:pPr>
+            <a:r>
+              <a:rPr lang="th-TH">
+                <a:latin typeface="Tahoma"/>
+                <a:ea typeface="Tahoma"/>
+                <a:cs typeface="Tahoma"/>
+              </a:rPr>
               <a:t>59 ภาพยังไม่เท่ากับ 59 ธุรกรรมอิสระ</a:t>
             </a:r>
           </a:p>
@@ -5387,14 +6699,21 @@
               <a:spcAft>
                 <a:spcPts val="400"/>
               </a:spcAft>
-              <a:defRPr sz="2800" b="1">
+              <a:defRPr sz="2800" b="1" lang="th-TH">
                 <a:solidFill>
                   <a:srgbClr val="1D2A5D"/>
                 </a:solidFill>
                 <a:latin typeface="Tahoma"/>
-              </a:defRPr>
-            </a:pPr>
-            <a:r>
+                <a:ea typeface="Tahoma"/>
+                <a:cs typeface="Tahoma"/>
+              </a:defRPr>
+            </a:pPr>
+            <a:r>
+              <a:rPr lang="th-TH">
+                <a:latin typeface="Tahoma"/>
+                <a:ea typeface="Tahoma"/>
+                <a:cs typeface="Tahoma"/>
+              </a:rPr>
               <a:t>ตรวจภาพใบซื้อสินค้า 59 ภาพครบชุด</a:t>
             </a:r>
           </a:p>
@@ -5426,14 +6745,21 @@
               <a:spcAft>
                 <a:spcPts val="400"/>
               </a:spcAft>
-              <a:defRPr sz="1500" b="0">
+              <a:defRPr sz="1500" b="0" lang="th-TH">
                 <a:solidFill>
                   <a:srgbClr val="576975"/>
                 </a:solidFill>
                 <a:latin typeface="Tahoma"/>
-              </a:defRPr>
-            </a:pPr>
-            <a:r>
+                <a:ea typeface="Tahoma"/>
+                <a:cs typeface="Tahoma"/>
+              </a:defRPr>
+            </a:pPr>
+            <a:r>
+              <a:rPr lang="th-TH">
+                <a:latin typeface="Tahoma"/>
+                <a:ea typeface="Tahoma"/>
+                <a:cs typeface="Tahoma"/>
+              </a:rPr>
               <a:t>ข้อมูลภาพและทิศตัวหนังสือครบทุกภาพ; การถอดชื่อสินค้ายังมีข้อจำกัด</a:t>
             </a:r>
           </a:p>
@@ -5500,14 +6826,21 @@
               <a:spcAft>
                 <a:spcPts val="400"/>
               </a:spcAft>
-              <a:defRPr sz="900" b="0">
+              <a:defRPr sz="900" b="0" lang="th-TH">
                 <a:solidFill>
                   <a:srgbClr val="576975"/>
                 </a:solidFill>
                 <a:latin typeface="Tahoma"/>
-              </a:defRPr>
-            </a:pPr>
-            <a:r>
+                <a:ea typeface="Tahoma"/>
+                <a:cs typeface="Tahoma"/>
+              </a:defRPr>
+            </a:pPr>
+            <a:r>
+              <a:rPr lang="th-TH">
+                <a:latin typeface="Tahoma"/>
+                <a:ea typeface="Tahoma"/>
+                <a:cs typeface="Tahoma"/>
+              </a:rPr>
               <a:t>โครงงานคอมพิวเตอร์ | รายงานความก้าวหน้า | 18 ต.ค. 2569</a:t>
             </a:r>
           </a:p>
@@ -5539,14 +6872,21 @@
               <a:spcAft>
                 <a:spcPts val="400"/>
               </a:spcAft>
-              <a:defRPr sz="900" b="0">
+              <a:defRPr sz="900" b="0" lang="th-TH">
                 <a:solidFill>
                   <a:srgbClr val="576975"/>
                 </a:solidFill>
                 <a:latin typeface="Tahoma"/>
-              </a:defRPr>
-            </a:pPr>
-            <a:r>
+                <a:ea typeface="Tahoma"/>
+                <a:cs typeface="Tahoma"/>
+              </a:defRPr>
+            </a:pPr>
+            <a:r>
+              <a:rPr lang="th-TH">
+                <a:latin typeface="Tahoma"/>
+                <a:ea typeface="Tahoma"/>
+                <a:cs typeface="Tahoma"/>
+              </a:rPr>
               <a:t>12</a:t>
             </a:r>
           </a:p>
@@ -5602,14 +6942,21 @@
               <a:spcAft>
                 <a:spcPts val="400"/>
               </a:spcAft>
-              <a:defRPr sz="1800" b="1">
+              <a:defRPr sz="1800" b="1" lang="th-TH">
                 <a:solidFill>
                   <a:srgbClr val="1D2A5D"/>
                 </a:solidFill>
                 <a:latin typeface="Tahoma"/>
-              </a:defRPr>
-            </a:pPr>
-            <a:r>
+                <a:ea typeface="Tahoma"/>
+                <a:cs typeface="Tahoma"/>
+              </a:defRPr>
+            </a:pPr>
+            <a:r>
+              <a:rPr lang="th-TH">
+                <a:latin typeface="Tahoma"/>
+                <a:ea typeface="Tahoma"/>
+                <a:cs typeface="Tahoma"/>
+              </a:rPr>
               <a:t>พิมพ์ 41 / เขียนมือ 18  |  แนวตั้ง 38 / แนวนอน 21  |  ความสว่างมัธยฐานทั้งภาพ 173.9/255</a:t>
             </a:r>
           </a:p>
@@ -5641,14 +6988,21 @@
               <a:spcAft>
                 <a:spcPts val="400"/>
               </a:spcAft>
-              <a:defRPr sz="1600" b="1">
+              <a:defRPr sz="1600" b="1" lang="th-TH">
                 <a:solidFill>
                   <a:srgbClr val="1D2A5D"/>
                 </a:solidFill>
                 <a:latin typeface="Tahoma"/>
-              </a:defRPr>
-            </a:pPr>
-            <a:r>
+                <a:ea typeface="Tahoma"/>
+                <a:cs typeface="Tahoma"/>
+              </a:defRPr>
+            </a:pPr>
+            <a:r>
+              <a:rPr lang="th-TH">
+                <a:latin typeface="Tahoma"/>
+                <a:ea typeface="Tahoma"/>
+                <a:cs typeface="Tahoma"/>
+              </a:rPr>
               <a:t>ตรวจทั้ง 59 ภาพแล้ว: ชื่อสินค้าถอดครบ 12 | ถอดไม่ครบ 45 | ไม่มีบรรทัดชื่อ 2</a:t>
             </a:r>
           </a:p>
@@ -5706,14 +7060,21 @@
               <a:spcAft>
                 <a:spcPts val="400"/>
               </a:spcAft>
-              <a:defRPr sz="2800" b="1">
+              <a:defRPr sz="2800" b="1" lang="th-TH">
                 <a:solidFill>
                   <a:srgbClr val="1D2A5D"/>
                 </a:solidFill>
                 <a:latin typeface="Tahoma"/>
-              </a:defRPr>
-            </a:pPr>
-            <a:r>
+                <a:ea typeface="Tahoma"/>
+                <a:cs typeface="Tahoma"/>
+              </a:defRPr>
+            </a:pPr>
+            <a:r>
+              <a:rPr lang="th-TH">
+                <a:latin typeface="Tahoma"/>
+                <a:ea typeface="Tahoma"/>
+                <a:cs typeface="Tahoma"/>
+              </a:rPr>
               <a:t>ตรวจภาพทั้ง 59 ใบแล้ว ได้ข้อมูลชื่อสินค้าแค่ไหน?</a:t>
             </a:r>
           </a:p>
@@ -5745,14 +7106,21 @@
               <a:spcAft>
                 <a:spcPts val="400"/>
               </a:spcAft>
-              <a:defRPr sz="1500" b="0">
+              <a:defRPr sz="1500" b="0" lang="th-TH">
                 <a:solidFill>
                   <a:srgbClr val="576975"/>
                 </a:solidFill>
                 <a:latin typeface="Tahoma"/>
-              </a:defRPr>
-            </a:pPr>
-            <a:r>
+                <a:ea typeface="Tahoma"/>
+                <a:cs typeface="Tahoma"/>
+              </a:defRPr>
+            </a:pPr>
+            <a:r>
+              <a:rPr lang="th-TH">
+                <a:latin typeface="Tahoma"/>
+                <a:ea typeface="Tahoma"/>
+                <a:cs typeface="Tahoma"/>
+              </a:rPr>
               <a:t>นับเฉพาะชื่อสินค้าบนบรรทัดรายการ; ตรวจด้วยตาครั้งแรกทุกภาพ</a:t>
             </a:r>
           </a:p>
@@ -5819,14 +7187,21 @@
               <a:spcAft>
                 <a:spcPts val="400"/>
               </a:spcAft>
-              <a:defRPr sz="900" b="0">
+              <a:defRPr sz="900" b="0" lang="th-TH">
                 <a:solidFill>
                   <a:srgbClr val="576975"/>
                 </a:solidFill>
                 <a:latin typeface="Tahoma"/>
-              </a:defRPr>
-            </a:pPr>
-            <a:r>
+                <a:ea typeface="Tahoma"/>
+                <a:cs typeface="Tahoma"/>
+              </a:defRPr>
+            </a:pPr>
+            <a:r>
+              <a:rPr lang="th-TH">
+                <a:latin typeface="Tahoma"/>
+                <a:ea typeface="Tahoma"/>
+                <a:cs typeface="Tahoma"/>
+              </a:rPr>
               <a:t>โครงงานคอมพิวเตอร์ | รายงานความก้าวหน้า | 18 ต.ค. 2569</a:t>
             </a:r>
           </a:p>
@@ -5858,14 +7233,21 @@
               <a:spcAft>
                 <a:spcPts val="400"/>
               </a:spcAft>
-              <a:defRPr sz="900" b="0">
+              <a:defRPr sz="900" b="0" lang="th-TH">
                 <a:solidFill>
                   <a:srgbClr val="576975"/>
                 </a:solidFill>
                 <a:latin typeface="Tahoma"/>
-              </a:defRPr>
-            </a:pPr>
-            <a:r>
+                <a:ea typeface="Tahoma"/>
+                <a:cs typeface="Tahoma"/>
+              </a:defRPr>
+            </a:pPr>
+            <a:r>
+              <a:rPr lang="th-TH">
+                <a:latin typeface="Tahoma"/>
+                <a:ea typeface="Tahoma"/>
+                <a:cs typeface="Tahoma"/>
+              </a:rPr>
               <a:t>13</a:t>
             </a:r>
           </a:p>
@@ -5940,14 +7322,21 @@
               <a:spcAft>
                 <a:spcPts val="400"/>
               </a:spcAft>
-              <a:defRPr sz="4900" b="1">
+              <a:defRPr sz="4900" b="1" lang="th-TH">
                 <a:solidFill>
                   <a:srgbClr val="137E9A"/>
                 </a:solidFill>
                 <a:latin typeface="Tahoma"/>
-              </a:defRPr>
-            </a:pPr>
-            <a:r>
+                <a:ea typeface="Tahoma"/>
+                <a:cs typeface="Tahoma"/>
+              </a:defRPr>
+            </a:pPr>
+            <a:r>
+              <a:rPr lang="th-TH">
+                <a:latin typeface="Tahoma"/>
+                <a:ea typeface="Tahoma"/>
+                <a:cs typeface="Tahoma"/>
+              </a:rPr>
               <a:t>12</a:t>
             </a:r>
           </a:p>
@@ -5979,14 +7368,21 @@
               <a:spcAft>
                 <a:spcPts val="400"/>
               </a:spcAft>
-              <a:defRPr sz="2200" b="1">
+              <a:defRPr sz="2200" b="1" lang="th-TH">
                 <a:solidFill>
                   <a:srgbClr val="1D2A5D"/>
                 </a:solidFill>
                 <a:latin typeface="Tahoma"/>
-              </a:defRPr>
-            </a:pPr>
-            <a:r>
+                <a:ea typeface="Tahoma"/>
+                <a:cs typeface="Tahoma"/>
+              </a:defRPr>
+            </a:pPr>
+            <a:r>
+              <a:rPr lang="th-TH">
+                <a:latin typeface="Tahoma"/>
+                <a:ea typeface="Tahoma"/>
+                <a:cs typeface="Tahoma"/>
+              </a:rPr>
               <a:t>ถอดชื่อครบ</a:t>
             </a:r>
           </a:p>
@@ -6018,14 +7414,21 @@
               <a:spcAft>
                 <a:spcPts val="400"/>
               </a:spcAft>
-              <a:defRPr sz="1600" b="0">
+              <a:defRPr sz="1600" b="0" lang="th-TH">
                 <a:solidFill>
                   <a:srgbClr val="1D2F3E"/>
                 </a:solidFill>
                 <a:latin typeface="Tahoma"/>
-              </a:defRPr>
-            </a:pPr>
-            <a:r>
+                <a:ea typeface="Tahoma"/>
+                <a:cs typeface="Tahoma"/>
+              </a:defRPr>
+            </a:pPr>
+            <a:r>
+              <a:rPr lang="th-TH">
+                <a:latin typeface="Tahoma"/>
+                <a:ea typeface="Tahoma"/>
+                <a:cs typeface="Tahoma"/>
+              </a:rPr>
               <a:t>ชื่อทุกบรรทัดที่เห็นอ่านได้</a:t>
             </a:r>
           </a:p>
@@ -6100,14 +7503,21 @@
               <a:spcAft>
                 <a:spcPts val="400"/>
               </a:spcAft>
-              <a:defRPr sz="4900" b="1">
+              <a:defRPr sz="4900" b="1" lang="th-TH">
                 <a:solidFill>
                   <a:srgbClr val="C05C2B"/>
                 </a:solidFill>
                 <a:latin typeface="Tahoma"/>
-              </a:defRPr>
-            </a:pPr>
-            <a:r>
+                <a:ea typeface="Tahoma"/>
+                <a:cs typeface="Tahoma"/>
+              </a:defRPr>
+            </a:pPr>
+            <a:r>
+              <a:rPr lang="th-TH">
+                <a:latin typeface="Tahoma"/>
+                <a:ea typeface="Tahoma"/>
+                <a:cs typeface="Tahoma"/>
+              </a:rPr>
               <a:t>45</a:t>
             </a:r>
           </a:p>
@@ -6139,14 +7549,21 @@
               <a:spcAft>
                 <a:spcPts val="400"/>
               </a:spcAft>
-              <a:defRPr sz="2200" b="1">
+              <a:defRPr sz="2200" b="1" lang="th-TH">
                 <a:solidFill>
                   <a:srgbClr val="1D2A5D"/>
                 </a:solidFill>
                 <a:latin typeface="Tahoma"/>
-              </a:defRPr>
-            </a:pPr>
-            <a:r>
+                <a:ea typeface="Tahoma"/>
+                <a:cs typeface="Tahoma"/>
+              </a:defRPr>
+            </a:pPr>
+            <a:r>
+              <a:rPr lang="th-TH">
+                <a:latin typeface="Tahoma"/>
+                <a:ea typeface="Tahoma"/>
+                <a:cs typeface="Tahoma"/>
+              </a:rPr>
               <a:t>ถอดไม่ครบ</a:t>
             </a:r>
           </a:p>
@@ -6178,14 +7595,21 @@
               <a:spcAft>
                 <a:spcPts val="400"/>
               </a:spcAft>
-              <a:defRPr sz="1600" b="0">
+              <a:defRPr sz="1600" b="0" lang="th-TH">
                 <a:solidFill>
                   <a:srgbClr val="1D2F3E"/>
                 </a:solidFill>
                 <a:latin typeface="Tahoma"/>
-              </a:defRPr>
-            </a:pPr>
-            <a:r>
+                <a:ea typeface="Tahoma"/>
+                <a:cs typeface="Tahoma"/>
+              </a:defRPr>
+            </a:pPr>
+            <a:r>
+              <a:rPr lang="th-TH">
+                <a:latin typeface="Tahoma"/>
+                <a:ea typeface="Tahoma"/>
+                <a:cs typeface="Tahoma"/>
+              </a:rPr>
               <a:t>28 ภาพอ่านได้บางช่วง; 17 ยังยืนยันไม่ได้</a:t>
             </a:r>
           </a:p>
@@ -6260,14 +7684,21 @@
               <a:spcAft>
                 <a:spcPts val="400"/>
               </a:spcAft>
-              <a:defRPr sz="4900" b="1">
+              <a:defRPr sz="4900" b="1" lang="th-TH">
                 <a:solidFill>
                   <a:srgbClr val="006289"/>
                 </a:solidFill>
                 <a:latin typeface="Tahoma"/>
-              </a:defRPr>
-            </a:pPr>
-            <a:r>
+                <a:ea typeface="Tahoma"/>
+                <a:cs typeface="Tahoma"/>
+              </a:defRPr>
+            </a:pPr>
+            <a:r>
+              <a:rPr lang="th-TH">
+                <a:latin typeface="Tahoma"/>
+                <a:ea typeface="Tahoma"/>
+                <a:cs typeface="Tahoma"/>
+              </a:rPr>
               <a:t>2</a:t>
             </a:r>
           </a:p>
@@ -6299,14 +7730,21 @@
               <a:spcAft>
                 <a:spcPts val="400"/>
               </a:spcAft>
-              <a:defRPr sz="2200" b="1">
+              <a:defRPr sz="2200" b="1" lang="th-TH">
                 <a:solidFill>
                   <a:srgbClr val="1D2A5D"/>
                 </a:solidFill>
                 <a:latin typeface="Tahoma"/>
-              </a:defRPr>
-            </a:pPr>
-            <a:r>
+                <a:ea typeface="Tahoma"/>
+                <a:cs typeface="Tahoma"/>
+              </a:defRPr>
+            </a:pPr>
+            <a:r>
+              <a:rPr lang="th-TH">
+                <a:latin typeface="Tahoma"/>
+                <a:ea typeface="Tahoma"/>
+                <a:cs typeface="Tahoma"/>
+              </a:rPr>
               <a:t>ไม่มีบรรทัดชื่อ</a:t>
             </a:r>
           </a:p>
@@ -6338,14 +7776,21 @@
               <a:spcAft>
                 <a:spcPts val="400"/>
               </a:spcAft>
-              <a:defRPr sz="1600" b="0">
+              <a:defRPr sz="1600" b="0" lang="th-TH">
                 <a:solidFill>
                   <a:srgbClr val="1D2F3E"/>
                 </a:solidFill>
                 <a:latin typeface="Tahoma"/>
-              </a:defRPr>
-            </a:pPr>
-            <a:r>
+                <a:ea typeface="Tahoma"/>
+                <a:cs typeface="Tahoma"/>
+              </a:defRPr>
+            </a:pPr>
+            <a:r>
+              <a:rPr lang="th-TH">
+                <a:latin typeface="Tahoma"/>
+                <a:ea typeface="Tahoma"/>
+                <a:cs typeface="Tahoma"/>
+              </a:rPr>
               <a:t>ไม่มีข้อความชื่อสินค้าให้ถอด</a:t>
             </a:r>
           </a:p>
@@ -6377,14 +7822,21 @@
               <a:spcAft>
                 <a:spcPts val="400"/>
               </a:spcAft>
-              <a:defRPr sz="1700" b="1">
+              <a:defRPr sz="1700" b="1" lang="th-TH">
                 <a:solidFill>
                   <a:srgbClr val="1D2A5D"/>
                 </a:solidFill>
                 <a:latin typeface="Tahoma"/>
-              </a:defRPr>
-            </a:pPr>
-            <a:r>
+                <a:ea typeface="Tahoma"/>
+                <a:cs typeface="Tahoma"/>
+              </a:defRPr>
+            </a:pPr>
+            <a:r>
+              <a:rPr lang="th-TH">
+                <a:latin typeface="Tahoma"/>
+                <a:ea typeface="Tahoma"/>
+                <a:cs typeface="Tahoma"/>
+              </a:rPr>
               <a:t>ใน 45 ภาพที่อ่านไม่ครบ มี 28 ภาพที่เก็บช่วงชื่อที่อ่านได้แน่ชัด และ 17 ภาพยังไม่มีช่วงชื่อที่ยืนยันได้</a:t>
             </a:r>
           </a:p>
@@ -6416,14 +7868,21 @@
               <a:spcAft>
                 <a:spcPts val="400"/>
               </a:spcAft>
-              <a:defRPr sz="1500" b="0">
+              <a:defRPr sz="1500" b="0" lang="th-TH">
                 <a:solidFill>
                   <a:srgbClr val="576975"/>
                 </a:solidFill>
                 <a:latin typeface="Tahoma"/>
-              </a:defRPr>
-            </a:pPr>
-            <a:r>
+                <a:ea typeface="Tahoma"/>
+                <a:cs typeface="Tahoma"/>
+              </a:defRPr>
+            </a:pPr>
+            <a:r>
+              <a:rPr lang="th-TH">
+                <a:latin typeface="Tahoma"/>
+                <a:ea typeface="Tahoma"/>
+                <a:cs typeface="Tahoma"/>
+              </a:rPr>
               <a:t>จึงยังไม่มีสัดส่วนภาษาไทย/อังกฤษที่แทนชื่อสินค้าในทั้ง 59 ภาพ; ยังไม่มีผู้ตรวจคนที่สอง</a:t>
             </a:r>
           </a:p>
@@ -6481,14 +7940,21 @@
               <a:spcAft>
                 <a:spcPts val="400"/>
               </a:spcAft>
-              <a:defRPr sz="2800" b="1">
+              <a:defRPr sz="2800" b="1" lang="th-TH">
                 <a:solidFill>
                   <a:srgbClr val="1D2A5D"/>
                 </a:solidFill>
                 <a:latin typeface="Tahoma"/>
-              </a:defRPr>
-            </a:pPr>
-            <a:r>
+                <a:ea typeface="Tahoma"/>
+                <a:cs typeface="Tahoma"/>
+              </a:defRPr>
+            </a:pPr>
+            <a:r>
+              <a:rPr lang="th-TH">
+                <a:latin typeface="Tahoma"/>
+                <a:ea typeface="Tahoma"/>
+                <a:cs typeface="Tahoma"/>
+              </a:rPr>
               <a:t>ผล YOLO: คะแนนนี้มาจากภาพตรวจ 16 ใบ</a:t>
             </a:r>
           </a:p>
@@ -6520,14 +7986,21 @@
               <a:spcAft>
                 <a:spcPts val="400"/>
               </a:spcAft>
-              <a:defRPr sz="1500" b="0">
+              <a:defRPr sz="1500" b="0" lang="th-TH">
                 <a:solidFill>
                   <a:srgbClr val="576975"/>
                 </a:solidFill>
                 <a:latin typeface="Tahoma"/>
-              </a:defRPr>
-            </a:pPr>
-            <a:r>
+                <a:ea typeface="Tahoma"/>
+                <a:cs typeface="Tahoma"/>
+              </a:defRPr>
+            </a:pPr>
+            <a:r>
+              <a:rPr lang="th-TH">
+                <a:latin typeface="Tahoma"/>
+                <a:ea typeface="Tahoma"/>
+                <a:cs typeface="Tahoma"/>
+              </a:rPr>
               <a:t>ใน 59 ภาพ ใช้ 38 ฝึกโมเดล / 10 ตรวจฉากเดิม / 6 ตรวจฉากใหม่ / กันออก 5</a:t>
             </a:r>
           </a:p>
@@ -6594,14 +8067,21 @@
               <a:spcAft>
                 <a:spcPts val="400"/>
               </a:spcAft>
-              <a:defRPr sz="900" b="0">
+              <a:defRPr sz="900" b="0" lang="th-TH">
                 <a:solidFill>
                   <a:srgbClr val="576975"/>
                 </a:solidFill>
                 <a:latin typeface="Tahoma"/>
-              </a:defRPr>
-            </a:pPr>
-            <a:r>
+                <a:ea typeface="Tahoma"/>
+                <a:cs typeface="Tahoma"/>
+              </a:defRPr>
+            </a:pPr>
+            <a:r>
+              <a:rPr lang="th-TH">
+                <a:latin typeface="Tahoma"/>
+                <a:ea typeface="Tahoma"/>
+                <a:cs typeface="Tahoma"/>
+              </a:rPr>
               <a:t>โครงงานคอมพิวเตอร์ | รายงานความก้าวหน้า | 18 ต.ค. 2569</a:t>
             </a:r>
           </a:p>
@@ -6633,14 +8113,21 @@
               <a:spcAft>
                 <a:spcPts val="400"/>
               </a:spcAft>
-              <a:defRPr sz="900" b="0">
+              <a:defRPr sz="900" b="0" lang="th-TH">
                 <a:solidFill>
                   <a:srgbClr val="576975"/>
                 </a:solidFill>
                 <a:latin typeface="Tahoma"/>
-              </a:defRPr>
-            </a:pPr>
-            <a:r>
+                <a:ea typeface="Tahoma"/>
+                <a:cs typeface="Tahoma"/>
+              </a:defRPr>
+            </a:pPr>
+            <a:r>
+              <a:rPr lang="th-TH">
+                <a:latin typeface="Tahoma"/>
+                <a:ea typeface="Tahoma"/>
+                <a:cs typeface="Tahoma"/>
+              </a:rPr>
               <a:t>14</a:t>
             </a:r>
           </a:p>
@@ -6758,14 +8245,21 @@
               <a:spcAft>
                 <a:spcPts val="400"/>
               </a:spcAft>
-              <a:defRPr sz="4400" b="1">
+              <a:defRPr sz="4400" b="1" lang="th-TH">
                 <a:solidFill>
                   <a:srgbClr val="137E9A"/>
                 </a:solidFill>
                 <a:latin typeface="Tahoma"/>
-              </a:defRPr>
-            </a:pPr>
-            <a:r>
+                <a:ea typeface="Tahoma"/>
+                <a:cs typeface="Tahoma"/>
+              </a:defRPr>
+            </a:pPr>
+            <a:r>
+              <a:rPr lang="th-TH">
+                <a:latin typeface="Tahoma"/>
+                <a:ea typeface="Tahoma"/>
+                <a:cs typeface="Tahoma"/>
+              </a:rPr>
               <a:t>0.928</a:t>
             </a:r>
           </a:p>
@@ -6797,14 +8291,21 @@
               <a:spcAft>
                 <a:spcPts val="400"/>
               </a:spcAft>
-              <a:defRPr sz="2100" b="1">
+              <a:defRPr sz="2100" b="1" lang="th-TH">
                 <a:solidFill>
                   <a:srgbClr val="1D2A5D"/>
                 </a:solidFill>
                 <a:latin typeface="Tahoma"/>
-              </a:defRPr>
-            </a:pPr>
-            <a:r>
+                <a:ea typeface="Tahoma"/>
+                <a:cs typeface="Tahoma"/>
+              </a:defRPr>
+            </a:pPr>
+            <a:r>
+              <a:rPr lang="th-TH">
+                <a:latin typeface="Tahoma"/>
+                <a:ea typeface="Tahoma"/>
+                <a:cs typeface="Tahoma"/>
+              </a:rPr>
               <a:t>10 ภาพฉากเดิม</a:t>
             </a:r>
           </a:p>
@@ -6836,14 +8337,21 @@
               <a:spcAft>
                 <a:spcPts val="400"/>
               </a:spcAft>
-              <a:defRPr sz="4400" b="1">
+              <a:defRPr sz="4400" b="1" lang="th-TH">
                 <a:solidFill>
                   <a:srgbClr val="C05C2B"/>
                 </a:solidFill>
                 <a:latin typeface="Tahoma"/>
-              </a:defRPr>
-            </a:pPr>
-            <a:r>
+                <a:ea typeface="Tahoma"/>
+                <a:cs typeface="Tahoma"/>
+              </a:defRPr>
+            </a:pPr>
+            <a:r>
+              <a:rPr lang="th-TH">
+                <a:latin typeface="Tahoma"/>
+                <a:ea typeface="Tahoma"/>
+                <a:cs typeface="Tahoma"/>
+              </a:rPr>
               <a:t>0.237</a:t>
             </a:r>
           </a:p>
@@ -6875,14 +8383,21 @@
               <a:spcAft>
                 <a:spcPts val="400"/>
               </a:spcAft>
-              <a:defRPr sz="2100" b="1">
+              <a:defRPr sz="2100" b="1" lang="th-TH">
                 <a:solidFill>
                   <a:srgbClr val="1D2A5D"/>
                 </a:solidFill>
                 <a:latin typeface="Tahoma"/>
-              </a:defRPr>
-            </a:pPr>
-            <a:r>
+                <a:ea typeface="Tahoma"/>
+                <a:cs typeface="Tahoma"/>
+              </a:defRPr>
+            </a:pPr>
+            <a:r>
+              <a:rPr lang="th-TH">
+                <a:latin typeface="Tahoma"/>
+                <a:ea typeface="Tahoma"/>
+                <a:cs typeface="Tahoma"/>
+              </a:rPr>
               <a:t>6 ภาพฉากใหม่</a:t>
             </a:r>
           </a:p>
@@ -6914,14 +8429,21 @@
               <a:spcAft>
                 <a:spcPts val="400"/>
               </a:spcAft>
-              <a:defRPr sz="2000" b="1">
+              <a:defRPr sz="2000" b="1" lang="th-TH">
                 <a:solidFill>
                   <a:srgbClr val="1D2A5D"/>
                 </a:solidFill>
                 <a:latin typeface="Tahoma"/>
-              </a:defRPr>
-            </a:pPr>
-            <a:r>
+                <a:ea typeface="Tahoma"/>
+                <a:cs typeface="Tahoma"/>
+              </a:defRPr>
+            </a:pPr>
+            <a:r>
+              <a:rPr lang="th-TH">
+                <a:latin typeface="Tahoma"/>
+                <a:ea typeface="Tahoma"/>
+                <a:cs typeface="Tahoma"/>
+              </a:rPr>
               <a:t>mAP@0.5: คะแนนเฉลี่ยการหากรอบ 0–1; สูงดีกว่า</a:t>
             </a:r>
           </a:p>
@@ -6996,14 +8518,21 @@
               <a:spcAft>
                 <a:spcPts val="400"/>
               </a:spcAft>
-              <a:defRPr sz="1800" b="1">
+              <a:defRPr sz="1800" b="1" lang="th-TH">
                 <a:solidFill>
                   <a:srgbClr val="006289"/>
                 </a:solidFill>
                 <a:latin typeface="Tahoma"/>
-              </a:defRPr>
-            </a:pPr>
-            <a:r>
+                <a:ea typeface="Tahoma"/>
+                <a:cs typeface="Tahoma"/>
+              </a:defRPr>
+            </a:pPr>
+            <a:r>
+              <a:rPr lang="th-TH">
+                <a:latin typeface="Tahoma"/>
+                <a:ea typeface="Tahoma"/>
+                <a:cs typeface="Tahoma"/>
+              </a:rPr>
               <a:t>ลองหมุน 6 ภาพฉากใหม่ให้อ่านตรงด้วยโมเดลเดิม: 0.237 → 0.714</a:t>
             </a:r>
           </a:p>
@@ -7035,14 +8564,21 @@
               <a:spcAft>
                 <a:spcPts val="400"/>
               </a:spcAft>
-              <a:defRPr sz="1400" b="0">
+              <a:defRPr sz="1400" b="0" lang="th-TH">
                 <a:solidFill>
                   <a:srgbClr val="576975"/>
                 </a:solidFill>
                 <a:latin typeface="Tahoma"/>
-              </a:defRPr>
-            </a:pPr>
-            <a:r>
+                <a:ea typeface="Tahoma"/>
+                <a:cs typeface="Tahoma"/>
+              </a:defRPr>
+            </a:pPr>
+            <a:r>
+              <a:rPr lang="th-TH">
+                <a:latin typeface="Tahoma"/>
+                <a:ea typeface="Tahoma"/>
+                <a:cs typeface="Tahoma"/>
+              </a:rPr>
               <a:t>ผลต่างเกี่ยวกับทิศภาพ แต่ฉากและแสงก็ต่างกัน; ยังสรุปความแม่นยำของทั้ง 59 ภาพไม่ได้</a:t>
             </a:r>
           </a:p>
@@ -7100,14 +8636,21 @@
               <a:spcAft>
                 <a:spcPts val="400"/>
               </a:spcAft>
-              <a:defRPr sz="2800" b="1">
+              <a:defRPr sz="2800" b="1" lang="th-TH">
                 <a:solidFill>
                   <a:srgbClr val="1D2A5D"/>
                 </a:solidFill>
                 <a:latin typeface="Tahoma"/>
-              </a:defRPr>
-            </a:pPr>
-            <a:r>
+                <a:ea typeface="Tahoma"/>
+                <a:cs typeface="Tahoma"/>
+              </a:defRPr>
+            </a:pPr>
+            <a:r>
+              <a:rPr lang="th-TH">
+                <a:latin typeface="Tahoma"/>
+                <a:ea typeface="Tahoma"/>
+                <a:cs typeface="Tahoma"/>
+              </a:rPr>
               <a:t>การทดลองบน PC ก่อนมีบอร์ด</a:t>
             </a:r>
           </a:p>
@@ -7139,14 +8682,21 @@
               <a:spcAft>
                 <a:spcPts val="400"/>
               </a:spcAft>
-              <a:defRPr sz="1500" b="0">
+              <a:defRPr sz="1500" b="0" lang="th-TH">
                 <a:solidFill>
                   <a:srgbClr val="576975"/>
                 </a:solidFill>
                 <a:latin typeface="Tahoma"/>
-              </a:defRPr>
-            </a:pPr>
-            <a:r>
+                <a:ea typeface="Tahoma"/>
+                <a:cs typeface="Tahoma"/>
+              </a:defRPr>
+            </a:pPr>
+            <a:r>
+              <a:rPr lang="th-TH">
+                <a:latin typeface="Tahoma"/>
+                <a:ea typeface="Tahoma"/>
+                <a:cs typeface="Tahoma"/>
+              </a:rPr>
               <a:t>แยกผลที่วัดจริงออกจากความสามารถที่จะตรวจในระยะถัดไป</a:t>
             </a:r>
           </a:p>
@@ -7213,14 +8763,21 @@
               <a:spcAft>
                 <a:spcPts val="400"/>
               </a:spcAft>
-              <a:defRPr sz="900" b="0">
+              <a:defRPr sz="900" b="0" lang="th-TH">
                 <a:solidFill>
                   <a:srgbClr val="576975"/>
                 </a:solidFill>
                 <a:latin typeface="Tahoma"/>
-              </a:defRPr>
-            </a:pPr>
-            <a:r>
+                <a:ea typeface="Tahoma"/>
+                <a:cs typeface="Tahoma"/>
+              </a:defRPr>
+            </a:pPr>
+            <a:r>
+              <a:rPr lang="th-TH">
+                <a:latin typeface="Tahoma"/>
+                <a:ea typeface="Tahoma"/>
+                <a:cs typeface="Tahoma"/>
+              </a:rPr>
               <a:t>โครงงานคอมพิวเตอร์ | รายงานความก้าวหน้า | 18 ต.ค. 2569</a:t>
             </a:r>
           </a:p>
@@ -7252,14 +8809,21 @@
               <a:spcAft>
                 <a:spcPts val="400"/>
               </a:spcAft>
-              <a:defRPr sz="900" b="0">
+              <a:defRPr sz="900" b="0" lang="th-TH">
                 <a:solidFill>
                   <a:srgbClr val="576975"/>
                 </a:solidFill>
                 <a:latin typeface="Tahoma"/>
-              </a:defRPr>
-            </a:pPr>
-            <a:r>
+                <a:ea typeface="Tahoma"/>
+                <a:cs typeface="Tahoma"/>
+              </a:defRPr>
+            </a:pPr>
+            <a:r>
+              <a:rPr lang="th-TH">
+                <a:latin typeface="Tahoma"/>
+                <a:ea typeface="Tahoma"/>
+                <a:cs typeface="Tahoma"/>
+              </a:rPr>
               <a:t>15</a:t>
             </a:r>
           </a:p>
@@ -7377,14 +8941,21 @@
               <a:spcAft>
                 <a:spcPts val="400"/>
               </a:spcAft>
-              <a:defRPr sz="2200" b="1">
+              <a:defRPr sz="2200" b="1" lang="th-TH">
                 <a:solidFill>
                   <a:srgbClr val="1D2A5D"/>
                 </a:solidFill>
                 <a:latin typeface="Tahoma"/>
-              </a:defRPr>
-            </a:pPr>
-            <a:r>
+                <a:ea typeface="Tahoma"/>
+                <a:cs typeface="Tahoma"/>
+              </a:defRPr>
+            </a:pPr>
+            <a:r>
+              <a:rPr lang="th-TH">
+                <a:latin typeface="Tahoma"/>
+                <a:ea typeface="Tahoma"/>
+                <a:cs typeface="Tahoma"/>
+              </a:rPr>
               <a:t>EasyOCR ไทย / อังกฤษ</a:t>
             </a:r>
           </a:p>
@@ -7416,14 +8987,21 @@
               <a:spcAft>
                 <a:spcPts val="400"/>
               </a:spcAft>
-              <a:defRPr sz="1900" b="0">
+              <a:defRPr sz="1900" b="0" lang="th-TH">
                 <a:solidFill>
                   <a:srgbClr val="1D2F3E"/>
                 </a:solidFill>
                 <a:latin typeface="Tahoma"/>
-              </a:defRPr>
-            </a:pPr>
-            <a:r>
+                <a:ea typeface="Tahoma"/>
+                <a:cs typeface="Tahoma"/>
+              </a:defRPr>
+            </a:pPr>
+            <a:r>
+              <a:rPr lang="th-TH">
+                <a:latin typeface="Tahoma"/>
+                <a:ea typeface="Tahoma"/>
+                <a:cs typeface="Tahoma"/>
+              </a:rPr>
               <a:t>ตรวจภาพพิมพ์ 3 ภาพ</a:t>
             </a:r>
           </a:p>
@@ -7432,14 +9010,21 @@
               <a:spcAft>
                 <a:spcPts val="400"/>
               </a:spcAft>
-              <a:defRPr sz="1900" b="0">
+              <a:defRPr sz="1900" b="0" lang="th-TH">
                 <a:solidFill>
                   <a:srgbClr val="1D2F3E"/>
                 </a:solidFill>
                 <a:latin typeface="Tahoma"/>
-              </a:defRPr>
-            </a:pPr>
-            <a:r>
+                <a:ea typeface="Tahoma"/>
+                <a:cs typeface="Tahoma"/>
+              </a:defRPr>
+            </a:pPr>
+            <a:r>
+              <a:rPr lang="th-TH">
+                <a:latin typeface="Tahoma"/>
+                <a:ea typeface="Tahoma"/>
+                <a:cs typeface="Tahoma"/>
+              </a:rPr>
               <a:t>วันที่และยอดตรง 4 จาก 6 ช่อง</a:t>
             </a:r>
           </a:p>
@@ -7448,14 +9033,21 @@
               <a:spcAft>
                 <a:spcPts val="400"/>
               </a:spcAft>
-              <a:defRPr sz="1900" b="0">
+              <a:defRPr sz="1900" b="0" lang="th-TH">
                 <a:solidFill>
                   <a:srgbClr val="1D2F3E"/>
                 </a:solidFill>
                 <a:latin typeface="Tahoma"/>
-              </a:defRPr>
-            </a:pPr>
-            <a:r>
+                <a:ea typeface="Tahoma"/>
+                <a:cs typeface="Tahoma"/>
+              </a:defRPr>
+            </a:pPr>
+            <a:r>
+              <a:rPr lang="th-TH">
+                <a:latin typeface="Tahoma"/>
+                <a:ea typeface="Tahoma"/>
+                <a:cs typeface="Tahoma"/>
+              </a:rPr>
               <a:t>เป็น spot-check โดยคนหนึ่งรอบ</a:t>
             </a:r>
           </a:p>
@@ -7464,14 +9056,21 @@
               <a:spcAft>
                 <a:spcPts val="400"/>
               </a:spcAft>
-              <a:defRPr sz="1900" b="0">
+              <a:defRPr sz="1900" b="0" lang="th-TH">
                 <a:solidFill>
                   <a:srgbClr val="1D2F3E"/>
                 </a:solidFill>
                 <a:latin typeface="Tahoma"/>
-              </a:defRPr>
-            </a:pPr>
-            <a:r>
+                <a:ea typeface="Tahoma"/>
+                <a:cs typeface="Tahoma"/>
+              </a:defRPr>
+            </a:pPr>
+            <a:r>
+              <a:rPr lang="th-TH">
+                <a:latin typeface="Tahoma"/>
+                <a:ea typeface="Tahoma"/>
+                <a:cs typeface="Tahoma"/>
+              </a:rPr>
               <a:t>ยังไม่ใช่ CER หรือผล JSON</a:t>
             </a:r>
           </a:p>
@@ -7503,14 +9102,21 @@
               <a:spcAft>
                 <a:spcPts val="400"/>
               </a:spcAft>
-              <a:defRPr sz="2200" b="1">
+              <a:defRPr sz="2200" b="1" lang="th-TH">
                 <a:solidFill>
                   <a:srgbClr val="1D2A5D"/>
                 </a:solidFill>
                 <a:latin typeface="Tahoma"/>
-              </a:defRPr>
-            </a:pPr>
-            <a:r>
+                <a:ea typeface="Tahoma"/>
+                <a:cs typeface="Tahoma"/>
+              </a:defRPr>
+            </a:pPr>
+            <a:r>
+              <a:rPr lang="th-TH">
+                <a:latin typeface="Tahoma"/>
+                <a:ea typeface="Tahoma"/>
+                <a:cs typeface="Tahoma"/>
+              </a:rPr>
               <a:t>RKNN Toolkit2 บน PC</a:t>
             </a:r>
           </a:p>
@@ -7542,14 +9148,21 @@
               <a:spcAft>
                 <a:spcPts val="400"/>
               </a:spcAft>
-              <a:defRPr sz="1800" b="0">
+              <a:defRPr sz="1800" b="0" lang="th-TH">
                 <a:solidFill>
                   <a:srgbClr val="1D2F3E"/>
                 </a:solidFill>
                 <a:latin typeface="Tahoma"/>
-              </a:defRPr>
-            </a:pPr>
-            <a:r>
+                <a:ea typeface="Tahoma"/>
+                <a:cs typeface="Tahoma"/>
+              </a:defRPr>
+            </a:pPr>
+            <a:r>
+              <a:rPr lang="th-TH">
+                <a:latin typeface="Tahoma"/>
+                <a:ea typeface="Tahoma"/>
+                <a:cs typeface="Tahoma"/>
+              </a:rPr>
               <a:t>ONNX → RKNN เป้าหมาย RK3588</a:t>
             </a:r>
           </a:p>
@@ -7558,14 +9171,21 @@
               <a:spcAft>
                 <a:spcPts val="400"/>
               </a:spcAft>
-              <a:defRPr sz="1800" b="0">
+              <a:defRPr sz="1800" b="0" lang="th-TH">
                 <a:solidFill>
                   <a:srgbClr val="1D2F3E"/>
                 </a:solidFill>
                 <a:latin typeface="Tahoma"/>
-              </a:defRPr>
-            </a:pPr>
-            <a:r>
+                <a:ea typeface="Tahoma"/>
+                <a:cs typeface="Tahoma"/>
+              </a:defRPr>
+            </a:pPr>
+            <a:r>
+              <a:rPr lang="th-TH">
+                <a:latin typeface="Tahoma"/>
+                <a:ea typeface="Tahoma"/>
+                <a:cs typeface="Tahoma"/>
+              </a:rPr>
               <a:t>รัน inference ผ่าน SDK บน PC ได้</a:t>
             </a:r>
           </a:p>
@@ -7574,14 +9194,21 @@
               <a:spcAft>
                 <a:spcPts val="400"/>
               </a:spcAft>
-              <a:defRPr sz="1800" b="0">
+              <a:defRPr sz="1800" b="0" lang="th-TH">
                 <a:solidFill>
                   <a:srgbClr val="1D2F3E"/>
                 </a:solidFill>
                 <a:latin typeface="Tahoma"/>
-              </a:defRPr>
-            </a:pPr>
-            <a:r>
+                <a:ea typeface="Tahoma"/>
+                <a:cs typeface="Tahoma"/>
+              </a:defRPr>
+            </a:pPr>
+            <a:r>
+              <a:rPr lang="th-TH">
+                <a:latin typeface="Tahoma"/>
+                <a:ea typeface="Tahoma"/>
+                <a:cs typeface="Tahoma"/>
+              </a:rPr>
               <a:t>ยังไม่ quantize และยังไม่มีค่า</a:t>
             </a:r>
           </a:p>
@@ -7590,14 +9217,21 @@
               <a:spcAft>
                 <a:spcPts val="400"/>
               </a:spcAft>
-              <a:defRPr sz="1800" b="0">
+              <a:defRPr sz="1800" b="0" lang="th-TH">
                 <a:solidFill>
                   <a:srgbClr val="1D2F3E"/>
                 </a:solidFill>
                 <a:latin typeface="Tahoma"/>
-              </a:defRPr>
-            </a:pPr>
-            <a:r>
+                <a:ea typeface="Tahoma"/>
+                <a:cs typeface="Tahoma"/>
+              </a:defRPr>
+            </a:pPr>
+            <a:r>
+              <a:rPr lang="th-TH">
+                <a:latin typeface="Tahoma"/>
+                <a:ea typeface="Tahoma"/>
+                <a:cs typeface="Tahoma"/>
+              </a:rPr>
               <a:t>เวลา RAM หรือพลังงานบน NPU จริง</a:t>
             </a:r>
           </a:p>
@@ -7672,14 +9306,21 @@
               <a:spcAft>
                 <a:spcPts val="400"/>
               </a:spcAft>
-              <a:defRPr sz="1300" b="1">
+              <a:defRPr sz="1300" b="1" lang="th-TH">
                 <a:solidFill>
                   <a:srgbClr val="FFFFFF"/>
                 </a:solidFill>
                 <a:latin typeface="Tahoma"/>
-              </a:defRPr>
-            </a:pPr>
-            <a:r>
+                <a:ea typeface="Tahoma"/>
+                <a:cs typeface="Tahoma"/>
+              </a:defRPr>
+            </a:pPr>
+            <a:r>
+              <a:rPr lang="th-TH">
+                <a:latin typeface="Tahoma"/>
+                <a:ea typeface="Tahoma"/>
+                <a:cs typeface="Tahoma"/>
+              </a:rPr>
               <a:t>PC-side check ≠ NPU benchmark</a:t>
             </a:r>
           </a:p>
@@ -7737,14 +9378,21 @@
               <a:spcAft>
                 <a:spcPts val="400"/>
               </a:spcAft>
-              <a:defRPr sz="2800" b="1">
+              <a:defRPr sz="2800" b="1" lang="th-TH">
                 <a:solidFill>
                   <a:srgbClr val="1D2A5D"/>
                 </a:solidFill>
                 <a:latin typeface="Tahoma"/>
-              </a:defRPr>
-            </a:pPr>
-            <a:r>
+                <a:ea typeface="Tahoma"/>
+                <a:cs typeface="Tahoma"/>
+              </a:defRPr>
+            </a:pPr>
+            <a:r>
+              <a:rPr lang="th-TH">
+                <a:latin typeface="Tahoma"/>
+                <a:ea typeface="Tahoma"/>
+                <a:cs typeface="Tahoma"/>
+              </a:rPr>
               <a:t>เดโมบน PC: จากภาพไปสู่กรอบเอกสาร</a:t>
             </a:r>
           </a:p>
@@ -7776,14 +9424,21 @@
               <a:spcAft>
                 <a:spcPts val="400"/>
               </a:spcAft>
-              <a:defRPr sz="1500" b="0">
+              <a:defRPr sz="1500" b="0" lang="th-TH">
                 <a:solidFill>
                   <a:srgbClr val="576975"/>
                 </a:solidFill>
                 <a:latin typeface="Tahoma"/>
-              </a:defRPr>
-            </a:pPr>
-            <a:r>
+                <a:ea typeface="Tahoma"/>
+                <a:cs typeface="Tahoma"/>
+              </a:defRPr>
+            </a:pPr>
+            <a:r>
+              <a:rPr lang="th-TH">
+                <a:latin typeface="Tahoma"/>
+                <a:ea typeface="Tahoma"/>
+                <a:cs typeface="Tahoma"/>
+              </a:rPr>
               <a:t>ตัวอย่างจริงจากชุดตรวจฉากเดิม แสดงภาพต้นฉบับคู่กับผล YOLOv8n</a:t>
             </a:r>
           </a:p>
@@ -7850,14 +9505,21 @@
               <a:spcAft>
                 <a:spcPts val="400"/>
               </a:spcAft>
-              <a:defRPr sz="900" b="0">
+              <a:defRPr sz="900" b="0" lang="th-TH">
                 <a:solidFill>
                   <a:srgbClr val="576975"/>
                 </a:solidFill>
                 <a:latin typeface="Tahoma"/>
-              </a:defRPr>
-            </a:pPr>
-            <a:r>
+                <a:ea typeface="Tahoma"/>
+                <a:cs typeface="Tahoma"/>
+              </a:defRPr>
+            </a:pPr>
+            <a:r>
+              <a:rPr lang="th-TH">
+                <a:latin typeface="Tahoma"/>
+                <a:ea typeface="Tahoma"/>
+                <a:cs typeface="Tahoma"/>
+              </a:rPr>
               <a:t>โครงงานคอมพิวเตอร์ | รายงานความก้าวหน้า | 18 ต.ค. 2569</a:t>
             </a:r>
           </a:p>
@@ -7889,14 +9551,21 @@
               <a:spcAft>
                 <a:spcPts val="400"/>
               </a:spcAft>
-              <a:defRPr sz="900" b="0">
+              <a:defRPr sz="900" b="0" lang="th-TH">
                 <a:solidFill>
                   <a:srgbClr val="576975"/>
                 </a:solidFill>
                 <a:latin typeface="Tahoma"/>
-              </a:defRPr>
-            </a:pPr>
-            <a:r>
+                <a:ea typeface="Tahoma"/>
+                <a:cs typeface="Tahoma"/>
+              </a:defRPr>
+            </a:pPr>
+            <a:r>
+              <a:rPr lang="th-TH">
+                <a:latin typeface="Tahoma"/>
+                <a:ea typeface="Tahoma"/>
+                <a:cs typeface="Tahoma"/>
+              </a:rPr>
               <a:t>16</a:t>
             </a:r>
           </a:p>
@@ -7928,14 +9597,21 @@
               <a:spcAft>
                 <a:spcPts val="400"/>
               </a:spcAft>
-              <a:defRPr sz="1700" b="1">
+              <a:defRPr sz="1700" b="1" lang="th-TH">
                 <a:solidFill>
                   <a:srgbClr val="1D2A5D"/>
                 </a:solidFill>
                 <a:latin typeface="Tahoma"/>
-              </a:defRPr>
-            </a:pPr>
-            <a:r>
+                <a:ea typeface="Tahoma"/>
+                <a:cs typeface="Tahoma"/>
+              </a:defRPr>
+            </a:pPr>
+            <a:r>
+              <a:rPr lang="th-TH">
+                <a:latin typeface="Tahoma"/>
+                <a:ea typeface="Tahoma"/>
+                <a:cs typeface="Tahoma"/>
+              </a:rPr>
               <a:t>ภาพต้นฉบับ</a:t>
             </a:r>
           </a:p>
@@ -7967,14 +9643,21 @@
               <a:spcAft>
                 <a:spcPts val="400"/>
               </a:spcAft>
-              <a:defRPr sz="1700" b="1">
+              <a:defRPr sz="1700" b="1" lang="th-TH">
                 <a:solidFill>
                   <a:srgbClr val="1D2A5D"/>
                 </a:solidFill>
                 <a:latin typeface="Tahoma"/>
-              </a:defRPr>
-            </a:pPr>
-            <a:r>
+                <a:ea typeface="Tahoma"/>
+                <a:cs typeface="Tahoma"/>
+              </a:defRPr>
+            </a:pPr>
+            <a:r>
+              <a:rPr lang="th-TH">
+                <a:latin typeface="Tahoma"/>
+                <a:ea typeface="Tahoma"/>
+                <a:cs typeface="Tahoma"/>
+              </a:rPr>
               <a:t>ผลตรวจจับบน PC</a:t>
             </a:r>
           </a:p>
@@ -8054,14 +9737,21 @@
               <a:spcAft>
                 <a:spcPts val="400"/>
               </a:spcAft>
-              <a:defRPr sz="2500" b="1">
+              <a:defRPr sz="2500" b="1" lang="th-TH">
                 <a:solidFill>
                   <a:srgbClr val="137E9A"/>
                 </a:solidFill>
                 <a:latin typeface="Tahoma"/>
-              </a:defRPr>
-            </a:pPr>
-            <a:r>
+                <a:ea typeface="Tahoma"/>
+                <a:cs typeface="Tahoma"/>
+              </a:defRPr>
+            </a:pPr>
+            <a:r>
+              <a:rPr lang="th-TH">
+                <a:latin typeface="Tahoma"/>
+                <a:ea typeface="Tahoma"/>
+                <a:cs typeface="Tahoma"/>
+              </a:rPr>
               <a:t>→</a:t>
             </a:r>
           </a:p>
@@ -8136,14 +9826,21 @@
               <a:spcAft>
                 <a:spcPts val="400"/>
               </a:spcAft>
-              <a:defRPr sz="2200" b="1">
+              <a:defRPr sz="2200" b="1" lang="th-TH">
                 <a:solidFill>
                   <a:srgbClr val="1D2A5D"/>
                 </a:solidFill>
                 <a:latin typeface="Tahoma"/>
-              </a:defRPr>
-            </a:pPr>
-            <a:r>
+                <a:ea typeface="Tahoma"/>
+                <a:cs typeface="Tahoma"/>
+              </a:defRPr>
+            </a:pPr>
+            <a:r>
+              <a:rPr lang="th-TH">
+                <a:latin typeface="Tahoma"/>
+                <a:ea typeface="Tahoma"/>
+                <a:cs typeface="Tahoma"/>
+              </a:rPr>
               <a:t>สิ่งที่สาธิต</a:t>
             </a:r>
           </a:p>
@@ -8175,14 +9872,21 @@
               <a:spcAft>
                 <a:spcPts val="400"/>
               </a:spcAft>
-              <a:defRPr sz="1700" b="0">
+              <a:defRPr sz="1700" b="0" lang="th-TH">
                 <a:solidFill>
                   <a:srgbClr val="1D2F3E"/>
                 </a:solidFill>
                 <a:latin typeface="Tahoma"/>
-              </a:defRPr>
-            </a:pPr>
-            <a:r>
+                <a:ea typeface="Tahoma"/>
+                <a:cs typeface="Tahoma"/>
+              </a:defRPr>
+            </a:pPr>
+            <a:r>
+              <a:rPr lang="th-TH">
+                <a:latin typeface="Tahoma"/>
+                <a:ea typeface="Tahoma"/>
+                <a:cs typeface="Tahoma"/>
+              </a:rPr>
               <a:t>โมเดลจากการฝึก 38 ภาพบน PC CPU</a:t>
             </a:r>
           </a:p>
@@ -8191,14 +9895,21 @@
               <a:spcAft>
                 <a:spcPts val="400"/>
               </a:spcAft>
-              <a:defRPr sz="1700" b="0">
+              <a:defRPr sz="1700" b="0" lang="th-TH">
                 <a:solidFill>
                   <a:srgbClr val="1D2F3E"/>
                 </a:solidFill>
                 <a:latin typeface="Tahoma"/>
-              </a:defRPr>
-            </a:pPr>
-            <a:r>
+                <a:ea typeface="Tahoma"/>
+                <a:cs typeface="Tahoma"/>
+              </a:defRPr>
+            </a:pPr>
+            <a:r>
+              <a:rPr lang="th-TH">
+                <a:latin typeface="Tahoma"/>
+                <a:ea typeface="Tahoma"/>
+                <a:cs typeface="Tahoma"/>
+              </a:rPr>
               <a:t>ภาพนี้อยู่ในชุดตรวจฉากเดิม 10 ภาพ</a:t>
             </a:r>
           </a:p>
@@ -8207,14 +9918,21 @@
               <a:spcAft>
                 <a:spcPts val="400"/>
               </a:spcAft>
-              <a:defRPr sz="1700" b="0">
+              <a:defRPr sz="1700" b="0" lang="th-TH">
                 <a:solidFill>
                   <a:srgbClr val="1D2F3E"/>
                 </a:solidFill>
                 <a:latin typeface="Tahoma"/>
-              </a:defRPr>
-            </a:pPr>
-            <a:r>
+                <a:ea typeface="Tahoma"/>
+                <a:cs typeface="Tahoma"/>
+              </a:defRPr>
+            </a:pPr>
+            <a:r>
+              <a:rPr lang="th-TH">
+                <a:latin typeface="Tahoma"/>
+                <a:ea typeface="Tahoma"/>
+                <a:cs typeface="Tahoma"/>
+              </a:rPr>
               <a:t>แสดง 1 กรอบที่ confidence 0.981</a:t>
             </a:r>
           </a:p>
@@ -8223,14 +9941,21 @@
               <a:spcAft>
                 <a:spcPts val="400"/>
               </a:spcAft>
-              <a:defRPr sz="1700" b="0">
+              <a:defRPr sz="1700" b="0" lang="th-TH">
                 <a:solidFill>
                   <a:srgbClr val="1D2F3E"/>
                 </a:solidFill>
                 <a:latin typeface="Tahoma"/>
-              </a:defRPr>
-            </a:pPr>
-            <a:r>
+                <a:ea typeface="Tahoma"/>
+                <a:cs typeface="Tahoma"/>
+              </a:defRPr>
+            </a:pPr>
+            <a:r>
+              <a:rPr lang="th-TH">
+                <a:latin typeface="Tahoma"/>
+                <a:ea typeface="Tahoma"/>
+                <a:cs typeface="Tahoma"/>
+              </a:rPr>
               <a:t>ตั้งเกณฑ์แสดงผล confidence ≥ 0.80</a:t>
             </a:r>
           </a:p>
@@ -8262,14 +9987,21 @@
               <a:spcAft>
                 <a:spcPts val="400"/>
               </a:spcAft>
-              <a:defRPr sz="1500" b="1">
+              <a:defRPr sz="1500" b="1" lang="th-TH">
                 <a:solidFill>
                   <a:srgbClr val="C05C2B"/>
                 </a:solidFill>
                 <a:latin typeface="Tahoma"/>
-              </a:defRPr>
-            </a:pPr>
-            <a:r>
+                <a:ea typeface="Tahoma"/>
+                <a:cs typeface="Tahoma"/>
+              </a:defRPr>
+            </a:pPr>
+            <a:r>
+              <a:rPr lang="th-TH">
+                <a:latin typeface="Tahoma"/>
+                <a:ea typeface="Tahoma"/>
+                <a:cs typeface="Tahoma"/>
+              </a:rPr>
               <a:t>ภาพตัวอย่างหนึ่งภาพ ไม่ใช่ผลทดสอบข้ามฉากหรือผลบน NPU</a:t>
             </a:r>
           </a:p>
@@ -8327,14 +10059,21 @@
               <a:spcAft>
                 <a:spcPts val="400"/>
               </a:spcAft>
-              <a:defRPr sz="2800" b="1">
+              <a:defRPr sz="2800" b="1" lang="th-TH">
                 <a:solidFill>
                   <a:srgbClr val="1D2A5D"/>
                 </a:solidFill>
                 <a:latin typeface="Tahoma"/>
-              </a:defRPr>
-            </a:pPr>
-            <a:r>
+                <a:ea typeface="Tahoma"/>
+                <a:cs typeface="Tahoma"/>
+              </a:defRPr>
+            </a:pPr>
+            <a:r>
+              <a:rPr lang="th-TH">
+                <a:latin typeface="Tahoma"/>
+                <a:ea typeface="Tahoma"/>
+                <a:cs typeface="Tahoma"/>
+              </a:rPr>
               <a:t>งานถัดไปจากผลนำร่อง</a:t>
             </a:r>
           </a:p>
@@ -8366,14 +10105,21 @@
               <a:spcAft>
                 <a:spcPts val="400"/>
               </a:spcAft>
-              <a:defRPr sz="1500" b="0">
+              <a:defRPr sz="1500" b="0" lang="th-TH">
                 <a:solidFill>
                   <a:srgbClr val="576975"/>
                 </a:solidFill>
                 <a:latin typeface="Tahoma"/>
-              </a:defRPr>
-            </a:pPr>
-            <a:r>
+                <a:ea typeface="Tahoma"/>
+                <a:cs typeface="Tahoma"/>
+              </a:defRPr>
+            </a:pPr>
+            <a:r>
+              <a:rPr lang="th-TH">
+                <a:latin typeface="Tahoma"/>
+                <a:ea typeface="Tahoma"/>
+                <a:cs typeface="Tahoma"/>
+              </a:rPr>
               <a:t>ลำดับงานรักษาทิศทางของโครงงานทั้งระบบ</a:t>
             </a:r>
           </a:p>
@@ -8440,14 +10186,21 @@
               <a:spcAft>
                 <a:spcPts val="400"/>
               </a:spcAft>
-              <a:defRPr sz="900" b="0">
+              <a:defRPr sz="900" b="0" lang="th-TH">
                 <a:solidFill>
                   <a:srgbClr val="576975"/>
                 </a:solidFill>
                 <a:latin typeface="Tahoma"/>
-              </a:defRPr>
-            </a:pPr>
-            <a:r>
+                <a:ea typeface="Tahoma"/>
+                <a:cs typeface="Tahoma"/>
+              </a:defRPr>
+            </a:pPr>
+            <a:r>
+              <a:rPr lang="th-TH">
+                <a:latin typeface="Tahoma"/>
+                <a:ea typeface="Tahoma"/>
+                <a:cs typeface="Tahoma"/>
+              </a:rPr>
               <a:t>โครงงานคอมพิวเตอร์ | รายงานความก้าวหน้า | 18 ต.ค. 2569</a:t>
             </a:r>
           </a:p>
@@ -8479,14 +10232,21 @@
               <a:spcAft>
                 <a:spcPts val="400"/>
               </a:spcAft>
-              <a:defRPr sz="900" b="0">
+              <a:defRPr sz="900" b="0" lang="th-TH">
                 <a:solidFill>
                   <a:srgbClr val="576975"/>
                 </a:solidFill>
                 <a:latin typeface="Tahoma"/>
-              </a:defRPr>
-            </a:pPr>
-            <a:r>
+                <a:ea typeface="Tahoma"/>
+                <a:cs typeface="Tahoma"/>
+              </a:defRPr>
+            </a:pPr>
+            <a:r>
+              <a:rPr lang="th-TH">
+                <a:latin typeface="Tahoma"/>
+                <a:ea typeface="Tahoma"/>
+                <a:cs typeface="Tahoma"/>
+              </a:rPr>
               <a:t>17</a:t>
             </a:r>
           </a:p>
@@ -8561,14 +10321,21 @@
               <a:spcAft>
                 <a:spcPts val="400"/>
               </a:spcAft>
-              <a:defRPr sz="1600" b="1">
+              <a:defRPr sz="1600" b="1" lang="th-TH">
                 <a:solidFill>
                   <a:srgbClr val="FFFFFF"/>
                 </a:solidFill>
                 <a:latin typeface="Tahoma"/>
-              </a:defRPr>
-            </a:pPr>
-            <a:r>
+                <a:ea typeface="Tahoma"/>
+                <a:cs typeface="Tahoma"/>
+              </a:defRPr>
+            </a:pPr>
+            <a:r>
+              <a:rPr lang="th-TH">
+                <a:latin typeface="Tahoma"/>
+                <a:ea typeface="Tahoma"/>
+                <a:cs typeface="Tahoma"/>
+              </a:rPr>
               <a:t>1</a:t>
             </a:r>
           </a:p>
@@ -8600,14 +10367,21 @@
               <a:spcAft>
                 <a:spcPts val="400"/>
               </a:spcAft>
-              <a:defRPr sz="2000" b="1">
+              <a:defRPr sz="2000" b="1" lang="th-TH">
                 <a:solidFill>
                   <a:srgbClr val="1D2A5D"/>
                 </a:solidFill>
                 <a:latin typeface="Tahoma"/>
-              </a:defRPr>
-            </a:pPr>
-            <a:r>
+                <a:ea typeface="Tahoma"/>
+                <a:cs typeface="Tahoma"/>
+              </a:defRPr>
+            </a:pPr>
+            <a:r>
+              <a:rPr lang="th-TH">
+                <a:latin typeface="Tahoma"/>
+                <a:ea typeface="Tahoma"/>
+                <a:cs typeface="Tahoma"/>
+              </a:rPr>
               <a:t>แก้ชุดข้อมูล</a:t>
             </a:r>
           </a:p>
@@ -8639,14 +10413,21 @@
               <a:spcAft>
                 <a:spcPts val="400"/>
               </a:spcAft>
-              <a:defRPr sz="1700" b="0">
+              <a:defRPr sz="1700" b="0" lang="th-TH">
                 <a:solidFill>
                   <a:srgbClr val="1D2F3E"/>
                 </a:solidFill>
                 <a:latin typeface="Tahoma"/>
-              </a:defRPr>
-            </a:pPr>
-            <a:r>
+                <a:ea typeface="Tahoma"/>
+                <a:cs typeface="Tahoma"/>
+              </a:defRPr>
+            </a:pPr>
+            <a:r>
+              <a:rPr lang="th-TH">
+                <a:latin typeface="Tahoma"/>
+                <a:ea typeface="Tahoma"/>
+                <a:cs typeface="Tahoma"/>
+              </a:rPr>
               <a:t>ตรวจ label / ธุรกรรมซ้ำ และทำเฉลย OCR–JSON สองรอบ</a:t>
             </a:r>
           </a:p>
@@ -8721,14 +10502,21 @@
               <a:spcAft>
                 <a:spcPts val="400"/>
               </a:spcAft>
-              <a:defRPr sz="1600" b="1">
+              <a:defRPr sz="1600" b="1" lang="th-TH">
                 <a:solidFill>
                   <a:srgbClr val="FFFFFF"/>
                 </a:solidFill>
                 <a:latin typeface="Tahoma"/>
-              </a:defRPr>
-            </a:pPr>
-            <a:r>
+                <a:ea typeface="Tahoma"/>
+                <a:cs typeface="Tahoma"/>
+              </a:defRPr>
+            </a:pPr>
+            <a:r>
+              <a:rPr lang="th-TH">
+                <a:latin typeface="Tahoma"/>
+                <a:ea typeface="Tahoma"/>
+                <a:cs typeface="Tahoma"/>
+              </a:rPr>
               <a:t>2</a:t>
             </a:r>
           </a:p>
@@ -8760,14 +10548,21 @@
               <a:spcAft>
                 <a:spcPts val="400"/>
               </a:spcAft>
-              <a:defRPr sz="2000" b="1">
+              <a:defRPr sz="2000" b="1" lang="th-TH">
                 <a:solidFill>
                   <a:srgbClr val="1D2A5D"/>
                 </a:solidFill>
                 <a:latin typeface="Tahoma"/>
-              </a:defRPr>
-            </a:pPr>
-            <a:r>
+                <a:ea typeface="Tahoma"/>
+                <a:cs typeface="Tahoma"/>
+              </a:defRPr>
+            </a:pPr>
+            <a:r>
+              <a:rPr lang="th-TH">
+                <a:latin typeface="Tahoma"/>
+                <a:ea typeface="Tahoma"/>
+                <a:cs typeface="Tahoma"/>
+              </a:rPr>
               <a:t>วัดแต่ละชั้น</a:t>
             </a:r>
           </a:p>
@@ -8799,14 +10594,21 @@
               <a:spcAft>
                 <a:spcPts val="400"/>
               </a:spcAft>
-              <a:defRPr sz="1700" b="0">
+              <a:defRPr sz="1700" b="0" lang="th-TH">
                 <a:solidFill>
                   <a:srgbClr val="1D2F3E"/>
                 </a:solidFill>
                 <a:latin typeface="Tahoma"/>
-              </a:defRPr>
-            </a:pPr>
-            <a:r>
+                <a:ea typeface="Tahoma"/>
+                <a:cs typeface="Tahoma"/>
+              </a:defRPr>
+            </a:pPr>
+            <a:r>
+              <a:rPr lang="th-TH">
+                <a:latin typeface="Tahoma"/>
+                <a:ea typeface="Tahoma"/>
+                <a:cs typeface="Tahoma"/>
+              </a:rPr>
               <a:t>เพิ่มฉากใหม่ เปรียบเทียบ OCR และทดสอบ LLM / JSON บน PC</a:t>
             </a:r>
           </a:p>
@@ -8881,14 +10683,21 @@
               <a:spcAft>
                 <a:spcPts val="400"/>
               </a:spcAft>
-              <a:defRPr sz="1600" b="1">
+              <a:defRPr sz="1600" b="1" lang="th-TH">
                 <a:solidFill>
                   <a:srgbClr val="FFFFFF"/>
                 </a:solidFill>
                 <a:latin typeface="Tahoma"/>
-              </a:defRPr>
-            </a:pPr>
-            <a:r>
+                <a:ea typeface="Tahoma"/>
+                <a:cs typeface="Tahoma"/>
+              </a:defRPr>
+            </a:pPr>
+            <a:r>
+              <a:rPr lang="th-TH">
+                <a:latin typeface="Tahoma"/>
+                <a:ea typeface="Tahoma"/>
+                <a:cs typeface="Tahoma"/>
+              </a:rPr>
               <a:t>3</a:t>
             </a:r>
           </a:p>
@@ -8920,14 +10729,21 @@
               <a:spcAft>
                 <a:spcPts val="400"/>
               </a:spcAft>
-              <a:defRPr sz="2000" b="1">
+              <a:defRPr sz="2000" b="1" lang="th-TH">
                 <a:solidFill>
                   <a:srgbClr val="1D2A5D"/>
                 </a:solidFill>
                 <a:latin typeface="Tahoma"/>
-              </a:defRPr>
-            </a:pPr>
-            <a:r>
+                <a:ea typeface="Tahoma"/>
+                <a:cs typeface="Tahoma"/>
+              </a:defRPr>
+            </a:pPr>
+            <a:r>
+              <a:rPr lang="th-TH">
+                <a:latin typeface="Tahoma"/>
+                <a:ea typeface="Tahoma"/>
+                <a:cs typeface="Tahoma"/>
+              </a:rPr>
               <a:t>ตรวจการส่งออก</a:t>
             </a:r>
           </a:p>
@@ -8959,14 +10775,21 @@
               <a:spcAft>
                 <a:spcPts val="400"/>
               </a:spcAft>
-              <a:defRPr sz="1700" b="0">
+              <a:defRPr sz="1700" b="0" lang="th-TH">
                 <a:solidFill>
                   <a:srgbClr val="1D2F3E"/>
                 </a:solidFill>
                 <a:latin typeface="Tahoma"/>
-              </a:defRPr>
-            </a:pPr>
-            <a:r>
+                <a:ea typeface="Tahoma"/>
+                <a:cs typeface="Tahoma"/>
+              </a:defRPr>
+            </a:pPr>
+            <a:r>
+              <a:rPr lang="th-TH">
+                <a:latin typeface="Tahoma"/>
+                <a:ea typeface="Tahoma"/>
+                <a:cs typeface="Tahoma"/>
+              </a:rPr>
               <a:t>ทดสอบ quantization และ PC-side SDK โดยเก็บเวอร์ชันกับผล</a:t>
             </a:r>
           </a:p>
@@ -9041,14 +10864,21 @@
               <a:spcAft>
                 <a:spcPts val="400"/>
               </a:spcAft>
-              <a:defRPr sz="1600" b="1">
+              <a:defRPr sz="1600" b="1" lang="th-TH">
                 <a:solidFill>
                   <a:srgbClr val="FFFFFF"/>
                 </a:solidFill>
                 <a:latin typeface="Tahoma"/>
-              </a:defRPr>
-            </a:pPr>
-            <a:r>
+                <a:ea typeface="Tahoma"/>
+                <a:cs typeface="Tahoma"/>
+              </a:defRPr>
+            </a:pPr>
+            <a:r>
+              <a:rPr lang="th-TH">
+                <a:latin typeface="Tahoma"/>
+                <a:ea typeface="Tahoma"/>
+                <a:cs typeface="Tahoma"/>
+              </a:rPr>
               <a:t>4</a:t>
             </a:r>
           </a:p>
@@ -9080,14 +10910,21 @@
               <a:spcAft>
                 <a:spcPts val="400"/>
               </a:spcAft>
-              <a:defRPr sz="2000" b="1">
+              <a:defRPr sz="2000" b="1" lang="th-TH">
                 <a:solidFill>
                   <a:srgbClr val="1D2A5D"/>
                 </a:solidFill>
                 <a:latin typeface="Tahoma"/>
-              </a:defRPr>
-            </a:pPr>
-            <a:r>
+                <a:ea typeface="Tahoma"/>
+                <a:cs typeface="Tahoma"/>
+              </a:defRPr>
+            </a:pPr>
+            <a:r>
+              <a:rPr lang="th-TH">
+                <a:latin typeface="Tahoma"/>
+                <a:ea typeface="Tahoma"/>
+                <a:cs typeface="Tahoma"/>
+              </a:rPr>
               <a:t>ต่อระบบและฮาร์ดแวร์</a:t>
             </a:r>
           </a:p>
@@ -9119,14 +10956,21 @@
               <a:spcAft>
                 <a:spcPts val="400"/>
               </a:spcAft>
-              <a:defRPr sz="1700" b="0">
+              <a:defRPr sz="1700" b="0" lang="th-TH">
                 <a:solidFill>
                   <a:srgbClr val="1D2F3E"/>
                 </a:solidFill>
                 <a:latin typeface="Tahoma"/>
-              </a:defRPr>
-            </a:pPr>
-            <a:r>
+                <a:ea typeface="Tahoma"/>
+                <a:cs typeface="Tahoma"/>
+              </a:defRPr>
+            </a:pPr>
+            <a:r>
+              <a:rPr lang="th-TH">
+                <a:latin typeface="Tahoma"/>
+                <a:ea typeface="Tahoma"/>
+                <a:cs typeface="Tahoma"/>
+              </a:rPr>
               <a:t>ทดสอบ MQTT ด้วยข้อมูลที่ตรวจแล้ว; ย้ายขึ้นบอร์ดเมื่อพร้อม</a:t>
             </a:r>
           </a:p>
@@ -9158,14 +11002,21 @@
               <a:spcAft>
                 <a:spcPts val="400"/>
               </a:spcAft>
-              <a:defRPr sz="1500" b="0">
+              <a:defRPr sz="1500" b="0" lang="th-TH">
                 <a:solidFill>
                   <a:srgbClr val="576975"/>
                 </a:solidFill>
                 <a:latin typeface="Tahoma"/>
-              </a:defRPr>
-            </a:pPr>
-            <a:r>
+                <a:ea typeface="Tahoma"/>
+                <a:cs typeface="Tahoma"/>
+              </a:defRPr>
+            </a:pPr>
+            <a:r>
+              <a:rPr lang="th-TH">
+                <a:latin typeface="Tahoma"/>
+                <a:ea typeface="Tahoma"/>
+                <a:cs typeface="Tahoma"/>
+              </a:rPr>
               <a:t>อุปกรณ์เป้าหมายในระยะขอยืม: RK3588; จะวัด NPU จริงหลังได้รับบอร์ดและยืนยัน SDK</a:t>
             </a:r>
           </a:p>
@@ -9223,14 +11074,21 @@
               <a:spcAft>
                 <a:spcPts val="400"/>
               </a:spcAft>
-              <a:defRPr sz="2800" b="1">
+              <a:defRPr sz="2800" b="1" lang="th-TH">
                 <a:solidFill>
                   <a:srgbClr val="FFFFFF"/>
                 </a:solidFill>
                 <a:latin typeface="Tahoma"/>
-              </a:defRPr>
-            </a:pPr>
-            <a:r>
+                <a:ea typeface="Tahoma"/>
+                <a:cs typeface="Tahoma"/>
+              </a:defRPr>
+            </a:pPr>
+            <a:r>
+              <a:rPr lang="th-TH">
+                <a:latin typeface="Tahoma"/>
+                <a:ea typeface="Tahoma"/>
+                <a:cs typeface="Tahoma"/>
+              </a:rPr>
               <a:t>สรุปความก้าวหน้า</a:t>
             </a:r>
           </a:p>
@@ -9262,14 +11120,21 @@
               <a:spcAft>
                 <a:spcPts val="400"/>
               </a:spcAft>
-              <a:defRPr sz="1500" b="0">
+              <a:defRPr sz="1500" b="0" lang="th-TH">
                 <a:solidFill>
                   <a:srgbClr val="FFFFFF"/>
                 </a:solidFill>
                 <a:latin typeface="Tahoma"/>
-              </a:defRPr>
-            </a:pPr>
-            <a:r>
+                <a:ea typeface="Tahoma"/>
+                <a:cs typeface="Tahoma"/>
+              </a:defRPr>
+            </a:pPr>
+            <a:r>
+              <a:rPr lang="th-TH">
+                <a:latin typeface="Tahoma"/>
+                <a:ea typeface="Tahoma"/>
+                <a:cs typeface="Tahoma"/>
+              </a:rPr>
               <a:t>จากการทบทวนวรรณกรรมสู่หลักฐานทดลองนำร่อง</a:t>
             </a:r>
           </a:p>
@@ -9336,14 +11201,21 @@
               <a:spcAft>
                 <a:spcPts val="400"/>
               </a:spcAft>
-              <a:defRPr sz="900" b="0">
+              <a:defRPr sz="900" b="0" lang="th-TH">
                 <a:solidFill>
                   <a:srgbClr val="FFFFFF"/>
                 </a:solidFill>
                 <a:latin typeface="Tahoma"/>
-              </a:defRPr>
-            </a:pPr>
-            <a:r>
+                <a:ea typeface="Tahoma"/>
+                <a:cs typeface="Tahoma"/>
+              </a:defRPr>
+            </a:pPr>
+            <a:r>
+              <a:rPr lang="th-TH">
+                <a:latin typeface="Tahoma"/>
+                <a:ea typeface="Tahoma"/>
+                <a:cs typeface="Tahoma"/>
+              </a:rPr>
               <a:t>โครงงานคอมพิวเตอร์ | รายงานความก้าวหน้า | 18 ต.ค. 2569</a:t>
             </a:r>
           </a:p>
@@ -9375,14 +11247,21 @@
               <a:spcAft>
                 <a:spcPts val="400"/>
               </a:spcAft>
-              <a:defRPr sz="900" b="0">
+              <a:defRPr sz="900" b="0" lang="th-TH">
                 <a:solidFill>
                   <a:srgbClr val="FFFFFF"/>
                 </a:solidFill>
                 <a:latin typeface="Tahoma"/>
-              </a:defRPr>
-            </a:pPr>
-            <a:r>
+                <a:ea typeface="Tahoma"/>
+                <a:cs typeface="Tahoma"/>
+              </a:defRPr>
+            </a:pPr>
+            <a:r>
+              <a:rPr lang="th-TH">
+                <a:latin typeface="Tahoma"/>
+                <a:ea typeface="Tahoma"/>
+                <a:cs typeface="Tahoma"/>
+              </a:rPr>
               <a:t>18</a:t>
             </a:r>
           </a:p>
@@ -9414,14 +11293,21 @@
               <a:spcAft>
                 <a:spcPts val="400"/>
               </a:spcAft>
-              <a:defRPr sz="2400" b="1">
+              <a:defRPr sz="2400" b="1" lang="th-TH">
                 <a:solidFill>
                   <a:srgbClr val="FFFFFF"/>
                 </a:solidFill>
                 <a:latin typeface="Tahoma"/>
-              </a:defRPr>
-            </a:pPr>
-            <a:r>
+                <a:ea typeface="Tahoma"/>
+                <a:cs typeface="Tahoma"/>
+              </a:defRPr>
+            </a:pPr>
+            <a:r>
+              <a:rPr lang="th-TH">
+                <a:latin typeface="Tahoma"/>
+                <a:ea typeface="Tahoma"/>
+                <a:cs typeface="Tahoma"/>
+              </a:rPr>
               <a:t>กรอบระบบ e-Senses และ pipeline สามชั้นยังเป็นเป้าหมายหลักของโครงงาน</a:t>
             </a:r>
           </a:p>
@@ -9453,14 +11339,21 @@
               <a:spcAft>
                 <a:spcPts val="400"/>
               </a:spcAft>
-              <a:defRPr sz="2200" b="0">
+              <a:defRPr sz="2200" b="0" lang="th-TH">
                 <a:solidFill>
                   <a:srgbClr val="FFFFFF"/>
                 </a:solidFill>
                 <a:latin typeface="Tahoma"/>
-              </a:defRPr>
-            </a:pPr>
-            <a:r>
+                <a:ea typeface="Tahoma"/>
+                <a:cs typeface="Tahoma"/>
+              </a:defRPr>
+            </a:pPr>
+            <a:r>
+              <a:rPr lang="th-TH">
+                <a:latin typeface="Tahoma"/>
+                <a:ea typeface="Tahoma"/>
+                <a:cs typeface="Tahoma"/>
+              </a:rPr>
               <a:t>วันนี้มีภาพจริง 59 ภาพผู้สมัคร และผล YOLO บน PC ที่ต่างกันระหว่างสองชุดภาพ</a:t>
             </a:r>
           </a:p>
@@ -9469,14 +11362,21 @@
               <a:spcAft>
                 <a:spcPts val="400"/>
               </a:spcAft>
-              <a:defRPr sz="2200" b="0">
+              <a:defRPr sz="2200" b="0" lang="th-TH">
                 <a:solidFill>
                   <a:srgbClr val="FFFFFF"/>
                 </a:solidFill>
                 <a:latin typeface="Tahoma"/>
-              </a:defRPr>
-            </a:pPr>
-            <a:r>
+                <a:ea typeface="Tahoma"/>
+                <a:cs typeface="Tahoma"/>
+              </a:defRPr>
+            </a:pPr>
+            <a:r>
+              <a:rPr lang="th-TH">
+                <a:latin typeface="Tahoma"/>
+                <a:ea typeface="Tahoma"/>
+                <a:cs typeface="Tahoma"/>
+              </a:rPr>
               <a:t>จึงมีข้อมูลใช้วางการทดลอง OCR, JSON/LLM และฮาร์ดแวร์ขั้นถัดไป</a:t>
             </a:r>
           </a:p>
@@ -9543,14 +11443,21 @@
               <a:spcAft>
                 <a:spcPts val="400"/>
               </a:spcAft>
-              <a:defRPr sz="2400" b="1">
+              <a:defRPr sz="2400" b="1" lang="th-TH">
                 <a:solidFill>
                   <a:srgbClr val="FFFFFF"/>
                 </a:solidFill>
                 <a:latin typeface="Tahoma"/>
-              </a:defRPr>
-            </a:pPr>
-            <a:r>
+                <a:ea typeface="Tahoma"/>
+                <a:cs typeface="Tahoma"/>
+              </a:defRPr>
+            </a:pPr>
+            <a:r>
+              <a:rPr lang="th-TH">
+                <a:latin typeface="Tahoma"/>
+                <a:ea typeface="Tahoma"/>
+                <a:cs typeface="Tahoma"/>
+              </a:rPr>
               <a:t>ขอบคุณครับ  |  คำถามและข้อเสนอแนะ</a:t>
             </a:r>
           </a:p>
@@ -9608,14 +11515,21 @@
               <a:spcAft>
                 <a:spcPts val="400"/>
               </a:spcAft>
-              <a:defRPr sz="2800" b="1">
+              <a:defRPr sz="2800" b="1" lang="th-TH">
                 <a:solidFill>
                   <a:srgbClr val="1D2A5D"/>
                 </a:solidFill>
                 <a:latin typeface="Tahoma"/>
-              </a:defRPr>
-            </a:pPr>
-            <a:r>
+                <a:ea typeface="Tahoma"/>
+                <a:cs typeface="Tahoma"/>
+              </a:defRPr>
+            </a:pPr>
+            <a:r>
+              <a:rPr lang="th-TH">
+                <a:latin typeface="Tahoma"/>
+                <a:ea typeface="Tahoma"/>
+                <a:cs typeface="Tahoma"/>
+              </a:rPr>
               <a:t>ที่มา: ทำไมจึงออกแบบให้ประมวลผลในบ้าน</a:t>
             </a:r>
           </a:p>
@@ -9647,14 +11561,21 @@
               <a:spcAft>
                 <a:spcPts val="400"/>
               </a:spcAft>
-              <a:defRPr sz="1500" b="0">
+              <a:defRPr sz="1500" b="0" lang="th-TH">
                 <a:solidFill>
                   <a:srgbClr val="576975"/>
                 </a:solidFill>
                 <a:latin typeface="Tahoma"/>
-              </a:defRPr>
-            </a:pPr>
-            <a:r>
+                <a:ea typeface="Tahoma"/>
+                <a:cs typeface="Tahoma"/>
+              </a:defRPr>
+            </a:pPr>
+            <a:r>
+              <a:rPr lang="th-TH">
+                <a:latin typeface="Tahoma"/>
+                <a:ea typeface="Tahoma"/>
+                <a:cs typeface="Tahoma"/>
+              </a:rPr>
               <a:t>ความเป็นส่วนตัว เวลา และต้นทุน เป็นเป้าหมายการออกแบบที่ยังต้องวัดกับระบบจริง</a:t>
             </a:r>
           </a:p>
@@ -9721,14 +11642,21 @@
               <a:spcAft>
                 <a:spcPts val="400"/>
               </a:spcAft>
-              <a:defRPr sz="900" b="0">
+              <a:defRPr sz="900" b="0" lang="th-TH">
                 <a:solidFill>
                   <a:srgbClr val="576975"/>
                 </a:solidFill>
                 <a:latin typeface="Tahoma"/>
-              </a:defRPr>
-            </a:pPr>
-            <a:r>
+                <a:ea typeface="Tahoma"/>
+                <a:cs typeface="Tahoma"/>
+              </a:defRPr>
+            </a:pPr>
+            <a:r>
+              <a:rPr lang="th-TH">
+                <a:latin typeface="Tahoma"/>
+                <a:ea typeface="Tahoma"/>
+                <a:cs typeface="Tahoma"/>
+              </a:rPr>
               <a:t>โครงงานคอมพิวเตอร์ | รายงานความก้าวหน้า | 18 ต.ค. 2569</a:t>
             </a:r>
           </a:p>
@@ -9760,14 +11688,21 @@
               <a:spcAft>
                 <a:spcPts val="400"/>
               </a:spcAft>
-              <a:defRPr sz="900" b="0">
+              <a:defRPr sz="900" b="0" lang="th-TH">
                 <a:solidFill>
                   <a:srgbClr val="576975"/>
                 </a:solidFill>
                 <a:latin typeface="Tahoma"/>
-              </a:defRPr>
-            </a:pPr>
-            <a:r>
+                <a:ea typeface="Tahoma"/>
+                <a:cs typeface="Tahoma"/>
+              </a:defRPr>
+            </a:pPr>
+            <a:r>
+              <a:rPr lang="th-TH">
+                <a:latin typeface="Tahoma"/>
+                <a:ea typeface="Tahoma"/>
+                <a:cs typeface="Tahoma"/>
+              </a:rPr>
               <a:t>2</a:t>
             </a:r>
           </a:p>
@@ -9885,14 +11820,21 @@
               <a:spcAft>
                 <a:spcPts val="400"/>
               </a:spcAft>
-              <a:defRPr sz="1300" b="1">
+              <a:defRPr sz="1300" b="1" lang="th-TH">
                 <a:solidFill>
                   <a:srgbClr val="FFFFFF"/>
                 </a:solidFill>
                 <a:latin typeface="Tahoma"/>
-              </a:defRPr>
-            </a:pPr>
-            <a:r>
+                <a:ea typeface="Tahoma"/>
+                <a:cs typeface="Tahoma"/>
+              </a:defRPr>
+            </a:pPr>
+            <a:r>
+              <a:rPr lang="th-TH">
+                <a:latin typeface="Tahoma"/>
+                <a:ea typeface="Tahoma"/>
+                <a:cs typeface="Tahoma"/>
+              </a:rPr>
               <a:t>1</a:t>
             </a:r>
           </a:p>
@@ -9924,14 +11866,21 @@
               <a:spcAft>
                 <a:spcPts val="400"/>
               </a:spcAft>
-              <a:defRPr sz="2000" b="1">
+              <a:defRPr sz="2000" b="1" lang="th-TH">
                 <a:solidFill>
                   <a:srgbClr val="1D2A5D"/>
                 </a:solidFill>
                 <a:latin typeface="Tahoma"/>
-              </a:defRPr>
-            </a:pPr>
-            <a:r>
+                <a:ea typeface="Tahoma"/>
+                <a:cs typeface="Tahoma"/>
+              </a:defRPr>
+            </a:pPr>
+            <a:r>
+              <a:rPr lang="th-TH">
+                <a:latin typeface="Tahoma"/>
+                <a:ea typeface="Tahoma"/>
+                <a:cs typeface="Tahoma"/>
+              </a:rPr>
               <a:t>ความเป็นส่วนตัว</a:t>
             </a:r>
           </a:p>
@@ -9963,14 +11912,21 @@
               <a:spcAft>
                 <a:spcPts val="400"/>
               </a:spcAft>
-              <a:defRPr sz="1600" b="0">
+              <a:defRPr sz="1600" b="0" lang="th-TH">
                 <a:solidFill>
                   <a:srgbClr val="1D2F3E"/>
                 </a:solidFill>
                 <a:latin typeface="Tahoma"/>
-              </a:defRPr>
-            </a:pPr>
-            <a:r>
+                <a:ea typeface="Tahoma"/>
+                <a:cs typeface="Tahoma"/>
+              </a:defRPr>
+            </a:pPr>
+            <a:r>
+              <a:rPr lang="th-TH">
+                <a:latin typeface="Tahoma"/>
+                <a:ea typeface="Tahoma"/>
+                <a:cs typeface="Tahoma"/>
+              </a:rPr>
               <a:t>ใบซื้อสินค้ามีข้อมูลส่วนบุคคล จึงต้องกำกับการเก็บและส่งต่อ</a:t>
             </a:r>
           </a:p>
@@ -10088,14 +12044,21 @@
               <a:spcAft>
                 <a:spcPts val="400"/>
               </a:spcAft>
-              <a:defRPr sz="1300" b="1">
+              <a:defRPr sz="1300" b="1" lang="th-TH">
                 <a:solidFill>
                   <a:srgbClr val="FFFFFF"/>
                 </a:solidFill>
                 <a:latin typeface="Tahoma"/>
-              </a:defRPr>
-            </a:pPr>
-            <a:r>
+                <a:ea typeface="Tahoma"/>
+                <a:cs typeface="Tahoma"/>
+              </a:defRPr>
+            </a:pPr>
+            <a:r>
+              <a:rPr lang="th-TH">
+                <a:latin typeface="Tahoma"/>
+                <a:ea typeface="Tahoma"/>
+                <a:cs typeface="Tahoma"/>
+              </a:rPr>
               <a:t>2</a:t>
             </a:r>
           </a:p>
@@ -10127,14 +12090,21 @@
               <a:spcAft>
                 <a:spcPts val="400"/>
               </a:spcAft>
-              <a:defRPr sz="2000" b="1">
+              <a:defRPr sz="2000" b="1" lang="th-TH">
                 <a:solidFill>
                   <a:srgbClr val="1D2A5D"/>
                 </a:solidFill>
                 <a:latin typeface="Tahoma"/>
-              </a:defRPr>
-            </a:pPr>
-            <a:r>
+                <a:ea typeface="Tahoma"/>
+                <a:cs typeface="Tahoma"/>
+              </a:defRPr>
+            </a:pPr>
+            <a:r>
+              <a:rPr lang="th-TH">
+                <a:latin typeface="Tahoma"/>
+                <a:ea typeface="Tahoma"/>
+                <a:cs typeface="Tahoma"/>
+              </a:rPr>
               <a:t>เวลาและต้นทุน</a:t>
             </a:r>
           </a:p>
@@ -10166,14 +12136,21 @@
               <a:spcAft>
                 <a:spcPts val="400"/>
               </a:spcAft>
-              <a:defRPr sz="1600" b="0">
+              <a:defRPr sz="1600" b="0" lang="th-TH">
                 <a:solidFill>
                   <a:srgbClr val="1D2F3E"/>
                 </a:solidFill>
                 <a:latin typeface="Tahoma"/>
-              </a:defRPr>
-            </a:pPr>
-            <a:r>
+                <a:ea typeface="Tahoma"/>
+                <a:cs typeface="Tahoma"/>
+              </a:defRPr>
+            </a:pPr>
+            <a:r>
+              <a:rPr lang="th-TH">
+                <a:latin typeface="Tahoma"/>
+                <a:ea typeface="Tahoma"/>
+                <a:cs typeface="Tahoma"/>
+              </a:rPr>
               <a:t>ตั้งเป้าลดการพึ่งพา Cloud API แต่ยังไม่ได้เปรียบเทียบจริง</a:t>
             </a:r>
           </a:p>
@@ -10291,14 +12268,21 @@
               <a:spcAft>
                 <a:spcPts val="400"/>
               </a:spcAft>
-              <a:defRPr sz="1300" b="1">
+              <a:defRPr sz="1300" b="1" lang="th-TH">
                 <a:solidFill>
                   <a:srgbClr val="FFFFFF"/>
                 </a:solidFill>
                 <a:latin typeface="Tahoma"/>
-              </a:defRPr>
-            </a:pPr>
-            <a:r>
+                <a:ea typeface="Tahoma"/>
+                <a:cs typeface="Tahoma"/>
+              </a:defRPr>
+            </a:pPr>
+            <a:r>
+              <a:rPr lang="th-TH">
+                <a:latin typeface="Tahoma"/>
+                <a:ea typeface="Tahoma"/>
+                <a:cs typeface="Tahoma"/>
+              </a:rPr>
               <a:t>3</a:t>
             </a:r>
           </a:p>
@@ -10330,14 +12314,21 @@
               <a:spcAft>
                 <a:spcPts val="400"/>
               </a:spcAft>
-              <a:defRPr sz="2000" b="1">
+              <a:defRPr sz="2000" b="1" lang="th-TH">
                 <a:solidFill>
                   <a:srgbClr val="1D2A5D"/>
                 </a:solidFill>
                 <a:latin typeface="Tahoma"/>
-              </a:defRPr>
-            </a:pPr>
-            <a:r>
+                <a:ea typeface="Tahoma"/>
+                <a:cs typeface="Tahoma"/>
+              </a:defRPr>
+            </a:pPr>
+            <a:r>
+              <a:rPr lang="th-TH">
+                <a:latin typeface="Tahoma"/>
+                <a:ea typeface="Tahoma"/>
+                <a:cs typeface="Tahoma"/>
+              </a:rPr>
               <a:t>ข้อมูลและทรัพยากร</a:t>
             </a:r>
           </a:p>
@@ -10369,14 +12360,21 @@
               <a:spcAft>
                 <a:spcPts val="400"/>
               </a:spcAft>
-              <a:defRPr sz="1600" b="0">
+              <a:defRPr sz="1600" b="0" lang="th-TH">
                 <a:solidFill>
                   <a:srgbClr val="1D2F3E"/>
                 </a:solidFill>
                 <a:latin typeface="Tahoma"/>
-              </a:defRPr>
-            </a:pPr>
-            <a:r>
+                <a:ea typeface="Tahoma"/>
+                <a:cs typeface="Tahoma"/>
+              </a:defRPr>
+            </a:pPr>
+            <a:r>
+              <a:rPr lang="th-TH">
+                <a:latin typeface="Tahoma"/>
+                <a:ea typeface="Tahoma"/>
+                <a:cs typeface="Tahoma"/>
+              </a:rPr>
               <a:t>ภาพต่างร้าน ภาษา และแสง ต้องประมวลผลบนเครื่องจำกัด</a:t>
             </a:r>
           </a:p>
@@ -10408,14 +12406,21 @@
               <a:spcAft>
                 <a:spcPts val="400"/>
               </a:spcAft>
-              <a:defRPr sz="2100" b="1">
+              <a:defRPr sz="2100" b="1" lang="th-TH">
                 <a:solidFill>
                   <a:srgbClr val="1D2A5D"/>
                 </a:solidFill>
                 <a:latin typeface="Tahoma"/>
-              </a:defRPr>
-            </a:pPr>
-            <a:r>
+                <a:ea typeface="Tahoma"/>
+                <a:cs typeface="Tahoma"/>
+              </a:defRPr>
+            </a:pPr>
+            <a:r>
+              <a:rPr lang="th-TH">
+                <a:latin typeface="Tahoma"/>
+                <a:ea typeface="Tahoma"/>
+                <a:cs typeface="Tahoma"/>
+              </a:rPr>
               <a:t>แนวทางเดิมยังอยู่: รับภาพ → YOLO/OCR → Local LLM/JSON → MQTT/Home Assistant</a:t>
             </a:r>
           </a:p>
@@ -10473,14 +12478,21 @@
               <a:spcAft>
                 <a:spcPts val="400"/>
               </a:spcAft>
-              <a:defRPr sz="2800" b="1">
+              <a:defRPr sz="2800" b="1" lang="th-TH">
                 <a:solidFill>
                   <a:srgbClr val="1D2A5D"/>
                 </a:solidFill>
                 <a:latin typeface="Tahoma"/>
-              </a:defRPr>
-            </a:pPr>
-            <a:r>
+                <a:ea typeface="Tahoma"/>
+                <a:cs typeface="Tahoma"/>
+              </a:defRPr>
+            </a:pPr>
+            <a:r>
+              <a:rPr lang="th-TH">
+                <a:latin typeface="Tahoma"/>
+                <a:ea typeface="Tahoma"/>
+                <a:cs typeface="Tahoma"/>
+              </a:rPr>
               <a:t>ภาพรวมระบบประสาทสัมผัสดิจิทัลในบ้าน</a:t>
             </a:r>
           </a:p>
@@ -10512,14 +12524,21 @@
               <a:spcAft>
                 <a:spcPts val="400"/>
               </a:spcAft>
-              <a:defRPr sz="1500" b="0">
+              <a:defRPr sz="1500" b="0" lang="th-TH">
                 <a:solidFill>
                   <a:srgbClr val="576975"/>
                 </a:solidFill>
                 <a:latin typeface="Tahoma"/>
-              </a:defRPr>
-            </a:pPr>
-            <a:r>
+                <a:ea typeface="Tahoma"/>
+                <a:cs typeface="Tahoma"/>
+              </a:defRPr>
+            </a:pPr>
+            <a:r>
+              <a:rPr lang="th-TH">
+                <a:latin typeface="Tahoma"/>
+                <a:ea typeface="Tahoma"/>
+                <a:cs typeface="Tahoma"/>
+              </a:rPr>
               <a:t>e-Senses เป็นกรอบระบบ ส่วนผลทดลองปัจจุบันเจาะลึกที่ e-Eye</a:t>
             </a:r>
           </a:p>
@@ -10586,14 +12605,21 @@
               <a:spcAft>
                 <a:spcPts val="400"/>
               </a:spcAft>
-              <a:defRPr sz="900" b="0">
+              <a:defRPr sz="900" b="0" lang="th-TH">
                 <a:solidFill>
                   <a:srgbClr val="576975"/>
                 </a:solidFill>
                 <a:latin typeface="Tahoma"/>
-              </a:defRPr>
-            </a:pPr>
-            <a:r>
+                <a:ea typeface="Tahoma"/>
+                <a:cs typeface="Tahoma"/>
+              </a:defRPr>
+            </a:pPr>
+            <a:r>
+              <a:rPr lang="th-TH">
+                <a:latin typeface="Tahoma"/>
+                <a:ea typeface="Tahoma"/>
+                <a:cs typeface="Tahoma"/>
+              </a:rPr>
               <a:t>โครงงานคอมพิวเตอร์ | รายงานความก้าวหน้า | 18 ต.ค. 2569</a:t>
             </a:r>
           </a:p>
@@ -10625,14 +12651,21 @@
               <a:spcAft>
                 <a:spcPts val="400"/>
               </a:spcAft>
-              <a:defRPr sz="900" b="0">
+              <a:defRPr sz="900" b="0" lang="th-TH">
                 <a:solidFill>
                   <a:srgbClr val="576975"/>
                 </a:solidFill>
                 <a:latin typeface="Tahoma"/>
-              </a:defRPr>
-            </a:pPr>
-            <a:r>
+                <a:ea typeface="Tahoma"/>
+                <a:cs typeface="Tahoma"/>
+              </a:defRPr>
+            </a:pPr>
+            <a:r>
+              <a:rPr lang="th-TH">
+                <a:latin typeface="Tahoma"/>
+                <a:ea typeface="Tahoma"/>
+                <a:cs typeface="Tahoma"/>
+              </a:rPr>
               <a:t>3</a:t>
             </a:r>
           </a:p>
@@ -10707,14 +12740,21 @@
               <a:spcAft>
                 <a:spcPts val="400"/>
               </a:spcAft>
-              <a:defRPr sz="1800" b="1">
+              <a:defRPr sz="1800" b="1" lang="th-TH">
                 <a:solidFill>
                   <a:srgbClr val="FFFFFF"/>
                 </a:solidFill>
                 <a:latin typeface="Tahoma"/>
-              </a:defRPr>
-            </a:pPr>
-            <a:r>
+                <a:ea typeface="Tahoma"/>
+                <a:cs typeface="Tahoma"/>
+              </a:defRPr>
+            </a:pPr>
+            <a:r>
+              <a:rPr lang="th-TH">
+                <a:latin typeface="Tahoma"/>
+                <a:ea typeface="Tahoma"/>
+                <a:cs typeface="Tahoma"/>
+              </a:rPr>
               <a:t>Home Digital Nervous System</a:t>
             </a:r>
           </a:p>
@@ -10964,14 +13004,21 @@
               <a:spcAft>
                 <a:spcPts val="400"/>
               </a:spcAft>
-              <a:defRPr sz="2400" b="1">
+              <a:defRPr sz="2400" b="1" lang="th-TH">
                 <a:solidFill>
                   <a:srgbClr val="FFFFFF"/>
                 </a:solidFill>
                 <a:latin typeface="Tahoma"/>
-              </a:defRPr>
-            </a:pPr>
-            <a:r>
+                <a:ea typeface="Tahoma"/>
+                <a:cs typeface="Tahoma"/>
+              </a:defRPr>
+            </a:pPr>
+            <a:r>
+              <a:rPr lang="th-TH">
+                <a:latin typeface="Tahoma"/>
+                <a:ea typeface="Tahoma"/>
+                <a:cs typeface="Tahoma"/>
+              </a:rPr>
               <a:t>e-Eye</a:t>
             </a:r>
           </a:p>
@@ -11003,14 +13050,21 @@
               <a:spcAft>
                 <a:spcPts val="400"/>
               </a:spcAft>
-              <a:defRPr sz="1600" b="0">
+              <a:defRPr sz="1600" b="0" lang="th-TH">
                 <a:solidFill>
                   <a:srgbClr val="FFFFFF"/>
                 </a:solidFill>
                 <a:latin typeface="Tahoma"/>
-              </a:defRPr>
-            </a:pPr>
-            <a:r>
+                <a:ea typeface="Tahoma"/>
+                <a:cs typeface="Tahoma"/>
+              </a:defRPr>
+            </a:pPr>
+            <a:r>
+              <a:rPr lang="th-TH">
+                <a:latin typeface="Tahoma"/>
+                <a:ea typeface="Tahoma"/>
+                <a:cs typeface="Tahoma"/>
+              </a:rPr>
               <a:t>ภาพใบซื้อสินค้า / เอกสาร</a:t>
             </a:r>
           </a:p>
@@ -11042,14 +13096,21 @@
               <a:spcAft>
                 <a:spcPts val="400"/>
               </a:spcAft>
-              <a:defRPr sz="1200" b="0">
+              <a:defRPr sz="1200" b="0" lang="th-TH">
                 <a:solidFill>
                   <a:srgbClr val="FFFFFF"/>
                 </a:solidFill>
                 <a:latin typeface="Tahoma"/>
-              </a:defRPr>
-            </a:pPr>
-            <a:r>
+                <a:ea typeface="Tahoma"/>
+                <a:cs typeface="Tahoma"/>
+              </a:defRPr>
+            </a:pPr>
+            <a:r>
+              <a:rPr lang="th-TH">
+                <a:latin typeface="Tahoma"/>
+                <a:ea typeface="Tahoma"/>
+                <a:cs typeface="Tahoma"/>
+              </a:rPr>
               <a:t>ทดลองนำร่อง</a:t>
             </a:r>
           </a:p>
@@ -11124,14 +13185,21 @@
               <a:spcAft>
                 <a:spcPts val="400"/>
               </a:spcAft>
-              <a:defRPr sz="2400" b="1">
+              <a:defRPr sz="2400" b="1" lang="th-TH">
                 <a:solidFill>
                   <a:srgbClr val="FFFFFF"/>
                 </a:solidFill>
                 <a:latin typeface="Tahoma"/>
-              </a:defRPr>
-            </a:pPr>
-            <a:r>
+                <a:ea typeface="Tahoma"/>
+                <a:cs typeface="Tahoma"/>
+              </a:defRPr>
+            </a:pPr>
+            <a:r>
+              <a:rPr lang="th-TH">
+                <a:latin typeface="Tahoma"/>
+                <a:ea typeface="Tahoma"/>
+                <a:cs typeface="Tahoma"/>
+              </a:rPr>
               <a:t>e-Nose</a:t>
             </a:r>
           </a:p>
@@ -11163,14 +13231,21 @@
               <a:spcAft>
                 <a:spcPts val="400"/>
               </a:spcAft>
-              <a:defRPr sz="1600" b="0">
+              <a:defRPr sz="1600" b="0" lang="th-TH">
                 <a:solidFill>
                   <a:srgbClr val="FFFFFF"/>
                 </a:solidFill>
                 <a:latin typeface="Tahoma"/>
-              </a:defRPr>
-            </a:pPr>
-            <a:r>
+                <a:ea typeface="Tahoma"/>
+                <a:cs typeface="Tahoma"/>
+              </a:defRPr>
+            </a:pPr>
+            <a:r>
+              <a:rPr lang="th-TH">
+                <a:latin typeface="Tahoma"/>
+                <a:ea typeface="Tahoma"/>
+                <a:cs typeface="Tahoma"/>
+              </a:rPr>
               <a:t>ก๊าซ / VOC / กลิ่น</a:t>
             </a:r>
           </a:p>
@@ -11202,14 +13277,21 @@
               <a:spcAft>
                 <a:spcPts val="400"/>
               </a:spcAft>
-              <a:defRPr sz="1200" b="0">
+              <a:defRPr sz="1200" b="0" lang="th-TH">
                 <a:solidFill>
                   <a:srgbClr val="FFFFFF"/>
                 </a:solidFill>
                 <a:latin typeface="Tahoma"/>
-              </a:defRPr>
-            </a:pPr>
-            <a:r>
+                <a:ea typeface="Tahoma"/>
+                <a:cs typeface="Tahoma"/>
+              </a:defRPr>
+            </a:pPr>
+            <a:r>
+              <a:rPr lang="th-TH">
+                <a:latin typeface="Tahoma"/>
+                <a:ea typeface="Tahoma"/>
+                <a:cs typeface="Tahoma"/>
+              </a:rPr>
               <a:t>แนวคิดต่อยอด</a:t>
             </a:r>
           </a:p>
@@ -11284,14 +13366,21 @@
               <a:spcAft>
                 <a:spcPts val="400"/>
               </a:spcAft>
-              <a:defRPr sz="2400" b="1">
+              <a:defRPr sz="2400" b="1" lang="th-TH">
                 <a:solidFill>
                   <a:srgbClr val="FFFFFF"/>
                 </a:solidFill>
                 <a:latin typeface="Tahoma"/>
-              </a:defRPr>
-            </a:pPr>
-            <a:r>
+                <a:ea typeface="Tahoma"/>
+                <a:cs typeface="Tahoma"/>
+              </a:defRPr>
+            </a:pPr>
+            <a:r>
+              <a:rPr lang="th-TH">
+                <a:latin typeface="Tahoma"/>
+                <a:ea typeface="Tahoma"/>
+                <a:cs typeface="Tahoma"/>
+              </a:rPr>
               <a:t>e-Skin</a:t>
             </a:r>
           </a:p>
@@ -11323,14 +13412,21 @@
               <a:spcAft>
                 <a:spcPts val="400"/>
               </a:spcAft>
-              <a:defRPr sz="1600" b="0">
+              <a:defRPr sz="1600" b="0" lang="th-TH">
                 <a:solidFill>
                   <a:srgbClr val="FFFFFF"/>
                 </a:solidFill>
                 <a:latin typeface="Tahoma"/>
-              </a:defRPr>
-            </a:pPr>
-            <a:r>
+                <a:ea typeface="Tahoma"/>
+                <a:cs typeface="Tahoma"/>
+              </a:defRPr>
+            </a:pPr>
+            <a:r>
+              <a:rPr lang="th-TH">
+                <a:latin typeface="Tahoma"/>
+                <a:ea typeface="Tahoma"/>
+                <a:cs typeface="Tahoma"/>
+              </a:rPr>
               <a:t>น้ำหนัก / แรงสัมผัส</a:t>
             </a:r>
           </a:p>
@@ -11362,14 +13458,21 @@
               <a:spcAft>
                 <a:spcPts val="400"/>
               </a:spcAft>
-              <a:defRPr sz="1200" b="0">
+              <a:defRPr sz="1200" b="0" lang="th-TH">
                 <a:solidFill>
                   <a:srgbClr val="FFFFFF"/>
                 </a:solidFill>
                 <a:latin typeface="Tahoma"/>
-              </a:defRPr>
-            </a:pPr>
-            <a:r>
+                <a:ea typeface="Tahoma"/>
+                <a:cs typeface="Tahoma"/>
+              </a:defRPr>
+            </a:pPr>
+            <a:r>
+              <a:rPr lang="th-TH">
+                <a:latin typeface="Tahoma"/>
+                <a:ea typeface="Tahoma"/>
+                <a:cs typeface="Tahoma"/>
+              </a:rPr>
               <a:t>แนวคิดต่อยอด</a:t>
             </a:r>
           </a:p>
@@ -11401,14 +13504,21 @@
               <a:spcAft>
                 <a:spcPts val="400"/>
               </a:spcAft>
-              <a:defRPr sz="2000" b="1">
+              <a:defRPr sz="2000" b="1" lang="th-TH">
                 <a:solidFill>
                   <a:srgbClr val="1D2A5D"/>
                 </a:solidFill>
                 <a:latin typeface="Tahoma"/>
-              </a:defRPr>
-            </a:pPr>
-            <a:r>
+                <a:ea typeface="Tahoma"/>
+                <a:cs typeface="Tahoma"/>
+              </a:defRPr>
+            </a:pPr>
+            <a:r>
+              <a:rPr lang="th-TH">
+                <a:latin typeface="Tahoma"/>
+                <a:ea typeface="Tahoma"/>
+                <a:cs typeface="Tahoma"/>
+              </a:rPr>
               <a:t>การศึกษาระยะนี้ใช้ e-Eye เป็นจุดเริ่มต้นของระบบรวม ไม่ได้เปลี่ยนชื่อหรือขอบเขตแนวคิดของทั้งโครงงาน</a:t>
             </a:r>
           </a:p>
@@ -11466,14 +13576,21 @@
               <a:spcAft>
                 <a:spcPts val="400"/>
               </a:spcAft>
-              <a:defRPr sz="2800" b="1">
+              <a:defRPr sz="2800" b="1" lang="th-TH">
                 <a:solidFill>
                   <a:srgbClr val="1D2A5D"/>
                 </a:solidFill>
                 <a:latin typeface="Tahoma"/>
-              </a:defRPr>
-            </a:pPr>
-            <a:r>
+                <a:ea typeface="Tahoma"/>
+                <a:cs typeface="Tahoma"/>
+              </a:defRPr>
+            </a:pPr>
+            <a:r>
+              <a:rPr lang="th-TH">
+                <a:latin typeface="Tahoma"/>
+                <a:ea typeface="Tahoma"/>
+                <a:cs typeface="Tahoma"/>
+              </a:rPr>
               <a:t>วัตถุประสงค์และขอบเขต</a:t>
             </a:r>
           </a:p>
@@ -11505,14 +13622,21 @@
               <a:spcAft>
                 <a:spcPts val="400"/>
               </a:spcAft>
-              <a:defRPr sz="1500" b="0">
+              <a:defRPr sz="1500" b="0" lang="th-TH">
                 <a:solidFill>
                   <a:srgbClr val="576975"/>
                 </a:solidFill>
                 <a:latin typeface="Tahoma"/>
-              </a:defRPr>
-            </a:pPr>
-            <a:r>
+                <a:ea typeface="Tahoma"/>
+                <a:cs typeface="Tahoma"/>
+              </a:defRPr>
+            </a:pPr>
+            <a:r>
+              <a:rPr lang="th-TH">
+                <a:latin typeface="Tahoma"/>
+                <a:ea typeface="Tahoma"/>
+                <a:cs typeface="Tahoma"/>
+              </a:rPr>
               <a:t>แยกเป้าหมายของโครงงานออกจากสิ่งที่ทดลองแล้ว</a:t>
             </a:r>
           </a:p>
@@ -11579,14 +13703,21 @@
               <a:spcAft>
                 <a:spcPts val="400"/>
               </a:spcAft>
-              <a:defRPr sz="900" b="0">
+              <a:defRPr sz="900" b="0" lang="th-TH">
                 <a:solidFill>
                   <a:srgbClr val="576975"/>
                 </a:solidFill>
                 <a:latin typeface="Tahoma"/>
-              </a:defRPr>
-            </a:pPr>
-            <a:r>
+                <a:ea typeface="Tahoma"/>
+                <a:cs typeface="Tahoma"/>
+              </a:defRPr>
+            </a:pPr>
+            <a:r>
+              <a:rPr lang="th-TH">
+                <a:latin typeface="Tahoma"/>
+                <a:ea typeface="Tahoma"/>
+                <a:cs typeface="Tahoma"/>
+              </a:rPr>
               <a:t>โครงงานคอมพิวเตอร์ | รายงานความก้าวหน้า | 18 ต.ค. 2569</a:t>
             </a:r>
           </a:p>
@@ -11618,14 +13749,21 @@
               <a:spcAft>
                 <a:spcPts val="400"/>
               </a:spcAft>
-              <a:defRPr sz="900" b="0">
+              <a:defRPr sz="900" b="0" lang="th-TH">
                 <a:solidFill>
                   <a:srgbClr val="576975"/>
                 </a:solidFill>
                 <a:latin typeface="Tahoma"/>
-              </a:defRPr>
-            </a:pPr>
-            <a:r>
+                <a:ea typeface="Tahoma"/>
+                <a:cs typeface="Tahoma"/>
+              </a:defRPr>
+            </a:pPr>
+            <a:r>
+              <a:rPr lang="th-TH">
+                <a:latin typeface="Tahoma"/>
+                <a:ea typeface="Tahoma"/>
+                <a:cs typeface="Tahoma"/>
+              </a:rPr>
               <a:t>4</a:t>
             </a:r>
           </a:p>
@@ -11743,14 +13881,21 @@
               <a:spcAft>
                 <a:spcPts val="400"/>
               </a:spcAft>
-              <a:defRPr sz="2200" b="1">
+              <a:defRPr sz="2200" b="1" lang="th-TH">
                 <a:solidFill>
                   <a:srgbClr val="1D2A5D"/>
                 </a:solidFill>
                 <a:latin typeface="Tahoma"/>
-              </a:defRPr>
-            </a:pPr>
-            <a:r>
+                <a:ea typeface="Tahoma"/>
+                <a:cs typeface="Tahoma"/>
+              </a:defRPr>
+            </a:pPr>
+            <a:r>
+              <a:rPr lang="th-TH">
+                <a:latin typeface="Tahoma"/>
+                <a:ea typeface="Tahoma"/>
+                <a:cs typeface="Tahoma"/>
+              </a:rPr>
               <a:t>เป้าหมายของโครงงาน</a:t>
             </a:r>
           </a:p>
@@ -11782,14 +13927,21 @@
               <a:spcAft>
                 <a:spcPts val="400"/>
               </a:spcAft>
-              <a:defRPr sz="1700" b="0">
+              <a:defRPr sz="1700" b="0" lang="th-TH">
                 <a:solidFill>
                   <a:srgbClr val="1D2F3E"/>
                 </a:solidFill>
                 <a:latin typeface="Tahoma"/>
-              </a:defRPr>
-            </a:pPr>
-            <a:r>
+                <a:ea typeface="Tahoma"/>
+                <a:cs typeface="Tahoma"/>
+              </a:defRPr>
+            </a:pPr>
+            <a:r>
+              <a:rPr lang="th-TH">
+                <a:latin typeface="Tahoma"/>
+                <a:ea typeface="Tahoma"/>
+                <a:cs typeface="Tahoma"/>
+              </a:rPr>
               <a:t>1  ออกแบบสถาปัตยกรรม e-Senses และ pipeline ในบ้าน</a:t>
             </a:r>
           </a:p>
@@ -11798,14 +13950,21 @@
               <a:spcAft>
                 <a:spcPts val="400"/>
               </a:spcAft>
-              <a:defRPr sz="1700" b="0">
+              <a:defRPr sz="1700" b="0" lang="th-TH">
                 <a:solidFill>
                   <a:srgbClr val="1D2F3E"/>
                 </a:solidFill>
                 <a:latin typeface="Tahoma"/>
-              </a:defRPr>
-            </a:pPr>
-            <a:r>
+                <a:ea typeface="Tahoma"/>
+                <a:cs typeface="Tahoma"/>
+              </a:defRPr>
+            </a:pPr>
+            <a:r>
+              <a:rPr lang="th-TH">
+                <a:latin typeface="Tahoma"/>
+                <a:ea typeface="Tahoma"/>
+                <a:cs typeface="Tahoma"/>
+              </a:rPr>
               <a:t>2  สกัดข้อมูลใบซื้อสินค้าเป็น JSON ที่ตรวจสอบได้</a:t>
             </a:r>
           </a:p>
@@ -11814,14 +13973,21 @@
               <a:spcAft>
                 <a:spcPts val="400"/>
               </a:spcAft>
-              <a:defRPr sz="1700" b="0">
+              <a:defRPr sz="1700" b="0" lang="th-TH">
                 <a:solidFill>
                   <a:srgbClr val="1D2F3E"/>
                 </a:solidFill>
                 <a:latin typeface="Tahoma"/>
-              </a:defRPr>
-            </a:pPr>
-            <a:r>
+                <a:ea typeface="Tahoma"/>
+                <a:cs typeface="Tahoma"/>
+              </a:defRPr>
+            </a:pPr>
+            <a:r>
+              <a:rPr lang="th-TH">
+                <a:latin typeface="Tahoma"/>
+                <a:ea typeface="Tahoma"/>
+                <a:cs typeface="Tahoma"/>
+              </a:rPr>
               <a:t>3  ประเมินความแม่นยำ เวลา และทรัพยากรบน PC ก่อนย้ายสู่อุปกรณ์</a:t>
             </a:r>
           </a:p>
@@ -11830,14 +13996,21 @@
               <a:spcAft>
                 <a:spcPts val="400"/>
               </a:spcAft>
-              <a:defRPr sz="1700" b="0">
+              <a:defRPr sz="1700" b="0" lang="th-TH">
                 <a:solidFill>
                   <a:srgbClr val="1D2F3E"/>
                 </a:solidFill>
                 <a:latin typeface="Tahoma"/>
-              </a:defRPr>
-            </a:pPr>
-            <a:r>
+                <a:ea typeface="Tahoma"/>
+                <a:cs typeface="Tahoma"/>
+              </a:defRPr>
+            </a:pPr>
+            <a:r>
+              <a:rPr lang="th-TH">
+                <a:latin typeface="Tahoma"/>
+                <a:ea typeface="Tahoma"/>
+                <a:cs typeface="Tahoma"/>
+              </a:rPr>
               <a:t>4  ส่งต่อข้อมูลสู่ระบบบ้านอัจฉริยะและวิเคราะห์การใช้เมื่อมีข้อมูลเพียงพอ</a:t>
             </a:r>
           </a:p>
@@ -11869,14 +14042,21 @@
               <a:spcAft>
                 <a:spcPts val="400"/>
               </a:spcAft>
-              <a:defRPr sz="2200" b="1">
+              <a:defRPr sz="2200" b="1" lang="th-TH">
                 <a:solidFill>
                   <a:srgbClr val="006289"/>
                 </a:solidFill>
                 <a:latin typeface="Tahoma"/>
-              </a:defRPr>
-            </a:pPr>
-            <a:r>
+                <a:ea typeface="Tahoma"/>
+                <a:cs typeface="Tahoma"/>
+              </a:defRPr>
+            </a:pPr>
+            <a:r>
+              <a:rPr lang="th-TH">
+                <a:latin typeface="Tahoma"/>
+                <a:ea typeface="Tahoma"/>
+                <a:cs typeface="Tahoma"/>
+              </a:rPr>
               <a:t>ขอบเขตผลที่มีแล้ว</a:t>
             </a:r>
           </a:p>
@@ -11908,14 +14088,21 @@
               <a:spcAft>
                 <a:spcPts val="400"/>
               </a:spcAft>
-              <a:defRPr sz="1800" b="0">
+              <a:defRPr sz="1800" b="0" lang="th-TH">
                 <a:solidFill>
                   <a:srgbClr val="1D2F3E"/>
                 </a:solidFill>
                 <a:latin typeface="Tahoma"/>
-              </a:defRPr>
-            </a:pPr>
-            <a:r>
+                <a:ea typeface="Tahoma"/>
+                <a:cs typeface="Tahoma"/>
+              </a:defRPr>
+            </a:pPr>
+            <a:r>
+              <a:rPr lang="th-TH">
+                <a:latin typeface="Tahoma"/>
+                <a:ea typeface="Tahoma"/>
+                <a:cs typeface="Tahoma"/>
+              </a:rPr>
               <a:t>ภาพจริงและ EDA</a:t>
             </a:r>
           </a:p>
@@ -11924,14 +14111,21 @@
               <a:spcAft>
                 <a:spcPts val="400"/>
               </a:spcAft>
-              <a:defRPr sz="1800" b="0">
+              <a:defRPr sz="1800" b="0" lang="th-TH">
                 <a:solidFill>
                   <a:srgbClr val="1D2F3E"/>
                 </a:solidFill>
                 <a:latin typeface="Tahoma"/>
-              </a:defRPr>
-            </a:pPr>
-            <a:r>
+                <a:ea typeface="Tahoma"/>
+                <a:cs typeface="Tahoma"/>
+              </a:defRPr>
+            </a:pPr>
+            <a:r>
+              <a:rPr lang="th-TH">
+                <a:latin typeface="Tahoma"/>
+                <a:ea typeface="Tahoma"/>
+                <a:cs typeface="Tahoma"/>
+              </a:rPr>
               <a:t>YOLOv8n ตรวจกรอบเอกสารบน PC CPU</a:t>
             </a:r>
           </a:p>
@@ -11940,14 +14134,21 @@
               <a:spcAft>
                 <a:spcPts val="400"/>
               </a:spcAft>
-              <a:defRPr sz="1800" b="0">
+              <a:defRPr sz="1800" b="0" lang="th-TH">
                 <a:solidFill>
                   <a:srgbClr val="1D2F3E"/>
                 </a:solidFill>
                 <a:latin typeface="Tahoma"/>
-              </a:defRPr>
-            </a:pPr>
-            <a:r>
+                <a:ea typeface="Tahoma"/>
+                <a:cs typeface="Tahoma"/>
+              </a:defRPr>
+            </a:pPr>
+            <a:r>
+              <a:rPr lang="th-TH">
+                <a:latin typeface="Tahoma"/>
+                <a:ea typeface="Tahoma"/>
+                <a:cs typeface="Tahoma"/>
+              </a:rPr>
               <a:t>OCR spot-check 3 ภาพ</a:t>
             </a:r>
           </a:p>
@@ -11956,14 +14157,21 @@
               <a:spcAft>
                 <a:spcPts val="400"/>
               </a:spcAft>
-              <a:defRPr sz="1800" b="0">
+              <a:defRPr sz="1800" b="0" lang="th-TH">
                 <a:solidFill>
                   <a:srgbClr val="1D2F3E"/>
                 </a:solidFill>
                 <a:latin typeface="Tahoma"/>
-              </a:defRPr>
-            </a:pPr>
-            <a:r>
+                <a:ea typeface="Tahoma"/>
+                <a:cs typeface="Tahoma"/>
+              </a:defRPr>
+            </a:pPr>
+            <a:r>
+              <a:rPr lang="th-TH">
+                <a:latin typeface="Tahoma"/>
+                <a:ea typeface="Tahoma"/>
+                <a:cs typeface="Tahoma"/>
+              </a:rPr>
               <a:t>แปลง ONNX เป็น RKNN และรันผ่าน SDK บน PC</a:t>
             </a:r>
           </a:p>
@@ -12038,14 +14246,21 @@
               <a:spcAft>
                 <a:spcPts val="400"/>
               </a:spcAft>
-              <a:defRPr sz="1300" b="1">
+              <a:defRPr sz="1300" b="1" lang="th-TH">
                 <a:solidFill>
                   <a:srgbClr val="FFFFFF"/>
                 </a:solidFill>
                 <a:latin typeface="Tahoma"/>
-              </a:defRPr>
-            </a:pPr>
-            <a:r>
+                <a:ea typeface="Tahoma"/>
+                <a:cs typeface="Tahoma"/>
+              </a:defRPr>
+            </a:pPr>
+            <a:r>
+              <a:rPr lang="th-TH">
+                <a:latin typeface="Tahoma"/>
+                <a:ea typeface="Tahoma"/>
+                <a:cs typeface="Tahoma"/>
+              </a:rPr>
               <a:t>ยังไม่มีผล NPU จริงหรือ JSON/LLM</a:t>
             </a:r>
           </a:p>
@@ -12103,14 +14318,21 @@
               <a:spcAft>
                 <a:spcPts val="400"/>
               </a:spcAft>
-              <a:defRPr sz="2800" b="1">
+              <a:defRPr sz="2800" b="1" lang="th-TH">
                 <a:solidFill>
                   <a:srgbClr val="1D2A5D"/>
                 </a:solidFill>
                 <a:latin typeface="Tahoma"/>
-              </a:defRPr>
-            </a:pPr>
-            <a:r>
+                <a:ea typeface="Tahoma"/>
+                <a:cs typeface="Tahoma"/>
+              </a:defRPr>
+            </a:pPr>
+            <a:r>
+              <a:rPr lang="th-TH">
+                <a:latin typeface="Tahoma"/>
+                <a:ea typeface="Tahoma"/>
+                <a:cs typeface="Tahoma"/>
+              </a:rPr>
               <a:t>ฐานวิชาการ: คัดกรองวรรณกรรมก่อนออกแบบ</a:t>
             </a:r>
           </a:p>
@@ -12142,14 +14364,21 @@
               <a:spcAft>
                 <a:spcPts val="400"/>
               </a:spcAft>
-              <a:defRPr sz="1500" b="0">
+              <a:defRPr sz="1500" b="0" lang="th-TH">
                 <a:solidFill>
                   <a:srgbClr val="576975"/>
                 </a:solidFill>
                 <a:latin typeface="Tahoma"/>
-              </a:defRPr>
-            </a:pPr>
-            <a:r>
+                <a:ea typeface="Tahoma"/>
+                <a:cs typeface="Tahoma"/>
+              </a:defRPr>
+            </a:pPr>
+            <a:r>
+              <a:rPr lang="th-TH">
+                <a:latin typeface="Tahoma"/>
+                <a:ea typeface="Tahoma"/>
+                <a:cs typeface="Tahoma"/>
+              </a:rPr>
               <a:t>รายงานทบทวนวรรณกรรม 32 หน้าเป็นฐานของสถาปัตยกรรมและคำถามวิจัย</a:t>
             </a:r>
           </a:p>
@@ -12216,14 +14445,21 @@
               <a:spcAft>
                 <a:spcPts val="400"/>
               </a:spcAft>
-              <a:defRPr sz="900" b="0">
+              <a:defRPr sz="900" b="0" lang="th-TH">
                 <a:solidFill>
                   <a:srgbClr val="576975"/>
                 </a:solidFill>
                 <a:latin typeface="Tahoma"/>
-              </a:defRPr>
-            </a:pPr>
-            <a:r>
+                <a:ea typeface="Tahoma"/>
+                <a:cs typeface="Tahoma"/>
+              </a:defRPr>
+            </a:pPr>
+            <a:r>
+              <a:rPr lang="th-TH">
+                <a:latin typeface="Tahoma"/>
+                <a:ea typeface="Tahoma"/>
+                <a:cs typeface="Tahoma"/>
+              </a:rPr>
               <a:t>โครงงานคอมพิวเตอร์ | รายงานความก้าวหน้า | 18 ต.ค. 2569</a:t>
             </a:r>
           </a:p>
@@ -12255,14 +14491,21 @@
               <a:spcAft>
                 <a:spcPts val="400"/>
               </a:spcAft>
-              <a:defRPr sz="900" b="0">
+              <a:defRPr sz="900" b="0" lang="th-TH">
                 <a:solidFill>
                   <a:srgbClr val="576975"/>
                 </a:solidFill>
                 <a:latin typeface="Tahoma"/>
-              </a:defRPr>
-            </a:pPr>
-            <a:r>
+                <a:ea typeface="Tahoma"/>
+                <a:cs typeface="Tahoma"/>
+              </a:defRPr>
+            </a:pPr>
+            <a:r>
+              <a:rPr lang="th-TH">
+                <a:latin typeface="Tahoma"/>
+                <a:ea typeface="Tahoma"/>
+                <a:cs typeface="Tahoma"/>
+              </a:rPr>
               <a:t>5</a:t>
             </a:r>
           </a:p>
@@ -12337,14 +14580,21 @@
               <a:spcAft>
                 <a:spcPts val="400"/>
               </a:spcAft>
-              <a:defRPr sz="2300" b="1">
+              <a:defRPr sz="2300" b="1" lang="th-TH">
                 <a:solidFill>
                   <a:srgbClr val="FFFFFF"/>
                 </a:solidFill>
                 <a:latin typeface="Tahoma"/>
-              </a:defRPr>
-            </a:pPr>
-            <a:r>
+                <a:ea typeface="Tahoma"/>
+                <a:cs typeface="Tahoma"/>
+              </a:defRPr>
+            </a:pPr>
+            <a:r>
+              <a:rPr lang="th-TH">
+                <a:latin typeface="Tahoma"/>
+                <a:ea typeface="Tahoma"/>
+                <a:cs typeface="Tahoma"/>
+              </a:rPr>
               <a:t>57</a:t>
             </a:r>
           </a:p>
@@ -12376,14 +14626,21 @@
               <a:spcAft>
                 <a:spcPts val="400"/>
               </a:spcAft>
-              <a:defRPr sz="1700" b="1">
+              <a:defRPr sz="1700" b="1" lang="th-TH">
                 <a:solidFill>
                   <a:srgbClr val="FFFFFF"/>
                 </a:solidFill>
                 <a:latin typeface="Tahoma"/>
-              </a:defRPr>
-            </a:pPr>
-            <a:r>
+                <a:ea typeface="Tahoma"/>
+                <a:cs typeface="Tahoma"/>
+              </a:defRPr>
+            </a:pPr>
+            <a:r>
+              <a:rPr lang="th-TH">
+                <a:latin typeface="Tahoma"/>
+                <a:ea typeface="Tahoma"/>
+                <a:cs typeface="Tahoma"/>
+              </a:rPr>
               <a:t>ค้นพบและติดแท็ก</a:t>
             </a:r>
           </a:p>
@@ -12458,14 +14715,21 @@
               <a:spcAft>
                 <a:spcPts val="400"/>
               </a:spcAft>
-              <a:defRPr sz="2300" b="1">
+              <a:defRPr sz="2300" b="1" lang="th-TH">
                 <a:solidFill>
                   <a:srgbClr val="FFFFFF"/>
                 </a:solidFill>
                 <a:latin typeface="Tahoma"/>
-              </a:defRPr>
-            </a:pPr>
-            <a:r>
+                <a:ea typeface="Tahoma"/>
+                <a:cs typeface="Tahoma"/>
+              </a:defRPr>
+            </a:pPr>
+            <a:r>
+              <a:rPr lang="th-TH">
+                <a:latin typeface="Tahoma"/>
+                <a:ea typeface="Tahoma"/>
+                <a:cs typeface="Tahoma"/>
+              </a:rPr>
               <a:t>37</a:t>
             </a:r>
           </a:p>
@@ -12497,14 +14761,21 @@
               <a:spcAft>
                 <a:spcPts val="400"/>
               </a:spcAft>
-              <a:defRPr sz="1700" b="1">
+              <a:defRPr sz="1700" b="1" lang="th-TH">
                 <a:solidFill>
                   <a:srgbClr val="FFFFFF"/>
                 </a:solidFill>
                 <a:latin typeface="Tahoma"/>
-              </a:defRPr>
-            </a:pPr>
-            <a:r>
+                <a:ea typeface="Tahoma"/>
+                <a:cs typeface="Tahoma"/>
+              </a:defRPr>
+            </a:pPr>
+            <a:r>
+              <a:rPr lang="th-TH">
+                <a:latin typeface="Tahoma"/>
+                <a:ea typeface="Tahoma"/>
+                <a:cs typeface="Tahoma"/>
+              </a:rPr>
               <a:t>สถานะ Scopus เบื้องต้น</a:t>
             </a:r>
           </a:p>
@@ -12579,14 +14850,21 @@
               <a:spcAft>
                 <a:spcPts val="400"/>
               </a:spcAft>
-              <a:defRPr sz="2300" b="1">
+              <a:defRPr sz="2300" b="1" lang="th-TH">
                 <a:solidFill>
                   <a:srgbClr val="FFFFFF"/>
                 </a:solidFill>
                 <a:latin typeface="Tahoma"/>
-              </a:defRPr>
-            </a:pPr>
-            <a:r>
+                <a:ea typeface="Tahoma"/>
+                <a:cs typeface="Tahoma"/>
+              </a:defRPr>
+            </a:pPr>
+            <a:r>
+              <a:rPr lang="th-TH">
+                <a:latin typeface="Tahoma"/>
+                <a:ea typeface="Tahoma"/>
+                <a:cs typeface="Tahoma"/>
+              </a:rPr>
               <a:t>35</a:t>
             </a:r>
           </a:p>
@@ -12618,14 +14896,21 @@
               <a:spcAft>
                 <a:spcPts val="400"/>
               </a:spcAft>
-              <a:defRPr sz="1700" b="1">
+              <a:defRPr sz="1700" b="1" lang="th-TH">
                 <a:solidFill>
                   <a:srgbClr val="FFFFFF"/>
                 </a:solidFill>
                 <a:latin typeface="Tahoma"/>
-              </a:defRPr>
-            </a:pPr>
-            <a:r>
+                <a:ea typeface="Tahoma"/>
+                <a:cs typeface="Tahoma"/>
+              </a:defRPr>
+            </a:pPr>
+            <a:r>
+              <a:rPr lang="th-TH">
+                <a:latin typeface="Tahoma"/>
+                <a:ea typeface="Tahoma"/>
+                <a:cs typeface="Tahoma"/>
+              </a:rPr>
               <a:t>คงไว้หลังตรวจซ้ำ (มีข้อสงวน 1)</a:t>
             </a:r>
           </a:p>
@@ -12700,14 +14985,21 @@
               <a:spcAft>
                 <a:spcPts val="400"/>
               </a:spcAft>
-              <a:defRPr sz="2300" b="1">
+              <a:defRPr sz="2300" b="1" lang="th-TH">
                 <a:solidFill>
                   <a:srgbClr val="FFFFFF"/>
                 </a:solidFill>
                 <a:latin typeface="Tahoma"/>
-              </a:defRPr>
-            </a:pPr>
-            <a:r>
+                <a:ea typeface="Tahoma"/>
+                <a:cs typeface="Tahoma"/>
+              </a:defRPr>
+            </a:pPr>
+            <a:r>
+              <a:rPr lang="th-TH">
+                <a:latin typeface="Tahoma"/>
+                <a:ea typeface="Tahoma"/>
+                <a:cs typeface="Tahoma"/>
+              </a:rPr>
               <a:t>12</a:t>
             </a:r>
           </a:p>
@@ -12739,14 +15031,21 @@
               <a:spcAft>
                 <a:spcPts val="400"/>
               </a:spcAft>
-              <a:defRPr sz="1700" b="1">
+              <a:defRPr sz="1700" b="1" lang="th-TH">
                 <a:solidFill>
                   <a:srgbClr val="FFFFFF"/>
                 </a:solidFill>
                 <a:latin typeface="Tahoma"/>
-              </a:defRPr>
-            </a:pPr>
-            <a:r>
+                <a:ea typeface="Tahoma"/>
+                <a:cs typeface="Tahoma"/>
+              </a:defRPr>
+            </a:pPr>
+            <a:r>
+              <a:rPr lang="th-TH">
+                <a:latin typeface="Tahoma"/>
+                <a:ea typeface="Tahoma"/>
+                <a:cs typeface="Tahoma"/>
+              </a:rPr>
               <a:t>ใช้สังเคราะห์ในรายงาน</a:t>
             </a:r>
           </a:p>
@@ -12778,14 +15077,21 @@
               <a:spcAft>
                 <a:spcPts val="400"/>
               </a:spcAft>
-              <a:defRPr sz="1600" b="0">
+              <a:defRPr sz="1600" b="0" lang="th-TH">
                 <a:solidFill>
                   <a:srgbClr val="576975"/>
                 </a:solidFill>
                 <a:latin typeface="Tahoma"/>
-              </a:defRPr>
-            </a:pPr>
-            <a:r>
+                <a:ea typeface="Tahoma"/>
+                <a:cs typeface="Tahoma"/>
+              </a:defRPr>
+            </a:pPr>
+            <a:r>
+              <a:rPr lang="th-TH">
+                <a:latin typeface="Tahoma"/>
+                <a:ea typeface="Tahoma"/>
+                <a:cs typeface="Tahoma"/>
+              </a:rPr>
               <a:t>บทความ 12 ฉบับรวม P5 ที่ใช้สนับสนุนข้ามศาสตร์; อีก 11 ฉบับอยู่ในกรอบสามมิติ</a:t>
             </a:r>
           </a:p>
@@ -12843,14 +15149,21 @@
               <a:spcAft>
                 <a:spcPts val="400"/>
               </a:spcAft>
-              <a:defRPr sz="2800" b="1">
+              <a:defRPr sz="2800" b="1" lang="th-TH">
                 <a:solidFill>
                   <a:srgbClr val="1D2A5D"/>
                 </a:solidFill>
                 <a:latin typeface="Tahoma"/>
-              </a:defRPr>
-            </a:pPr>
-            <a:r>
+                <a:ea typeface="Tahoma"/>
+                <a:cs typeface="Tahoma"/>
+              </a:defRPr>
+            </a:pPr>
+            <a:r>
+              <a:rPr lang="th-TH">
+                <a:latin typeface="Tahoma"/>
+                <a:ea typeface="Tahoma"/>
+                <a:cs typeface="Tahoma"/>
+              </a:rPr>
               <a:t>3 มิติของกรอบ Performance Trade-off</a:t>
             </a:r>
           </a:p>
@@ -12882,14 +15195,21 @@
               <a:spcAft>
                 <a:spcPts val="400"/>
               </a:spcAft>
-              <a:defRPr sz="1500" b="0">
+              <a:defRPr sz="1500" b="0" lang="th-TH">
                 <a:solidFill>
                   <a:srgbClr val="576975"/>
                 </a:solidFill>
                 <a:latin typeface="Tahoma"/>
-              </a:defRPr>
-            </a:pPr>
-            <a:r>
+                <a:ea typeface="Tahoma"/>
+                <a:cs typeface="Tahoma"/>
+              </a:defRPr>
+            </a:pPr>
+            <a:r>
+              <a:rPr lang="th-TH">
+                <a:latin typeface="Tahoma"/>
+                <a:ea typeface="Tahoma"/>
+                <a:cs typeface="Tahoma"/>
+              </a:rPr>
               <a:t>ข้อสรุปจากงานทบทวน ใช้กำหนดตัวแปรและตัววัดของการทดลอง</a:t>
             </a:r>
           </a:p>
@@ -12956,14 +15276,21 @@
               <a:spcAft>
                 <a:spcPts val="400"/>
               </a:spcAft>
-              <a:defRPr sz="900" b="0">
+              <a:defRPr sz="900" b="0" lang="th-TH">
                 <a:solidFill>
                   <a:srgbClr val="576975"/>
                 </a:solidFill>
                 <a:latin typeface="Tahoma"/>
-              </a:defRPr>
-            </a:pPr>
-            <a:r>
+                <a:ea typeface="Tahoma"/>
+                <a:cs typeface="Tahoma"/>
+              </a:defRPr>
+            </a:pPr>
+            <a:r>
+              <a:rPr lang="th-TH">
+                <a:latin typeface="Tahoma"/>
+                <a:ea typeface="Tahoma"/>
+                <a:cs typeface="Tahoma"/>
+              </a:rPr>
               <a:t>โครงงานคอมพิวเตอร์ | รายงานความก้าวหน้า | 18 ต.ค. 2569</a:t>
             </a:r>
           </a:p>
@@ -12995,14 +15322,21 @@
               <a:spcAft>
                 <a:spcPts val="400"/>
               </a:spcAft>
-              <a:defRPr sz="900" b="0">
+              <a:defRPr sz="900" b="0" lang="th-TH">
                 <a:solidFill>
                   <a:srgbClr val="576975"/>
                 </a:solidFill>
                 <a:latin typeface="Tahoma"/>
-              </a:defRPr>
-            </a:pPr>
-            <a:r>
+                <a:ea typeface="Tahoma"/>
+                <a:cs typeface="Tahoma"/>
+              </a:defRPr>
+            </a:pPr>
+            <a:r>
+              <a:rPr lang="th-TH">
+                <a:latin typeface="Tahoma"/>
+                <a:ea typeface="Tahoma"/>
+                <a:cs typeface="Tahoma"/>
+              </a:rPr>
               <a:t>6</a:t>
             </a:r>
           </a:p>
@@ -13120,14 +15454,21 @@
               <a:spcAft>
                 <a:spcPts val="400"/>
               </a:spcAft>
-              <a:defRPr sz="2000" b="1">
+              <a:defRPr sz="2000" b="1" lang="th-TH">
                 <a:solidFill>
                   <a:srgbClr val="1D2A5D"/>
                 </a:solidFill>
                 <a:latin typeface="Tahoma"/>
-              </a:defRPr>
-            </a:pPr>
-            <a:r>
+                <a:ea typeface="Tahoma"/>
+                <a:cs typeface="Tahoma"/>
+              </a:defRPr>
+            </a:pPr>
+            <a:r>
+              <a:rPr lang="th-TH">
+                <a:latin typeface="Tahoma"/>
+                <a:ea typeface="Tahoma"/>
+                <a:cs typeface="Tahoma"/>
+              </a:rPr>
               <a:t>Quantization / Hardware</a:t>
             </a:r>
           </a:p>
@@ -13159,14 +15500,21 @@
               <a:spcAft>
                 <a:spcPts val="400"/>
               </a:spcAft>
-              <a:defRPr sz="1700" b="0">
+              <a:defRPr sz="1700" b="0" lang="th-TH">
                 <a:solidFill>
                   <a:srgbClr val="1D2F3E"/>
                 </a:solidFill>
                 <a:latin typeface="Tahoma"/>
-              </a:defRPr>
-            </a:pPr>
-            <a:r>
+                <a:ea typeface="Tahoma"/>
+                <a:cs typeface="Tahoma"/>
+              </a:defRPr>
+            </a:pPr>
+            <a:r>
+              <a:rPr lang="th-TH">
+                <a:latin typeface="Tahoma"/>
+                <a:ea typeface="Tahoma"/>
+                <a:cs typeface="Tahoma"/>
+              </a:rPr>
               <a:t>Husom และ Giedra ชี้ให้วัดความถูกต้องคู่กับเวลา RAM และพลังงาน</a:t>
             </a:r>
           </a:p>
@@ -13198,14 +15546,21 @@
               <a:spcAft>
                 <a:spcPts val="400"/>
               </a:spcAft>
-              <a:defRPr sz="1200" b="1">
+              <a:defRPr sz="1200" b="1" lang="th-TH">
                 <a:solidFill>
                   <a:srgbClr val="137E9A"/>
                 </a:solidFill>
                 <a:latin typeface="Tahoma"/>
-              </a:defRPr>
-            </a:pPr>
-            <a:r>
+                <a:ea typeface="Tahoma"/>
+                <a:cs typeface="Tahoma"/>
+              </a:defRPr>
+            </a:pPr>
+            <a:r>
+              <a:rPr lang="th-TH">
+                <a:latin typeface="Tahoma"/>
+                <a:ea typeface="Tahoma"/>
+                <a:cs typeface="Tahoma"/>
+              </a:rPr>
               <a:t>P1–P4, P6, P10</a:t>
             </a:r>
           </a:p>
@@ -13323,14 +15678,21 @@
               <a:spcAft>
                 <a:spcPts val="400"/>
               </a:spcAft>
-              <a:defRPr sz="2000" b="1">
+              <a:defRPr sz="2000" b="1" lang="th-TH">
                 <a:solidFill>
                   <a:srgbClr val="1D2A5D"/>
                 </a:solidFill>
                 <a:latin typeface="Tahoma"/>
-              </a:defRPr>
-            </a:pPr>
-            <a:r>
+                <a:ea typeface="Tahoma"/>
+                <a:cs typeface="Tahoma"/>
+              </a:defRPr>
+            </a:pPr>
+            <a:r>
+              <a:rPr lang="th-TH">
+                <a:latin typeface="Tahoma"/>
+                <a:ea typeface="Tahoma"/>
+                <a:cs typeface="Tahoma"/>
+              </a:rPr>
               <a:t>Structured Output</a:t>
             </a:r>
           </a:p>
@@ -13362,14 +15724,21 @@
               <a:spcAft>
                 <a:spcPts val="400"/>
               </a:spcAft>
-              <a:defRPr sz="1700" b="0">
+              <a:defRPr sz="1700" b="0" lang="th-TH">
                 <a:solidFill>
                   <a:srgbClr val="1D2F3E"/>
                 </a:solidFill>
                 <a:latin typeface="Tahoma"/>
-              </a:defRPr>
-            </a:pPr>
-            <a:r>
+                <a:ea typeface="Tahoma"/>
+                <a:cs typeface="Tahoma"/>
+              </a:defRPr>
+            </a:pPr>
+            <a:r>
+              <a:rPr lang="th-TH">
+                <a:latin typeface="Tahoma"/>
+                <a:ea typeface="Tahoma"/>
+                <a:cs typeface="Tahoma"/>
+              </a:rPr>
               <a:t>SGLang เป็นฐานคิดเรื่อง grammar; ต้องตรวจทั้ง schema และค่าจากใบเสร็จ</a:t>
             </a:r>
           </a:p>
@@ -13401,14 +15770,21 @@
               <a:spcAft>
                 <a:spcPts val="400"/>
               </a:spcAft>
-              <a:defRPr sz="1200" b="1">
+              <a:defRPr sz="1200" b="1" lang="th-TH">
                 <a:solidFill>
                   <a:srgbClr val="137E9A"/>
                 </a:solidFill>
                 <a:latin typeface="Tahoma"/>
-              </a:defRPr>
-            </a:pPr>
-            <a:r>
+                <a:ea typeface="Tahoma"/>
+                <a:cs typeface="Tahoma"/>
+              </a:defRPr>
+            </a:pPr>
+            <a:r>
+              <a:rPr lang="th-TH">
+                <a:latin typeface="Tahoma"/>
+                <a:ea typeface="Tahoma"/>
+                <a:cs typeface="Tahoma"/>
+              </a:rPr>
               <a:t>P8–P9</a:t>
             </a:r>
           </a:p>
@@ -13526,14 +15902,21 @@
               <a:spcAft>
                 <a:spcPts val="400"/>
               </a:spcAft>
-              <a:defRPr sz="2000" b="1">
+              <a:defRPr sz="2000" b="1" lang="th-TH">
                 <a:solidFill>
                   <a:srgbClr val="1D2A5D"/>
                 </a:solidFill>
                 <a:latin typeface="Tahoma"/>
-              </a:defRPr>
-            </a:pPr>
-            <a:r>
+                <a:ea typeface="Tahoma"/>
+                <a:cs typeface="Tahoma"/>
+              </a:defRPr>
+            </a:pPr>
+            <a:r>
+              <a:rPr lang="th-TH">
+                <a:latin typeface="Tahoma"/>
+                <a:ea typeface="Tahoma"/>
+                <a:cs typeface="Tahoma"/>
+              </a:rPr>
               <a:t>Smart Home / IoT</a:t>
             </a:r>
           </a:p>
@@ -13565,14 +15948,21 @@
               <a:spcAft>
                 <a:spcPts val="400"/>
               </a:spcAft>
-              <a:defRPr sz="1700" b="0">
+              <a:defRPr sz="1700" b="0" lang="th-TH">
                 <a:solidFill>
                   <a:srgbClr val="1D2F3E"/>
                 </a:solidFill>
                 <a:latin typeface="Tahoma"/>
-              </a:defRPr>
-            </a:pPr>
-            <a:r>
+                <a:ea typeface="Tahoma"/>
+                <a:cs typeface="Tahoma"/>
+              </a:defRPr>
+            </a:pPr>
+            <a:r>
+              <a:rPr lang="th-TH">
+                <a:latin typeface="Tahoma"/>
+                <a:ea typeface="Tahoma"/>
+                <a:cs typeface="Tahoma"/>
+              </a:rPr>
               <a:t>ESP32/MQTT และอนุกรมเวลาเป็นฐานชั้นปลายน้ำเมื่อมีข้อมูลเพียงพอ</a:t>
             </a:r>
           </a:p>
@@ -13604,14 +15994,21 @@
               <a:spcAft>
                 <a:spcPts val="400"/>
               </a:spcAft>
-              <a:defRPr sz="1200" b="1">
+              <a:defRPr sz="1200" b="1" lang="th-TH">
                 <a:solidFill>
                   <a:srgbClr val="137E9A"/>
                 </a:solidFill>
                 <a:latin typeface="Tahoma"/>
-              </a:defRPr>
-            </a:pPr>
-            <a:r>
+                <a:ea typeface="Tahoma"/>
+                <a:cs typeface="Tahoma"/>
+              </a:defRPr>
+            </a:pPr>
+            <a:r>
+              <a:rPr lang="th-TH">
+                <a:latin typeface="Tahoma"/>
+                <a:ea typeface="Tahoma"/>
+                <a:cs typeface="Tahoma"/>
+              </a:rPr>
               <a:t>P7, P11–P12</a:t>
             </a:r>
           </a:p>
@@ -13643,14 +16040,21 @@
               <a:spcAft>
                 <a:spcPts val="400"/>
               </a:spcAft>
-              <a:defRPr sz="1400" b="0">
+              <a:defRPr sz="1400" b="0" lang="th-TH">
                 <a:solidFill>
                   <a:srgbClr val="576975"/>
                 </a:solidFill>
                 <a:latin typeface="Tahoma"/>
-              </a:defRPr>
-            </a:pPr>
-            <a:r>
+                <a:ea typeface="Tahoma"/>
+                <a:cs typeface="Tahoma"/>
+              </a:defRPr>
+            </a:pPr>
+            <a:r>
+              <a:rPr lang="th-TH">
+                <a:latin typeface="Tahoma"/>
+                <a:ea typeface="Tahoma"/>
+                <a:cs typeface="Tahoma"/>
+              </a:rPr>
               <a:t>ขอบเขตของข้อค้นพบ: เป็นผลการสังเคราะห์ภายในชุดบทความที่คัด ไม่ใช่การพิสูจน์ว่าทั่วโลกไม่มีงานอื่น</a:t>
             </a:r>
           </a:p>
@@ -13682,14 +16086,21 @@
               <a:spcAft>
                 <a:spcPts val="400"/>
               </a:spcAft>
-              <a:defRPr sz="1000" b="0">
+              <a:defRPr sz="1000" b="0" lang="th-TH">
                 <a:solidFill>
                   <a:srgbClr val="576975"/>
                 </a:solidFill>
                 <a:latin typeface="Tahoma"/>
-              </a:defRPr>
-            </a:pPr>
-            <a:r>
+                <a:ea typeface="Tahoma"/>
+                <a:cs typeface="Tahoma"/>
+              </a:defRPr>
+            </a:pPr>
+            <a:r>
+              <a:rPr lang="th-TH">
+                <a:latin typeface="Tahoma"/>
+                <a:ea typeface="Tahoma"/>
+                <a:cs typeface="Tahoma"/>
+              </a:rPr>
               <a:t>ที่มา: Husom et al. (2025), Giedra et al. (2026), Zheng et al. (2024), Sawalha &amp; Al-Naymat (2025), Serepas et al. (2025)</a:t>
             </a:r>
           </a:p>
@@ -13747,14 +16158,21 @@
               <a:spcAft>
                 <a:spcPts val="400"/>
               </a:spcAft>
-              <a:defRPr sz="2800" b="1">
+              <a:defRPr sz="2800" b="1" lang="th-TH">
                 <a:solidFill>
                   <a:srgbClr val="1D2A5D"/>
                 </a:solidFill>
                 <a:latin typeface="Tahoma"/>
-              </a:defRPr>
-            </a:pPr>
-            <a:r>
+                <a:ea typeface="Tahoma"/>
+                <a:cs typeface="Tahoma"/>
+              </a:defRPr>
+            </a:pPr>
+            <a:r>
+              <a:rPr lang="th-TH">
+                <a:latin typeface="Tahoma"/>
+                <a:ea typeface="Tahoma"/>
+                <a:cs typeface="Tahoma"/>
+              </a:rPr>
               <a:t>จุดร่วมและความต่างของงานที่ทบทวน</a:t>
             </a:r>
           </a:p>
@@ -13786,14 +16204,21 @@
               <a:spcAft>
                 <a:spcPts val="400"/>
               </a:spcAft>
-              <a:defRPr sz="1500" b="0">
+              <a:defRPr sz="1500" b="0" lang="th-TH">
                 <a:solidFill>
                   <a:srgbClr val="576975"/>
                 </a:solidFill>
                 <a:latin typeface="Tahoma"/>
-              </a:defRPr>
-            </a:pPr>
-            <a:r>
+                <a:ea typeface="Tahoma"/>
+                <a:cs typeface="Tahoma"/>
+              </a:defRPr>
+            </a:pPr>
+            <a:r>
+              <a:rPr lang="th-TH">
+                <a:latin typeface="Tahoma"/>
+                <a:ea typeface="Tahoma"/>
+                <a:cs typeface="Tahoma"/>
+              </a:rPr>
               <a:t>ผลต่างด้านเครื่องและโจทย์ทำให้ย้ายตัวเลขจากบทความมาอ้างกับระบบบ้านไม่ได้ตรง ๆ</a:t>
             </a:r>
           </a:p>
@@ -13860,14 +16285,21 @@
               <a:spcAft>
                 <a:spcPts val="400"/>
               </a:spcAft>
-              <a:defRPr sz="900" b="0">
+              <a:defRPr sz="900" b="0" lang="th-TH">
                 <a:solidFill>
                   <a:srgbClr val="576975"/>
                 </a:solidFill>
                 <a:latin typeface="Tahoma"/>
-              </a:defRPr>
-            </a:pPr>
-            <a:r>
+                <a:ea typeface="Tahoma"/>
+                <a:cs typeface="Tahoma"/>
+              </a:defRPr>
+            </a:pPr>
+            <a:r>
+              <a:rPr lang="th-TH">
+                <a:latin typeface="Tahoma"/>
+                <a:ea typeface="Tahoma"/>
+                <a:cs typeface="Tahoma"/>
+              </a:rPr>
               <a:t>โครงงานคอมพิวเตอร์ | รายงานความก้าวหน้า | 18 ต.ค. 2569</a:t>
             </a:r>
           </a:p>
@@ -13899,14 +16331,21 @@
               <a:spcAft>
                 <a:spcPts val="400"/>
               </a:spcAft>
-              <a:defRPr sz="900" b="0">
+              <a:defRPr sz="900" b="0" lang="th-TH">
                 <a:solidFill>
                   <a:srgbClr val="576975"/>
                 </a:solidFill>
                 <a:latin typeface="Tahoma"/>
-              </a:defRPr>
-            </a:pPr>
-            <a:r>
+                <a:ea typeface="Tahoma"/>
+                <a:cs typeface="Tahoma"/>
+              </a:defRPr>
+            </a:pPr>
+            <a:r>
+              <a:rPr lang="th-TH">
+                <a:latin typeface="Tahoma"/>
+                <a:ea typeface="Tahoma"/>
+                <a:cs typeface="Tahoma"/>
+              </a:rPr>
               <a:t>7</a:t>
             </a:r>
           </a:p>
@@ -14024,14 +16463,21 @@
               <a:spcAft>
                 <a:spcPts val="400"/>
               </a:spcAft>
-              <a:defRPr sz="2200" b="1">
+              <a:defRPr sz="2200" b="1" lang="th-TH">
                 <a:solidFill>
                   <a:srgbClr val="1D2A5D"/>
                 </a:solidFill>
                 <a:latin typeface="Tahoma"/>
-              </a:defRPr>
-            </a:pPr>
-            <a:r>
+                <a:ea typeface="Tahoma"/>
+                <a:cs typeface="Tahoma"/>
+              </a:defRPr>
+            </a:pPr>
+            <a:r>
+              <a:rPr lang="th-TH">
+                <a:latin typeface="Tahoma"/>
+                <a:ea typeface="Tahoma"/>
+                <a:cs typeface="Tahoma"/>
+              </a:rPr>
               <a:t>แนวโน้มร่วม</a:t>
             </a:r>
           </a:p>
@@ -14063,14 +16509,21 @@
               <a:spcAft>
                 <a:spcPts val="400"/>
               </a:spcAft>
-              <a:defRPr sz="1800" b="0">
+              <a:defRPr sz="1800" b="0" lang="th-TH">
                 <a:solidFill>
                   <a:srgbClr val="1D2F3E"/>
                 </a:solidFill>
                 <a:latin typeface="Tahoma"/>
-              </a:defRPr>
-            </a:pPr>
-            <a:r>
+                <a:ea typeface="Tahoma"/>
+                <a:cs typeface="Tahoma"/>
+              </a:defRPr>
+            </a:pPr>
+            <a:r>
+              <a:rPr lang="th-TH">
+                <a:latin typeface="Tahoma"/>
+                <a:ea typeface="Tahoma"/>
+                <a:cs typeface="Tahoma"/>
+              </a:rPr>
               <a:t>ใช้การบีบอัดเพื่อลดภาระทรัพยากร</a:t>
             </a:r>
           </a:p>
@@ -14079,14 +16532,21 @@
               <a:spcAft>
                 <a:spcPts val="400"/>
               </a:spcAft>
-              <a:defRPr sz="1800" b="0">
+              <a:defRPr sz="1800" b="0" lang="th-TH">
                 <a:solidFill>
                   <a:srgbClr val="1D2F3E"/>
                 </a:solidFill>
                 <a:latin typeface="Tahoma"/>
-              </a:defRPr>
-            </a:pPr>
-            <a:r>
+                <a:ea typeface="Tahoma"/>
+                <a:cs typeface="Tahoma"/>
+              </a:defRPr>
+            </a:pPr>
+            <a:r>
+              <a:rPr lang="th-TH">
+                <a:latin typeface="Tahoma"/>
+                <a:ea typeface="Tahoma"/>
+                <a:cs typeface="Tahoma"/>
+              </a:rPr>
               <a:t>ให้ความสำคัญกับการประมวลผลใกล้ข้อมูล</a:t>
             </a:r>
           </a:p>
@@ -14095,14 +16555,21 @@
               <a:spcAft>
                 <a:spcPts val="400"/>
               </a:spcAft>
-              <a:defRPr sz="1800" b="0">
+              <a:defRPr sz="1800" b="0" lang="th-TH">
                 <a:solidFill>
                   <a:srgbClr val="1D2F3E"/>
                 </a:solidFill>
                 <a:latin typeface="Tahoma"/>
-              </a:defRPr>
-            </a:pPr>
-            <a:r>
+                <a:ea typeface="Tahoma"/>
+                <a:cs typeface="Tahoma"/>
+              </a:defRPr>
+            </a:pPr>
+            <a:r>
+              <a:rPr lang="th-TH">
+                <a:latin typeface="Tahoma"/>
+                <a:ea typeface="Tahoma"/>
+                <a:cs typeface="Tahoma"/>
+              </a:rPr>
               <a:t>ออกแบบชั้นเชื่อม IoT ให้ใช้ทรัพยากรต่ำ</a:t>
             </a:r>
           </a:p>
@@ -14134,14 +16601,21 @@
               <a:spcAft>
                 <a:spcPts val="400"/>
               </a:spcAft>
-              <a:defRPr sz="2200" b="1">
+              <a:defRPr sz="2200" b="1" lang="th-TH">
                 <a:solidFill>
                   <a:srgbClr val="1D2A5D"/>
                 </a:solidFill>
                 <a:latin typeface="Tahoma"/>
-              </a:defRPr>
-            </a:pPr>
-            <a:r>
+                <a:ea typeface="Tahoma"/>
+                <a:cs typeface="Tahoma"/>
+              </a:defRPr>
+            </a:pPr>
+            <a:r>
+              <a:rPr lang="th-TH">
+                <a:latin typeface="Tahoma"/>
+                <a:ea typeface="Tahoma"/>
+                <a:cs typeface="Tahoma"/>
+              </a:rPr>
               <a:t>ความต่างที่มีผลต่อการนำมาใช้</a:t>
             </a:r>
           </a:p>
@@ -14173,14 +16647,21 @@
               <a:spcAft>
                 <a:spcPts val="400"/>
               </a:spcAft>
-              <a:defRPr sz="1800" b="0">
+              <a:defRPr sz="1800" b="0" lang="th-TH">
                 <a:solidFill>
                   <a:srgbClr val="1D2F3E"/>
                 </a:solidFill>
                 <a:latin typeface="Tahoma"/>
-              </a:defRPr>
-            </a:pPr>
-            <a:r>
+                <a:ea typeface="Tahoma"/>
+                <a:cs typeface="Tahoma"/>
+              </a:defRPr>
+            </a:pPr>
+            <a:r>
+              <a:rPr lang="th-TH">
+                <a:latin typeface="Tahoma"/>
+                <a:ea typeface="Tahoma"/>
+                <a:cs typeface="Tahoma"/>
+              </a:rPr>
               <a:t>อุปกรณ์ตั้งแต่ SBC ถึง GPU ระดับศูนย์ข้อมูล</a:t>
             </a:r>
           </a:p>
@@ -14189,14 +16670,21 @@
               <a:spcAft>
                 <a:spcPts val="400"/>
               </a:spcAft>
-              <a:defRPr sz="1800" b="0">
+              <a:defRPr sz="1800" b="0" lang="th-TH">
                 <a:solidFill>
                   <a:srgbClr val="1D2F3E"/>
                 </a:solidFill>
                 <a:latin typeface="Tahoma"/>
-              </a:defRPr>
-            </a:pPr>
-            <a:r>
+                <a:ea typeface="Tahoma"/>
+                <a:cs typeface="Tahoma"/>
+              </a:defRPr>
+            </a:pPr>
+            <a:r>
+              <a:rPr lang="th-TH">
+                <a:latin typeface="Tahoma"/>
+                <a:ea typeface="Tahoma"/>
+                <a:cs typeface="Tahoma"/>
+              </a:rPr>
               <a:t>บางระบบเป็น hybrid บางระบบอยู่ในเครื่อง</a:t>
             </a:r>
           </a:p>
@@ -14205,14 +16693,21 @@
               <a:spcAft>
                 <a:spcPts val="400"/>
               </a:spcAft>
-              <a:defRPr sz="1800" b="0">
+              <a:defRPr sz="1800" b="0" lang="th-TH">
                 <a:solidFill>
                   <a:srgbClr val="1D2F3E"/>
                 </a:solidFill>
                 <a:latin typeface="Tahoma"/>
-              </a:defRPr>
-            </a:pPr>
-            <a:r>
+                <a:ea typeface="Tahoma"/>
+                <a:cs typeface="Tahoma"/>
+              </a:defRPr>
+            </a:pPr>
+            <a:r>
+              <a:rPr lang="th-TH">
+                <a:latin typeface="Tahoma"/>
+                <a:ea typeface="Tahoma"/>
+                <a:cs typeface="Tahoma"/>
+              </a:rPr>
               <a:t>โจทย์และตัววัดไม่ตรงกับใบซื้อสินค้าไทย/อังกฤษ</a:t>
             </a:r>
           </a:p>
@@ -14244,14 +16739,21 @@
               <a:spcAft>
                 <a:spcPts val="400"/>
               </a:spcAft>
-              <a:defRPr sz="1900" b="1">
+              <a:defRPr sz="1900" b="1" lang="th-TH">
                 <a:solidFill>
                   <a:srgbClr val="1D2A5D"/>
                 </a:solidFill>
                 <a:latin typeface="Tahoma"/>
-              </a:defRPr>
-            </a:pPr>
-            <a:r>
+                <a:ea typeface="Tahoma"/>
+                <a:cs typeface="Tahoma"/>
+              </a:defRPr>
+            </a:pPr>
+            <a:r>
+              <a:rPr lang="th-TH">
+                <a:latin typeface="Tahoma"/>
+                <a:ea typeface="Tahoma"/>
+                <a:cs typeface="Tahoma"/>
+              </a:rPr>
               <a:t>จึงต้องทดสอบกับข้อมูลและ pipeline ของโครงงานเอง โดยรายงานผล PC และ NPU แยกกัน</a:t>
             </a:r>
           </a:p>
@@ -14309,14 +16811,21 @@
               <a:spcAft>
                 <a:spcPts val="400"/>
               </a:spcAft>
-              <a:defRPr sz="2800" b="1">
+              <a:defRPr sz="2800" b="1" lang="th-TH">
                 <a:solidFill>
                   <a:srgbClr val="FFFFFF"/>
                 </a:solidFill>
                 <a:latin typeface="Tahoma"/>
-              </a:defRPr>
-            </a:pPr>
-            <a:r>
+                <a:ea typeface="Tahoma"/>
+                <a:cs typeface="Tahoma"/>
+              </a:defRPr>
+            </a:pPr>
+            <a:r>
+              <a:rPr lang="th-TH">
+                <a:latin typeface="Tahoma"/>
+                <a:ea typeface="Tahoma"/>
+                <a:cs typeface="Tahoma"/>
+              </a:rPr>
               <a:t>ช่องว่างที่โครงงานจะศึกษา</a:t>
             </a:r>
           </a:p>
@@ -14348,14 +16857,21 @@
               <a:spcAft>
                 <a:spcPts val="400"/>
               </a:spcAft>
-              <a:defRPr sz="1500" b="0">
+              <a:defRPr sz="1500" b="0" lang="th-TH">
                 <a:solidFill>
                   <a:srgbClr val="FFFFFF"/>
                 </a:solidFill>
                 <a:latin typeface="Tahoma"/>
-              </a:defRPr>
-            </a:pPr>
-            <a:r>
+                <a:ea typeface="Tahoma"/>
+                <a:cs typeface="Tahoma"/>
+              </a:defRPr>
+            </a:pPr>
+            <a:r>
+              <a:rPr lang="th-TH">
+                <a:latin typeface="Tahoma"/>
+                <a:ea typeface="Tahoma"/>
+                <a:cs typeface="Tahoma"/>
+              </a:rPr>
               <a:t>งานที่ทบทวนมักรายงานผลของแต่ละชั้นแยกกัน</a:t>
             </a:r>
           </a:p>
@@ -14422,14 +16938,21 @@
               <a:spcAft>
                 <a:spcPts val="400"/>
               </a:spcAft>
-              <a:defRPr sz="900" b="0">
+              <a:defRPr sz="900" b="0" lang="th-TH">
                 <a:solidFill>
                   <a:srgbClr val="FFFFFF"/>
                 </a:solidFill>
                 <a:latin typeface="Tahoma"/>
-              </a:defRPr>
-            </a:pPr>
-            <a:r>
+                <a:ea typeface="Tahoma"/>
+                <a:cs typeface="Tahoma"/>
+              </a:defRPr>
+            </a:pPr>
+            <a:r>
+              <a:rPr lang="th-TH">
+                <a:latin typeface="Tahoma"/>
+                <a:ea typeface="Tahoma"/>
+                <a:cs typeface="Tahoma"/>
+              </a:rPr>
               <a:t>โครงงานคอมพิวเตอร์ | รายงานความก้าวหน้า | 18 ต.ค. 2569</a:t>
             </a:r>
           </a:p>
@@ -14461,14 +16984,21 @@
               <a:spcAft>
                 <a:spcPts val="400"/>
               </a:spcAft>
-              <a:defRPr sz="900" b="0">
+              <a:defRPr sz="900" b="0" lang="th-TH">
                 <a:solidFill>
                   <a:srgbClr val="FFFFFF"/>
                 </a:solidFill>
                 <a:latin typeface="Tahoma"/>
-              </a:defRPr>
-            </a:pPr>
-            <a:r>
+                <a:ea typeface="Tahoma"/>
+                <a:cs typeface="Tahoma"/>
+              </a:defRPr>
+            </a:pPr>
+            <a:r>
+              <a:rPr lang="th-TH">
+                <a:latin typeface="Tahoma"/>
+                <a:ea typeface="Tahoma"/>
+                <a:cs typeface="Tahoma"/>
+              </a:rPr>
               <a:t>8</a:t>
             </a:r>
           </a:p>
@@ -14543,14 +17073,21 @@
               <a:spcAft>
                 <a:spcPts val="400"/>
               </a:spcAft>
-              <a:defRPr sz="1900" b="1">
+              <a:defRPr sz="1900" b="1" lang="th-TH">
                 <a:solidFill>
                   <a:srgbClr val="FFFFFF"/>
                 </a:solidFill>
                 <a:latin typeface="Tahoma"/>
-              </a:defRPr>
-            </a:pPr>
-            <a:r>
+                <a:ea typeface="Tahoma"/>
+                <a:cs typeface="Tahoma"/>
+              </a:defRPr>
+            </a:pPr>
+            <a:r>
+              <a:rPr lang="th-TH">
+                <a:latin typeface="Tahoma"/>
+                <a:ea typeface="Tahoma"/>
+                <a:cs typeface="Tahoma"/>
+              </a:rPr>
               <a:t>โมเดล / ฮาร์ดแวร์</a:t>
             </a:r>
           </a:p>
@@ -14625,14 +17162,21 @@
               <a:spcAft>
                 <a:spcPts val="400"/>
               </a:spcAft>
-              <a:defRPr sz="1900" b="1">
+              <a:defRPr sz="1900" b="1" lang="th-TH">
                 <a:solidFill>
                   <a:srgbClr val="FFFFFF"/>
                 </a:solidFill>
                 <a:latin typeface="Tahoma"/>
-              </a:defRPr>
-            </a:pPr>
-            <a:r>
+                <a:ea typeface="Tahoma"/>
+                <a:cs typeface="Tahoma"/>
+              </a:defRPr>
+            </a:pPr>
+            <a:r>
+              <a:rPr lang="th-TH">
+                <a:latin typeface="Tahoma"/>
+                <a:ea typeface="Tahoma"/>
+                <a:cs typeface="Tahoma"/>
+              </a:rPr>
               <a:t>JSON / ความถูกต้อง</a:t>
             </a:r>
           </a:p>
@@ -14707,14 +17251,21 @@
               <a:spcAft>
                 <a:spcPts val="400"/>
               </a:spcAft>
-              <a:defRPr sz="1900" b="1">
+              <a:defRPr sz="1900" b="1" lang="th-TH">
                 <a:solidFill>
                   <a:srgbClr val="FFFFFF"/>
                 </a:solidFill>
                 <a:latin typeface="Tahoma"/>
-              </a:defRPr>
-            </a:pPr>
-            <a:r>
+                <a:ea typeface="Tahoma"/>
+                <a:cs typeface="Tahoma"/>
+              </a:defRPr>
+            </a:pPr>
+            <a:r>
+              <a:rPr lang="th-TH">
+                <a:latin typeface="Tahoma"/>
+                <a:ea typeface="Tahoma"/>
+                <a:cs typeface="Tahoma"/>
+              </a:rPr>
               <a:t>ระบบบ้าน / ปลายน้ำ</a:t>
             </a:r>
           </a:p>
@@ -14746,14 +17297,21 @@
               <a:spcAft>
                 <a:spcPts val="400"/>
               </a:spcAft>
-              <a:defRPr sz="1900" b="1">
+              <a:defRPr sz="1900" b="1" lang="th-TH">
                 <a:solidFill>
                   <a:srgbClr val="FFD37B"/>
                 </a:solidFill>
                 <a:latin typeface="Tahoma"/>
-              </a:defRPr>
-            </a:pPr>
-            <a:r>
+                <a:ea typeface="Tahoma"/>
+                <a:cs typeface="Tahoma"/>
+              </a:defRPr>
+            </a:pPr>
+            <a:r>
+              <a:rPr lang="th-TH">
+                <a:latin typeface="Tahoma"/>
+                <a:ea typeface="Tahoma"/>
+                <a:cs typeface="Tahoma"/>
+              </a:rPr>
               <a:t>คำถามวิจัย</a:t>
             </a:r>
           </a:p>
@@ -14785,14 +17343,21 @@
               <a:spcAft>
                 <a:spcPts val="400"/>
               </a:spcAft>
-              <a:defRPr sz="2500" b="1">
+              <a:defRPr sz="2500" b="1" lang="th-TH">
                 <a:solidFill>
                   <a:srgbClr val="FFFFFF"/>
                 </a:solidFill>
                 <a:latin typeface="Tahoma"/>
-              </a:defRPr>
-            </a:pPr>
-            <a:r>
+                <a:ea typeface="Tahoma"/>
+                <a:cs typeface="Tahoma"/>
+              </a:defRPr>
+            </a:pPr>
+            <a:r>
+              <a:rPr lang="th-TH">
+                <a:latin typeface="Tahoma"/>
+                <a:ea typeface="Tahoma"/>
+                <a:cs typeface="Tahoma"/>
+              </a:rPr>
               <a:t>เมื่อนำขั้นตอนเหล่านี้มาต่อกันบนทรัพยากรจำกัด</a:t>
             </a:r>
           </a:p>
@@ -14801,14 +17366,21 @@
               <a:spcAft>
                 <a:spcPts val="400"/>
               </a:spcAft>
-              <a:defRPr sz="2500" b="1">
+              <a:defRPr sz="2500" b="1" lang="th-TH">
                 <a:solidFill>
                   <a:srgbClr val="FFFFFF"/>
                 </a:solidFill>
                 <a:latin typeface="Tahoma"/>
-              </a:defRPr>
-            </a:pPr>
-            <a:r>
+                <a:ea typeface="Tahoma"/>
+                <a:cs typeface="Tahoma"/>
+              </a:defRPr>
+            </a:pPr>
+            <a:r>
+              <a:rPr lang="th-TH">
+                <a:latin typeface="Tahoma"/>
+                <a:ea typeface="Tahoma"/>
+                <a:cs typeface="Tahoma"/>
+              </a:rPr>
               <a:t>ความผิดพลาดของข้อมูลกับต้นทุนประมวลผลเปลี่ยนอย่างไร?</a:t>
             </a:r>
           </a:p>
@@ -14840,14 +17412,21 @@
               <a:spcAft>
                 <a:spcPts val="400"/>
               </a:spcAft>
-              <a:defRPr sz="1500" b="0">
+              <a:defRPr sz="1500" b="0" lang="th-TH">
                 <a:solidFill>
                   <a:srgbClr val="FFFFFF"/>
                 </a:solidFill>
                 <a:latin typeface="Tahoma"/>
-              </a:defRPr>
-            </a:pPr>
-            <a:r>
+                <a:ea typeface="Tahoma"/>
+                <a:cs typeface="Tahoma"/>
+              </a:defRPr>
+            </a:pPr>
+            <a:r>
+              <a:rPr lang="th-TH">
+                <a:latin typeface="Tahoma"/>
+                <a:ea typeface="Tahoma"/>
+                <a:cs typeface="Tahoma"/>
+              </a:rPr>
               <a:t>ผลนำร่อง e-Eye เป็นหลักฐานแรกของคำถามนี้ ยังไม่ใช่ผลครบทั้งระบบ</a:t>
             </a:r>
           </a:p>
@@ -14905,14 +17484,21 @@
               <a:spcAft>
                 <a:spcPts val="400"/>
               </a:spcAft>
-              <a:defRPr sz="2800" b="1">
+              <a:defRPr sz="2800" b="1" lang="th-TH">
                 <a:solidFill>
                   <a:srgbClr val="1D2A5D"/>
                 </a:solidFill>
                 <a:latin typeface="Tahoma"/>
-              </a:defRPr>
-            </a:pPr>
-            <a:r>
+                <a:ea typeface="Tahoma"/>
+                <a:cs typeface="Tahoma"/>
+              </a:defRPr>
+            </a:pPr>
+            <a:r>
+              <a:rPr lang="th-TH">
+                <a:latin typeface="Tahoma"/>
+                <a:ea typeface="Tahoma"/>
+                <a:cs typeface="Tahoma"/>
+              </a:rPr>
               <a:t>สถาปัตยกรรมเชิงแนวคิดของโครงงาน</a:t>
             </a:r>
           </a:p>
@@ -14944,14 +17530,21 @@
               <a:spcAft>
                 <a:spcPts val="400"/>
               </a:spcAft>
-              <a:defRPr sz="1500" b="0">
+              <a:defRPr sz="1500" b="0" lang="th-TH">
                 <a:solidFill>
                   <a:srgbClr val="576975"/>
                 </a:solidFill>
                 <a:latin typeface="Tahoma"/>
-              </a:defRPr>
-            </a:pPr>
-            <a:r>
+                <a:ea typeface="Tahoma"/>
+                <a:cs typeface="Tahoma"/>
+              </a:defRPr>
+            </a:pPr>
+            <a:r>
+              <a:rPr lang="th-TH">
+                <a:latin typeface="Tahoma"/>
+                <a:ea typeface="Tahoma"/>
+                <a:cs typeface="Tahoma"/>
+              </a:rPr>
               <a:t>ภาพรวมสามชั้นจากรายงานทบทวนวรรณกรรม พร้อมสถานะปัจจุบัน</a:t>
             </a:r>
           </a:p>
@@ -15018,14 +17611,21 @@
               <a:spcAft>
                 <a:spcPts val="400"/>
               </a:spcAft>
-              <a:defRPr sz="900" b="0">
+              <a:defRPr sz="900" b="0" lang="th-TH">
                 <a:solidFill>
                   <a:srgbClr val="576975"/>
                 </a:solidFill>
                 <a:latin typeface="Tahoma"/>
-              </a:defRPr>
-            </a:pPr>
-            <a:r>
+                <a:ea typeface="Tahoma"/>
+                <a:cs typeface="Tahoma"/>
+              </a:defRPr>
+            </a:pPr>
+            <a:r>
+              <a:rPr lang="th-TH">
+                <a:latin typeface="Tahoma"/>
+                <a:ea typeface="Tahoma"/>
+                <a:cs typeface="Tahoma"/>
+              </a:rPr>
               <a:t>โครงงานคอมพิวเตอร์ | รายงานความก้าวหน้า | 18 ต.ค. 2569</a:t>
             </a:r>
           </a:p>
@@ -15057,14 +17657,21 @@
               <a:spcAft>
                 <a:spcPts val="400"/>
               </a:spcAft>
-              <a:defRPr sz="900" b="0">
+              <a:defRPr sz="900" b="0" lang="th-TH">
                 <a:solidFill>
                   <a:srgbClr val="576975"/>
                 </a:solidFill>
                 <a:latin typeface="Tahoma"/>
-              </a:defRPr>
-            </a:pPr>
-            <a:r>
+                <a:ea typeface="Tahoma"/>
+                <a:cs typeface="Tahoma"/>
+              </a:defRPr>
+            </a:pPr>
+            <a:r>
+              <a:rPr lang="th-TH">
+                <a:latin typeface="Tahoma"/>
+                <a:ea typeface="Tahoma"/>
+                <a:cs typeface="Tahoma"/>
+              </a:rPr>
               <a:t>9</a:t>
             </a:r>
           </a:p>
@@ -15139,14 +17746,21 @@
               <a:spcAft>
                 <a:spcPts val="400"/>
               </a:spcAft>
-              <a:defRPr sz="2300" b="1">
+              <a:defRPr sz="2300" b="1" lang="th-TH">
                 <a:solidFill>
                   <a:srgbClr val="FFFFFF"/>
                 </a:solidFill>
                 <a:latin typeface="Tahoma"/>
-              </a:defRPr>
-            </a:pPr>
-            <a:r>
+                <a:ea typeface="Tahoma"/>
+                <a:cs typeface="Tahoma"/>
+              </a:defRPr>
+            </a:pPr>
+            <a:r>
+              <a:rPr lang="th-TH">
+                <a:latin typeface="Tahoma"/>
+                <a:ea typeface="Tahoma"/>
+                <a:cs typeface="Tahoma"/>
+              </a:rPr>
               <a:t>1</a:t>
             </a:r>
           </a:p>
@@ -15221,14 +17835,21 @@
               <a:spcAft>
                 <a:spcPts val="400"/>
               </a:spcAft>
-              <a:defRPr sz="1900" b="1">
+              <a:defRPr sz="1900" b="1" lang="th-TH">
                 <a:solidFill>
                   <a:srgbClr val="1D2A5D"/>
                 </a:solidFill>
                 <a:latin typeface="Tahoma"/>
-              </a:defRPr>
-            </a:pPr>
-            <a:r>
+                <a:ea typeface="Tahoma"/>
+                <a:cs typeface="Tahoma"/>
+              </a:defRPr>
+            </a:pPr>
+            <a:r>
+              <a:rPr lang="th-TH">
+                <a:latin typeface="Tahoma"/>
+                <a:ea typeface="Tahoma"/>
+                <a:cs typeface="Tahoma"/>
+              </a:rPr>
               <a:t>รับรู้และสกัด</a:t>
             </a:r>
           </a:p>
@@ -15260,14 +17881,21 @@
               <a:spcAft>
                 <a:spcPts val="400"/>
               </a:spcAft>
-              <a:defRPr sz="1700" b="0">
+              <a:defRPr sz="1700" b="0" lang="th-TH">
                 <a:solidFill>
                   <a:srgbClr val="1D2F3E"/>
                 </a:solidFill>
                 <a:latin typeface="Tahoma"/>
-              </a:defRPr>
-            </a:pPr>
-            <a:r>
+                <a:ea typeface="Tahoma"/>
+                <a:cs typeface="Tahoma"/>
+              </a:defRPr>
+            </a:pPr>
+            <a:r>
+              <a:rPr lang="th-TH">
+                <a:latin typeface="Tahoma"/>
+                <a:ea typeface="Tahoma"/>
+                <a:cs typeface="Tahoma"/>
+              </a:rPr>
               <a:t>ภาพถ่ายก่อน; IP Camera ตามแผน → YOLO → OCR</a:t>
             </a:r>
           </a:p>
@@ -15299,14 +17927,21 @@
               <a:spcAft>
                 <a:spcPts val="400"/>
               </a:spcAft>
-              <a:defRPr sz="1300" b="1">
+              <a:defRPr sz="1300" b="1" lang="th-TH">
                 <a:solidFill>
                   <a:srgbClr val="006289"/>
                 </a:solidFill>
                 <a:latin typeface="Tahoma"/>
-              </a:defRPr>
-            </a:pPr>
-            <a:r>
+                <a:ea typeface="Tahoma"/>
+                <a:cs typeface="Tahoma"/>
+              </a:defRPr>
+            </a:pPr>
+            <a:r>
+              <a:rPr lang="th-TH">
+                <a:latin typeface="Tahoma"/>
+                <a:ea typeface="Tahoma"/>
+                <a:cs typeface="Tahoma"/>
+              </a:rPr>
               <a:t>มีผลนำร่องบน PC</a:t>
             </a:r>
           </a:p>
@@ -15381,14 +18016,21 @@
               <a:spcAft>
                 <a:spcPts val="400"/>
               </a:spcAft>
-              <a:defRPr sz="2300" b="1">
+              <a:defRPr sz="2300" b="1" lang="th-TH">
                 <a:solidFill>
                   <a:srgbClr val="FFFFFF"/>
                 </a:solidFill>
                 <a:latin typeface="Tahoma"/>
-              </a:defRPr>
-            </a:pPr>
-            <a:r>
+                <a:ea typeface="Tahoma"/>
+                <a:cs typeface="Tahoma"/>
+              </a:defRPr>
+            </a:pPr>
+            <a:r>
+              <a:rPr lang="th-TH">
+                <a:latin typeface="Tahoma"/>
+                <a:ea typeface="Tahoma"/>
+                <a:cs typeface="Tahoma"/>
+              </a:rPr>
               <a:t>2</a:t>
             </a:r>
           </a:p>
@@ -15463,14 +18105,21 @@
               <a:spcAft>
                 <a:spcPts val="400"/>
               </a:spcAft>
-              <a:defRPr sz="1900" b="1">
+              <a:defRPr sz="1900" b="1" lang="th-TH">
                 <a:solidFill>
                   <a:srgbClr val="1D2A5D"/>
                 </a:solidFill>
                 <a:latin typeface="Tahoma"/>
-              </a:defRPr>
-            </a:pPr>
-            <a:r>
+                <a:ea typeface="Tahoma"/>
+                <a:cs typeface="Tahoma"/>
+              </a:defRPr>
+            </a:pPr>
+            <a:r>
+              <a:rPr lang="th-TH">
+                <a:latin typeface="Tahoma"/>
+                <a:ea typeface="Tahoma"/>
+                <a:cs typeface="Tahoma"/>
+              </a:rPr>
               <a:t>ประมวลผลในเครื่อง</a:t>
             </a:r>
           </a:p>
@@ -15502,14 +18151,21 @@
               <a:spcAft>
                 <a:spcPts val="400"/>
               </a:spcAft>
-              <a:defRPr sz="1700" b="0">
+              <a:defRPr sz="1700" b="0" lang="th-TH">
                 <a:solidFill>
                   <a:srgbClr val="1D2F3E"/>
                 </a:solidFill>
                 <a:latin typeface="Tahoma"/>
-              </a:defRPr>
-            </a:pPr>
-            <a:r>
+                <a:ea typeface="Tahoma"/>
+                <a:cs typeface="Tahoma"/>
+              </a:defRPr>
+            </a:pPr>
+            <a:r>
+              <a:rPr lang="th-TH">
+                <a:latin typeface="Tahoma"/>
+                <a:ea typeface="Tahoma"/>
+                <a:cs typeface="Tahoma"/>
+              </a:rPr>
               <a:t>Quantized Local LLM + grammar → JSON ที่ตรวจได้</a:t>
             </a:r>
           </a:p>
@@ -15541,14 +18197,21 @@
               <a:spcAft>
                 <a:spcPts val="400"/>
               </a:spcAft>
-              <a:defRPr sz="1300" b="1">
+              <a:defRPr sz="1300" b="1" lang="th-TH">
                 <a:solidFill>
                   <a:srgbClr val="137E9A"/>
                 </a:solidFill>
                 <a:latin typeface="Tahoma"/>
-              </a:defRPr>
-            </a:pPr>
-            <a:r>
+                <a:ea typeface="Tahoma"/>
+                <a:cs typeface="Tahoma"/>
+              </a:defRPr>
+            </a:pPr>
+            <a:r>
+              <a:rPr lang="th-TH">
+                <a:latin typeface="Tahoma"/>
+                <a:ea typeface="Tahoma"/>
+                <a:cs typeface="Tahoma"/>
+              </a:rPr>
               <a:t>อยู่ในแผนทดลอง</a:t>
             </a:r>
           </a:p>
@@ -15623,14 +18286,21 @@
               <a:spcAft>
                 <a:spcPts val="400"/>
               </a:spcAft>
-              <a:defRPr sz="2300" b="1">
+              <a:defRPr sz="2300" b="1" lang="th-TH">
                 <a:solidFill>
                   <a:srgbClr val="FFFFFF"/>
                 </a:solidFill>
                 <a:latin typeface="Tahoma"/>
-              </a:defRPr>
-            </a:pPr>
-            <a:r>
+                <a:ea typeface="Tahoma"/>
+                <a:cs typeface="Tahoma"/>
+              </a:defRPr>
+            </a:pPr>
+            <a:r>
+              <a:rPr lang="th-TH">
+                <a:latin typeface="Tahoma"/>
+                <a:ea typeface="Tahoma"/>
+                <a:cs typeface="Tahoma"/>
+              </a:rPr>
               <a:t>3</a:t>
             </a:r>
           </a:p>
@@ -15705,14 +18375,21 @@
               <a:spcAft>
                 <a:spcPts val="400"/>
               </a:spcAft>
-              <a:defRPr sz="1900" b="1">
+              <a:defRPr sz="1900" b="1" lang="th-TH">
                 <a:solidFill>
                   <a:srgbClr val="1D2A5D"/>
                 </a:solidFill>
                 <a:latin typeface="Tahoma"/>
-              </a:defRPr>
-            </a:pPr>
-            <a:r>
+                <a:ea typeface="Tahoma"/>
+                <a:cs typeface="Tahoma"/>
+              </a:defRPr>
+            </a:pPr>
+            <a:r>
+              <a:rPr lang="th-TH">
+                <a:latin typeface="Tahoma"/>
+                <a:ea typeface="Tahoma"/>
+                <a:cs typeface="Tahoma"/>
+              </a:rPr>
               <a:t>ใช้งานปลายน้ำ</a:t>
             </a:r>
           </a:p>
@@ -15744,14 +18421,21 @@
               <a:spcAft>
                 <a:spcPts val="400"/>
               </a:spcAft>
-              <a:defRPr sz="1700" b="0">
+              <a:defRPr sz="1700" b="0" lang="th-TH">
                 <a:solidFill>
                   <a:srgbClr val="1D2F3E"/>
                 </a:solidFill>
                 <a:latin typeface="Tahoma"/>
-              </a:defRPr>
-            </a:pPr>
-            <a:r>
+                <a:ea typeface="Tahoma"/>
+                <a:cs typeface="Tahoma"/>
+              </a:defRPr>
+            </a:pPr>
+            <a:r>
+              <a:rPr lang="th-TH">
+                <a:latin typeface="Tahoma"/>
+                <a:ea typeface="Tahoma"/>
+                <a:cs typeface="Tahoma"/>
+              </a:rPr>
               <a:t>MQTT / Home Assistant → dashboard; burn rate เมื่อมีข้อมูลการใช้</a:t>
             </a:r>
           </a:p>
@@ -15783,14 +18467,21 @@
               <a:spcAft>
                 <a:spcPts val="400"/>
               </a:spcAft>
-              <a:defRPr sz="1300" b="1">
+              <a:defRPr sz="1300" b="1" lang="th-TH">
                 <a:solidFill>
                   <a:srgbClr val="1D2A5D"/>
                 </a:solidFill>
                 <a:latin typeface="Tahoma"/>
-              </a:defRPr>
-            </a:pPr>
-            <a:r>
+                <a:ea typeface="Tahoma"/>
+                <a:cs typeface="Tahoma"/>
+              </a:defRPr>
+            </a:pPr>
+            <a:r>
+              <a:rPr lang="th-TH">
+                <a:latin typeface="Tahoma"/>
+                <a:ea typeface="Tahoma"/>
+                <a:cs typeface="Tahoma"/>
+              </a:rPr>
               <a:t>อยู่ในแผนต่อยอด</a:t>
             </a:r>
           </a:p>
@@ -15822,14 +18513,21 @@
               <a:spcAft>
                 <a:spcPts val="400"/>
               </a:spcAft>
-              <a:defRPr sz="1400" b="0">
+              <a:defRPr sz="1400" b="0" lang="th-TH">
                 <a:solidFill>
                   <a:srgbClr val="576975"/>
                 </a:solidFill>
                 <a:latin typeface="Tahoma"/>
-              </a:defRPr>
-            </a:pPr>
-            <a:r>
+                <a:ea typeface="Tahoma"/>
+                <a:cs typeface="Tahoma"/>
+              </a:defRPr>
+            </a:pPr>
+            <a:r>
+              <a:rPr lang="th-TH">
+                <a:latin typeface="Tahoma"/>
+                <a:ea typeface="Tahoma"/>
+                <a:cs typeface="Tahoma"/>
+              </a:rPr>
               <a:t>ใบเสร็จบอกการซื้อเข้า; การคำนวณ burn rate ต้องมีข้อมูลคงเหลือหรือการใช้ตามเวลาเพิ่มเติม</a:t>
             </a:r>
           </a:p>
